--- a/PresentantionEV_Adoption.pptx
+++ b/PresentantionEV_Adoption.pptx
@@ -2,18 +2,21 @@
 <file path=ppt/presentation.xml><?xml version="1.0" encoding="utf-8"?>
 <p:presentation xmlns:a="http://schemas.openxmlformats.org/drawingml/2006/main" xmlns:r="http://schemas.openxmlformats.org/officeDocument/2006/relationships" xmlns:p="http://schemas.openxmlformats.org/presentationml/2006/main" saveSubsetFonts="1">
   <p:sldMasterIdLst>
-    <p:sldMasterId id="2147483648" r:id="rId1"/>
+    <p:sldMasterId id="2147483660" r:id="rId1"/>
   </p:sldMasterIdLst>
+  <p:notesMasterIdLst>
+    <p:notesMasterId r:id="rId3"/>
+  </p:notesMasterIdLst>
   <p:sldIdLst>
-    <p:sldId id="256" r:id="rId2"/>
+    <p:sldId id="258" r:id="rId2"/>
   </p:sldIdLst>
-  <p:sldSz cx="12192000" cy="6858000"/>
+  <p:sldSz cx="9144000" cy="6858000" type="screen4x3"/>
   <p:notesSz cx="6858000" cy="9144000"/>
   <p:defaultTextStyle>
     <a:defPPr>
       <a:defRPr lang="en-US"/>
     </a:defPPr>
-    <a:lvl1pPr marL="0" algn="l" defTabSz="914400" rtl="0" eaLnBrk="1" latinLnBrk="0" hangingPunct="1">
+    <a:lvl1pPr marL="0" algn="l" defTabSz="457200" rtl="0" eaLnBrk="1" latinLnBrk="0" hangingPunct="1">
       <a:defRPr sz="1800" kern="1200">
         <a:solidFill>
           <a:schemeClr val="tx1"/>
@@ -23,7 +26,7 @@
         <a:cs typeface="+mn-cs"/>
       </a:defRPr>
     </a:lvl1pPr>
-    <a:lvl2pPr marL="457200" algn="l" defTabSz="914400" rtl="0" eaLnBrk="1" latinLnBrk="0" hangingPunct="1">
+    <a:lvl2pPr marL="457200" algn="l" defTabSz="457200" rtl="0" eaLnBrk="1" latinLnBrk="0" hangingPunct="1">
       <a:defRPr sz="1800" kern="1200">
         <a:solidFill>
           <a:schemeClr val="tx1"/>
@@ -33,7 +36,7 @@
         <a:cs typeface="+mn-cs"/>
       </a:defRPr>
     </a:lvl2pPr>
-    <a:lvl3pPr marL="914400" algn="l" defTabSz="914400" rtl="0" eaLnBrk="1" latinLnBrk="0" hangingPunct="1">
+    <a:lvl3pPr marL="914400" algn="l" defTabSz="457200" rtl="0" eaLnBrk="1" latinLnBrk="0" hangingPunct="1">
       <a:defRPr sz="1800" kern="1200">
         <a:solidFill>
           <a:schemeClr val="tx1"/>
@@ -43,7 +46,7 @@
         <a:cs typeface="+mn-cs"/>
       </a:defRPr>
     </a:lvl3pPr>
-    <a:lvl4pPr marL="1371600" algn="l" defTabSz="914400" rtl="0" eaLnBrk="1" latinLnBrk="0" hangingPunct="1">
+    <a:lvl4pPr marL="1371600" algn="l" defTabSz="457200" rtl="0" eaLnBrk="1" latinLnBrk="0" hangingPunct="1">
       <a:defRPr sz="1800" kern="1200">
         <a:solidFill>
           <a:schemeClr val="tx1"/>
@@ -53,7 +56,7 @@
         <a:cs typeface="+mn-cs"/>
       </a:defRPr>
     </a:lvl4pPr>
-    <a:lvl5pPr marL="1828800" algn="l" defTabSz="914400" rtl="0" eaLnBrk="1" latinLnBrk="0" hangingPunct="1">
+    <a:lvl5pPr marL="1828800" algn="l" defTabSz="457200" rtl="0" eaLnBrk="1" latinLnBrk="0" hangingPunct="1">
       <a:defRPr sz="1800" kern="1200">
         <a:solidFill>
           <a:schemeClr val="tx1"/>
@@ -63,7 +66,7 @@
         <a:cs typeface="+mn-cs"/>
       </a:defRPr>
     </a:lvl5pPr>
-    <a:lvl6pPr marL="2286000" algn="l" defTabSz="914400" rtl="0" eaLnBrk="1" latinLnBrk="0" hangingPunct="1">
+    <a:lvl6pPr marL="2286000" algn="l" defTabSz="457200" rtl="0" eaLnBrk="1" latinLnBrk="0" hangingPunct="1">
       <a:defRPr sz="1800" kern="1200">
         <a:solidFill>
           <a:schemeClr val="tx1"/>
@@ -73,7 +76,7 @@
         <a:cs typeface="+mn-cs"/>
       </a:defRPr>
     </a:lvl6pPr>
-    <a:lvl7pPr marL="2743200" algn="l" defTabSz="914400" rtl="0" eaLnBrk="1" latinLnBrk="0" hangingPunct="1">
+    <a:lvl7pPr marL="2743200" algn="l" defTabSz="457200" rtl="0" eaLnBrk="1" latinLnBrk="0" hangingPunct="1">
       <a:defRPr sz="1800" kern="1200">
         <a:solidFill>
           <a:schemeClr val="tx1"/>
@@ -83,7 +86,7 @@
         <a:cs typeface="+mn-cs"/>
       </a:defRPr>
     </a:lvl7pPr>
-    <a:lvl8pPr marL="3200400" algn="l" defTabSz="914400" rtl="0" eaLnBrk="1" latinLnBrk="0" hangingPunct="1">
+    <a:lvl8pPr marL="3200400" algn="l" defTabSz="457200" rtl="0" eaLnBrk="1" latinLnBrk="0" hangingPunct="1">
       <a:defRPr sz="1800" kern="1200">
         <a:solidFill>
           <a:schemeClr val="tx1"/>
@@ -93,7 +96,7 @@
         <a:cs typeface="+mn-cs"/>
       </a:defRPr>
     </a:lvl8pPr>
-    <a:lvl9pPr marL="3657600" algn="l" defTabSz="914400" rtl="0" eaLnBrk="1" latinLnBrk="0" hangingPunct="1">
+    <a:lvl9pPr marL="3657600" algn="l" defTabSz="457200" rtl="0" eaLnBrk="1" latinLnBrk="0" hangingPunct="1">
       <a:defRPr sz="1800" kern="1200">
         <a:solidFill>
           <a:schemeClr val="tx1"/>
@@ -104,7 +107,658 @@
       </a:defRPr>
     </a:lvl9pPr>
   </p:defaultTextStyle>
+  <p:extLst>
+    <p:ext uri="{EFAFB233-063F-42B5-8137-9DF3F51BA10A}">
+      <p15:sldGuideLst xmlns:p15="http://schemas.microsoft.com/office/powerpoint/2012/main"/>
+    </p:ext>
+  </p:extLst>
 </p:presentation>
+</file>
+
+<file path=ppt/notesMasters/notesMaster1.xml><?xml version="1.0" encoding="utf-8"?>
+<p:notesMaster xmlns:a="http://schemas.openxmlformats.org/drawingml/2006/main" xmlns:r="http://schemas.openxmlformats.org/officeDocument/2006/relationships" xmlns:p="http://schemas.openxmlformats.org/presentationml/2006/main">
+  <p:cSld>
+    <p:bg>
+      <p:bgRef idx="1001">
+        <a:schemeClr val="bg1"/>
+      </p:bgRef>
+    </p:bg>
+    <p:spTree>
+      <p:nvGrpSpPr>
+        <p:cNvPr id="1" name=""/>
+        <p:cNvGrpSpPr/>
+        <p:nvPr/>
+      </p:nvGrpSpPr>
+      <p:grpSpPr>
+        <a:xfrm>
+          <a:off x="0" y="0"/>
+          <a:ext cx="0" cy="0"/>
+          <a:chOff x="0" y="0"/>
+          <a:chExt cx="0" cy="0"/>
+        </a:xfrm>
+      </p:grpSpPr>
+      <p:sp>
+        <p:nvSpPr>
+          <p:cNvPr id="2" name="Header Placeholder 1"/>
+          <p:cNvSpPr>
+            <a:spLocks noGrp="1"/>
+          </p:cNvSpPr>
+          <p:nvPr>
+            <p:ph type="hdr" sz="quarter"/>
+          </p:nvPr>
+        </p:nvSpPr>
+        <p:spPr>
+          <a:xfrm>
+            <a:off x="0" y="0"/>
+            <a:ext cx="2971800" cy="458788"/>
+          </a:xfrm>
+          <a:prstGeom prst="rect">
+            <a:avLst/>
+          </a:prstGeom>
+        </p:spPr>
+        <p:txBody>
+          <a:bodyPr vert="horz" lIns="91440" tIns="45720" rIns="91440" bIns="45720" rtlCol="0"/>
+          <a:lstStyle>
+            <a:lvl1pPr algn="l">
+              <a:defRPr sz="1200"/>
+            </a:lvl1pPr>
+          </a:lstStyle>
+          <a:p>
+            <a:endParaRPr lang="en-IE"/>
+          </a:p>
+        </p:txBody>
+      </p:sp>
+      <p:sp>
+        <p:nvSpPr>
+          <p:cNvPr id="3" name="Date Placeholder 2"/>
+          <p:cNvSpPr>
+            <a:spLocks noGrp="1"/>
+          </p:cNvSpPr>
+          <p:nvPr>
+            <p:ph type="dt" idx="1"/>
+          </p:nvPr>
+        </p:nvSpPr>
+        <p:spPr>
+          <a:xfrm>
+            <a:off x="3884613" y="0"/>
+            <a:ext cx="2971800" cy="458788"/>
+          </a:xfrm>
+          <a:prstGeom prst="rect">
+            <a:avLst/>
+          </a:prstGeom>
+        </p:spPr>
+        <p:txBody>
+          <a:bodyPr vert="horz" lIns="91440" tIns="45720" rIns="91440" bIns="45720" rtlCol="0"/>
+          <a:lstStyle>
+            <a:lvl1pPr algn="r">
+              <a:defRPr sz="1200"/>
+            </a:lvl1pPr>
+          </a:lstStyle>
+          <a:p>
+            <a:fld id="{274DBC10-9E9A-492A-BB4C-4026CCD27FD9}" type="datetimeFigureOut">
+              <a:rPr lang="en-IE" smtClean="0"/>
+              <a:t>24/05/2026</a:t>
+            </a:fld>
+            <a:endParaRPr lang="en-IE"/>
+          </a:p>
+        </p:txBody>
+      </p:sp>
+      <p:sp>
+        <p:nvSpPr>
+          <p:cNvPr id="4" name="Slide Image Placeholder 3"/>
+          <p:cNvSpPr>
+            <a:spLocks noGrp="1" noRot="1" noChangeAspect="1"/>
+          </p:cNvSpPr>
+          <p:nvPr>
+            <p:ph type="sldImg" idx="2"/>
+          </p:nvPr>
+        </p:nvSpPr>
+        <p:spPr>
+          <a:xfrm>
+            <a:off x="1371600" y="1143000"/>
+            <a:ext cx="4114800" cy="3086100"/>
+          </a:xfrm>
+          <a:prstGeom prst="rect">
+            <a:avLst/>
+          </a:prstGeom>
+          <a:noFill/>
+          <a:ln w="12700">
+            <a:solidFill>
+              <a:prstClr val="black"/>
+            </a:solidFill>
+          </a:ln>
+        </p:spPr>
+        <p:txBody>
+          <a:bodyPr vert="horz" lIns="91440" tIns="45720" rIns="91440" bIns="45720" rtlCol="0" anchor="ctr"/>
+          <a:lstStyle/>
+          <a:p>
+            <a:endParaRPr lang="en-IE"/>
+          </a:p>
+        </p:txBody>
+      </p:sp>
+      <p:sp>
+        <p:nvSpPr>
+          <p:cNvPr id="5" name="Notes Placeholder 4"/>
+          <p:cNvSpPr>
+            <a:spLocks noGrp="1"/>
+          </p:cNvSpPr>
+          <p:nvPr>
+            <p:ph type="body" sz="quarter" idx="3"/>
+          </p:nvPr>
+        </p:nvSpPr>
+        <p:spPr>
+          <a:xfrm>
+            <a:off x="685800" y="4400550"/>
+            <a:ext cx="5486400" cy="3600450"/>
+          </a:xfrm>
+          <a:prstGeom prst="rect">
+            <a:avLst/>
+          </a:prstGeom>
+        </p:spPr>
+        <p:txBody>
+          <a:bodyPr vert="horz" lIns="91440" tIns="45720" rIns="91440" bIns="45720" rtlCol="0"/>
+          <a:lstStyle/>
+          <a:p>
+            <a:pPr lvl="0"/>
+            <a:r>
+              <a:rPr lang="en-GB"/>
+              <a:t>Click to edit Master text styles</a:t>
+            </a:r>
+          </a:p>
+          <a:p>
+            <a:pPr lvl="1"/>
+            <a:r>
+              <a:rPr lang="en-GB"/>
+              <a:t>Second level</a:t>
+            </a:r>
+          </a:p>
+          <a:p>
+            <a:pPr lvl="2"/>
+            <a:r>
+              <a:rPr lang="en-GB"/>
+              <a:t>Third level</a:t>
+            </a:r>
+          </a:p>
+          <a:p>
+            <a:pPr lvl="3"/>
+            <a:r>
+              <a:rPr lang="en-GB"/>
+              <a:t>Fourth level</a:t>
+            </a:r>
+          </a:p>
+          <a:p>
+            <a:pPr lvl="4"/>
+            <a:r>
+              <a:rPr lang="en-GB"/>
+              <a:t>Fifth level</a:t>
+            </a:r>
+            <a:endParaRPr lang="en-IE"/>
+          </a:p>
+        </p:txBody>
+      </p:sp>
+      <p:sp>
+        <p:nvSpPr>
+          <p:cNvPr id="6" name="Footer Placeholder 5"/>
+          <p:cNvSpPr>
+            <a:spLocks noGrp="1"/>
+          </p:cNvSpPr>
+          <p:nvPr>
+            <p:ph type="ftr" sz="quarter" idx="4"/>
+          </p:nvPr>
+        </p:nvSpPr>
+        <p:spPr>
+          <a:xfrm>
+            <a:off x="0" y="8685213"/>
+            <a:ext cx="2971800" cy="458787"/>
+          </a:xfrm>
+          <a:prstGeom prst="rect">
+            <a:avLst/>
+          </a:prstGeom>
+        </p:spPr>
+        <p:txBody>
+          <a:bodyPr vert="horz" lIns="91440" tIns="45720" rIns="91440" bIns="45720" rtlCol="0" anchor="b"/>
+          <a:lstStyle>
+            <a:lvl1pPr algn="l">
+              <a:defRPr sz="1200"/>
+            </a:lvl1pPr>
+          </a:lstStyle>
+          <a:p>
+            <a:endParaRPr lang="en-IE"/>
+          </a:p>
+        </p:txBody>
+      </p:sp>
+      <p:sp>
+        <p:nvSpPr>
+          <p:cNvPr id="7" name="Slide Number Placeholder 6"/>
+          <p:cNvSpPr>
+            <a:spLocks noGrp="1"/>
+          </p:cNvSpPr>
+          <p:nvPr>
+            <p:ph type="sldNum" sz="quarter" idx="5"/>
+          </p:nvPr>
+        </p:nvSpPr>
+        <p:spPr>
+          <a:xfrm>
+            <a:off x="3884613" y="8685213"/>
+            <a:ext cx="2971800" cy="458787"/>
+          </a:xfrm>
+          <a:prstGeom prst="rect">
+            <a:avLst/>
+          </a:prstGeom>
+        </p:spPr>
+        <p:txBody>
+          <a:bodyPr vert="horz" lIns="91440" tIns="45720" rIns="91440" bIns="45720" rtlCol="0" anchor="b"/>
+          <a:lstStyle>
+            <a:lvl1pPr algn="r">
+              <a:defRPr sz="1200"/>
+            </a:lvl1pPr>
+          </a:lstStyle>
+          <a:p>
+            <a:fld id="{4DB41583-7C00-4B31-AFBF-99496CFC33D5}" type="slidenum">
+              <a:rPr lang="en-IE" smtClean="0"/>
+              <a:t>‹#›</a:t>
+            </a:fld>
+            <a:endParaRPr lang="en-IE"/>
+          </a:p>
+        </p:txBody>
+      </p:sp>
+    </p:spTree>
+    <p:extLst>
+      <p:ext uri="{BB962C8B-B14F-4D97-AF65-F5344CB8AC3E}">
+        <p14:creationId xmlns:p14="http://schemas.microsoft.com/office/powerpoint/2010/main" val="4030904685"/>
+      </p:ext>
+    </p:extLst>
+  </p:cSld>
+  <p:clrMap bg1="lt1" tx1="dk1" bg2="lt2" tx2="dk2" accent1="accent1" accent2="accent2" accent3="accent3" accent4="accent4" accent5="accent5" accent6="accent6" hlink="hlink" folHlink="folHlink"/>
+  <p:notesStyle>
+    <a:lvl1pPr marL="0" algn="l" defTabSz="914400" rtl="0" eaLnBrk="1" latinLnBrk="0" hangingPunct="1">
+      <a:defRPr sz="1200" kern="1200">
+        <a:solidFill>
+          <a:schemeClr val="tx1"/>
+        </a:solidFill>
+        <a:latin typeface="+mn-lt"/>
+        <a:ea typeface="+mn-ea"/>
+        <a:cs typeface="+mn-cs"/>
+      </a:defRPr>
+    </a:lvl1pPr>
+    <a:lvl2pPr marL="457200" algn="l" defTabSz="914400" rtl="0" eaLnBrk="1" latinLnBrk="0" hangingPunct="1">
+      <a:defRPr sz="1200" kern="1200">
+        <a:solidFill>
+          <a:schemeClr val="tx1"/>
+        </a:solidFill>
+        <a:latin typeface="+mn-lt"/>
+        <a:ea typeface="+mn-ea"/>
+        <a:cs typeface="+mn-cs"/>
+      </a:defRPr>
+    </a:lvl2pPr>
+    <a:lvl3pPr marL="914400" algn="l" defTabSz="914400" rtl="0" eaLnBrk="1" latinLnBrk="0" hangingPunct="1">
+      <a:defRPr sz="1200" kern="1200">
+        <a:solidFill>
+          <a:schemeClr val="tx1"/>
+        </a:solidFill>
+        <a:latin typeface="+mn-lt"/>
+        <a:ea typeface="+mn-ea"/>
+        <a:cs typeface="+mn-cs"/>
+      </a:defRPr>
+    </a:lvl3pPr>
+    <a:lvl4pPr marL="1371600" algn="l" defTabSz="914400" rtl="0" eaLnBrk="1" latinLnBrk="0" hangingPunct="1">
+      <a:defRPr sz="1200" kern="1200">
+        <a:solidFill>
+          <a:schemeClr val="tx1"/>
+        </a:solidFill>
+        <a:latin typeface="+mn-lt"/>
+        <a:ea typeface="+mn-ea"/>
+        <a:cs typeface="+mn-cs"/>
+      </a:defRPr>
+    </a:lvl4pPr>
+    <a:lvl5pPr marL="1828800" algn="l" defTabSz="914400" rtl="0" eaLnBrk="1" latinLnBrk="0" hangingPunct="1">
+      <a:defRPr sz="1200" kern="1200">
+        <a:solidFill>
+          <a:schemeClr val="tx1"/>
+        </a:solidFill>
+        <a:latin typeface="+mn-lt"/>
+        <a:ea typeface="+mn-ea"/>
+        <a:cs typeface="+mn-cs"/>
+      </a:defRPr>
+    </a:lvl5pPr>
+    <a:lvl6pPr marL="2286000" algn="l" defTabSz="914400" rtl="0" eaLnBrk="1" latinLnBrk="0" hangingPunct="1">
+      <a:defRPr sz="1200" kern="1200">
+        <a:solidFill>
+          <a:schemeClr val="tx1"/>
+        </a:solidFill>
+        <a:latin typeface="+mn-lt"/>
+        <a:ea typeface="+mn-ea"/>
+        <a:cs typeface="+mn-cs"/>
+      </a:defRPr>
+    </a:lvl6pPr>
+    <a:lvl7pPr marL="2743200" algn="l" defTabSz="914400" rtl="0" eaLnBrk="1" latinLnBrk="0" hangingPunct="1">
+      <a:defRPr sz="1200" kern="1200">
+        <a:solidFill>
+          <a:schemeClr val="tx1"/>
+        </a:solidFill>
+        <a:latin typeface="+mn-lt"/>
+        <a:ea typeface="+mn-ea"/>
+        <a:cs typeface="+mn-cs"/>
+      </a:defRPr>
+    </a:lvl7pPr>
+    <a:lvl8pPr marL="3200400" algn="l" defTabSz="914400" rtl="0" eaLnBrk="1" latinLnBrk="0" hangingPunct="1">
+      <a:defRPr sz="1200" kern="1200">
+        <a:solidFill>
+          <a:schemeClr val="tx1"/>
+        </a:solidFill>
+        <a:latin typeface="+mn-lt"/>
+        <a:ea typeface="+mn-ea"/>
+        <a:cs typeface="+mn-cs"/>
+      </a:defRPr>
+    </a:lvl8pPr>
+    <a:lvl9pPr marL="3657600" algn="l" defTabSz="914400" rtl="0" eaLnBrk="1" latinLnBrk="0" hangingPunct="1">
+      <a:defRPr sz="1200" kern="1200">
+        <a:solidFill>
+          <a:schemeClr val="tx1"/>
+        </a:solidFill>
+        <a:latin typeface="+mn-lt"/>
+        <a:ea typeface="+mn-ea"/>
+        <a:cs typeface="+mn-cs"/>
+      </a:defRPr>
+    </a:lvl9pPr>
+  </p:notesStyle>
+</p:notesMaster>
+</file>
+
+<file path=ppt/notesSlides/notesSlide1.xml><?xml version="1.0" encoding="utf-8"?>
+<p:notes xmlns:a="http://schemas.openxmlformats.org/drawingml/2006/main" xmlns:r="http://schemas.openxmlformats.org/officeDocument/2006/relationships" xmlns:p="http://schemas.openxmlformats.org/presentationml/2006/main">
+  <p:cSld>
+    <p:spTree>
+      <p:nvGrpSpPr>
+        <p:cNvPr id="1" name="">
+          <a:extLst>
+            <a:ext uri="{FF2B5EF4-FFF2-40B4-BE49-F238E27FC236}">
+              <a16:creationId xmlns:a16="http://schemas.microsoft.com/office/drawing/2014/main" id="{F06C07AE-8755-A623-79E8-0788AF14A481}"/>
+            </a:ext>
+          </a:extLst>
+        </p:cNvPr>
+        <p:cNvGrpSpPr/>
+        <p:nvPr/>
+      </p:nvGrpSpPr>
+      <p:grpSpPr>
+        <a:xfrm>
+          <a:off x="0" y="0"/>
+          <a:ext cx="0" cy="0"/>
+          <a:chOff x="0" y="0"/>
+          <a:chExt cx="0" cy="0"/>
+        </a:xfrm>
+      </p:grpSpPr>
+      <p:sp>
+        <p:nvSpPr>
+          <p:cNvPr id="4098" name="Slide Image Placeholder 1">
+            <a:extLst>
+              <a:ext uri="{FF2B5EF4-FFF2-40B4-BE49-F238E27FC236}">
+                <a16:creationId xmlns:a16="http://schemas.microsoft.com/office/drawing/2014/main" id="{021596E3-579D-675C-3A39-48D558BAED90}"/>
+              </a:ext>
+            </a:extLst>
+          </p:cNvPr>
+          <p:cNvSpPr>
+            <a:spLocks noGrp="1" noRot="1" noChangeAspect="1" noTextEdit="1"/>
+          </p:cNvSpPr>
+          <p:nvPr>
+            <p:ph type="sldImg"/>
+          </p:nvPr>
+        </p:nvSpPr>
+        <p:spPr bwMode="auto">
+          <a:xfrm>
+            <a:off x="1371600" y="1143000"/>
+            <a:ext cx="4114800" cy="3086100"/>
+          </a:xfrm>
+          <a:noFill/>
+          <a:ln>
+            <a:solidFill>
+              <a:srgbClr val="000000"/>
+            </a:solidFill>
+            <a:miter lim="800000"/>
+            <a:headEnd/>
+            <a:tailEnd/>
+          </a:ln>
+          <a:extLst>
+            <a:ext uri="{909E8E84-426E-40DD-AFC4-6F175D3DCCD1}">
+              <a14:hiddenFill xmlns:a14="http://schemas.microsoft.com/office/drawing/2010/main">
+                <a:solidFill>
+                  <a:srgbClr val="FFFFFF"/>
+                </a:solidFill>
+              </a14:hiddenFill>
+            </a:ext>
+          </a:extLst>
+        </p:spPr>
+        <p:txBody>
+          <a:bodyPr/>
+          <a:lstStyle/>
+          <a:p>
+            <a:endParaRPr lang="en-IE"/>
+          </a:p>
+        </p:txBody>
+      </p:sp>
+      <p:sp>
+        <p:nvSpPr>
+          <p:cNvPr id="4099" name="Notes Placeholder 2">
+            <a:extLst>
+              <a:ext uri="{FF2B5EF4-FFF2-40B4-BE49-F238E27FC236}">
+                <a16:creationId xmlns:a16="http://schemas.microsoft.com/office/drawing/2014/main" id="{478CEE35-DD47-F21F-E5B1-8571F33675E2}"/>
+              </a:ext>
+            </a:extLst>
+          </p:cNvPr>
+          <p:cNvSpPr>
+            <a:spLocks noGrp="1"/>
+          </p:cNvSpPr>
+          <p:nvPr>
+            <p:ph type="body" idx="1"/>
+          </p:nvPr>
+        </p:nvSpPr>
+        <p:spPr bwMode="auto">
+          <a:noFill/>
+          <a:extLst>
+            <a:ext uri="{909E8E84-426E-40DD-AFC4-6F175D3DCCD1}">
+              <a14:hiddenFill xmlns:a14="http://schemas.microsoft.com/office/drawing/2010/main">
+                <a:solidFill>
+                  <a:srgbClr val="FFFFFF"/>
+                </a:solidFill>
+              </a14:hiddenFill>
+            </a:ext>
+            <a:ext uri="{91240B29-F687-4F45-9708-019B960494DF}">
+              <a14:hiddenLine xmlns:a14="http://schemas.microsoft.com/office/drawing/2010/main" w="9525">
+                <a:solidFill>
+                  <a:srgbClr val="000000"/>
+                </a:solidFill>
+                <a:miter lim="800000"/>
+                <a:headEnd/>
+                <a:tailEnd/>
+              </a14:hiddenLine>
+            </a:ext>
+          </a:extLst>
+        </p:spPr>
+        <p:txBody>
+          <a:bodyPr wrap="square" numCol="1" anchor="t" anchorCtr="0" compatLnSpc="1">
+            <a:prstTxWarp prst="textNoShape">
+              <a:avLst/>
+            </a:prstTxWarp>
+          </a:bodyPr>
+          <a:lstStyle/>
+          <a:p>
+            <a:pPr eaLnBrk="1" hangingPunct="1">
+              <a:spcBef>
+                <a:spcPct val="0"/>
+              </a:spcBef>
+            </a:pPr>
+            <a:endParaRPr lang="en-US" altLang="en-US"/>
+          </a:p>
+        </p:txBody>
+      </p:sp>
+      <p:sp>
+        <p:nvSpPr>
+          <p:cNvPr id="4100" name="Slide Number Placeholder 3">
+            <a:extLst>
+              <a:ext uri="{FF2B5EF4-FFF2-40B4-BE49-F238E27FC236}">
+                <a16:creationId xmlns:a16="http://schemas.microsoft.com/office/drawing/2014/main" id="{BE93F592-D2AD-6ABD-EA72-F7002A63CEAE}"/>
+              </a:ext>
+            </a:extLst>
+          </p:cNvPr>
+          <p:cNvSpPr>
+            <a:spLocks noGrp="1"/>
+          </p:cNvSpPr>
+          <p:nvPr>
+            <p:ph type="sldNum" sz="quarter" idx="5"/>
+          </p:nvPr>
+        </p:nvSpPr>
+        <p:spPr bwMode="auto">
+          <a:noFill/>
+          <a:extLst>
+            <a:ext uri="{909E8E84-426E-40DD-AFC4-6F175D3DCCD1}">
+              <a14:hiddenFill xmlns:a14="http://schemas.microsoft.com/office/drawing/2010/main">
+                <a:solidFill>
+                  <a:srgbClr val="FFFFFF"/>
+                </a:solidFill>
+              </a14:hiddenFill>
+            </a:ext>
+            <a:ext uri="{91240B29-F687-4F45-9708-019B960494DF}">
+              <a14:hiddenLine xmlns:a14="http://schemas.microsoft.com/office/drawing/2010/main" w="9525">
+                <a:solidFill>
+                  <a:srgbClr val="000000"/>
+                </a:solidFill>
+                <a:miter lim="800000"/>
+                <a:headEnd/>
+                <a:tailEnd/>
+              </a14:hiddenLine>
+            </a:ext>
+          </a:extLst>
+        </p:spPr>
+        <p:txBody>
+          <a:bodyPr/>
+          <a:lstStyle>
+            <a:lvl1pPr>
+              <a:defRPr sz="2300">
+                <a:solidFill>
+                  <a:schemeClr val="tx1"/>
+                </a:solidFill>
+                <a:latin typeface="Arial" panose="020B0604020202020204" pitchFamily="34" charset="0"/>
+                <a:ea typeface="MS PGothic" panose="020B0600070205080204" pitchFamily="34" charset="-128"/>
+              </a:defRPr>
+            </a:lvl1pPr>
+            <a:lvl2pPr marL="742950" indent="-285750">
+              <a:defRPr sz="2300">
+                <a:solidFill>
+                  <a:schemeClr val="tx1"/>
+                </a:solidFill>
+                <a:latin typeface="Arial" panose="020B0604020202020204" pitchFamily="34" charset="0"/>
+                <a:ea typeface="MS PGothic" panose="020B0600070205080204" pitchFamily="34" charset="-128"/>
+              </a:defRPr>
+            </a:lvl2pPr>
+            <a:lvl3pPr marL="1143000" indent="-228600">
+              <a:defRPr sz="2300">
+                <a:solidFill>
+                  <a:schemeClr val="tx1"/>
+                </a:solidFill>
+                <a:latin typeface="Arial" panose="020B0604020202020204" pitchFamily="34" charset="0"/>
+                <a:ea typeface="MS PGothic" panose="020B0600070205080204" pitchFamily="34" charset="-128"/>
+              </a:defRPr>
+            </a:lvl3pPr>
+            <a:lvl4pPr marL="1600200" indent="-228600">
+              <a:defRPr sz="2300">
+                <a:solidFill>
+                  <a:schemeClr val="tx1"/>
+                </a:solidFill>
+                <a:latin typeface="Arial" panose="020B0604020202020204" pitchFamily="34" charset="0"/>
+                <a:ea typeface="MS PGothic" panose="020B0600070205080204" pitchFamily="34" charset="-128"/>
+              </a:defRPr>
+            </a:lvl4pPr>
+            <a:lvl5pPr marL="2057400" indent="-228600">
+              <a:defRPr sz="2300">
+                <a:solidFill>
+                  <a:schemeClr val="tx1"/>
+                </a:solidFill>
+                <a:latin typeface="Arial" panose="020B0604020202020204" pitchFamily="34" charset="0"/>
+                <a:ea typeface="MS PGothic" panose="020B0600070205080204" pitchFamily="34" charset="-128"/>
+              </a:defRPr>
+            </a:lvl5pPr>
+            <a:lvl6pPr marL="2514600" indent="-228600" eaLnBrk="0" fontAlgn="base" hangingPunct="0">
+              <a:spcBef>
+                <a:spcPct val="0"/>
+              </a:spcBef>
+              <a:spcAft>
+                <a:spcPct val="0"/>
+              </a:spcAft>
+              <a:defRPr sz="2300">
+                <a:solidFill>
+                  <a:schemeClr val="tx1"/>
+                </a:solidFill>
+                <a:latin typeface="Arial" panose="020B0604020202020204" pitchFamily="34" charset="0"/>
+                <a:ea typeface="MS PGothic" panose="020B0600070205080204" pitchFamily="34" charset="-128"/>
+              </a:defRPr>
+            </a:lvl6pPr>
+            <a:lvl7pPr marL="2971800" indent="-228600" eaLnBrk="0" fontAlgn="base" hangingPunct="0">
+              <a:spcBef>
+                <a:spcPct val="0"/>
+              </a:spcBef>
+              <a:spcAft>
+                <a:spcPct val="0"/>
+              </a:spcAft>
+              <a:defRPr sz="2300">
+                <a:solidFill>
+                  <a:schemeClr val="tx1"/>
+                </a:solidFill>
+                <a:latin typeface="Arial" panose="020B0604020202020204" pitchFamily="34" charset="0"/>
+                <a:ea typeface="MS PGothic" panose="020B0600070205080204" pitchFamily="34" charset="-128"/>
+              </a:defRPr>
+            </a:lvl7pPr>
+            <a:lvl8pPr marL="3429000" indent="-228600" eaLnBrk="0" fontAlgn="base" hangingPunct="0">
+              <a:spcBef>
+                <a:spcPct val="0"/>
+              </a:spcBef>
+              <a:spcAft>
+                <a:spcPct val="0"/>
+              </a:spcAft>
+              <a:defRPr sz="2300">
+                <a:solidFill>
+                  <a:schemeClr val="tx1"/>
+                </a:solidFill>
+                <a:latin typeface="Arial" panose="020B0604020202020204" pitchFamily="34" charset="0"/>
+                <a:ea typeface="MS PGothic" panose="020B0600070205080204" pitchFamily="34" charset="-128"/>
+              </a:defRPr>
+            </a:lvl8pPr>
+            <a:lvl9pPr marL="3886200" indent="-228600" eaLnBrk="0" fontAlgn="base" hangingPunct="0">
+              <a:spcBef>
+                <a:spcPct val="0"/>
+              </a:spcBef>
+              <a:spcAft>
+                <a:spcPct val="0"/>
+              </a:spcAft>
+              <a:defRPr sz="2300">
+                <a:solidFill>
+                  <a:schemeClr val="tx1"/>
+                </a:solidFill>
+                <a:latin typeface="Arial" panose="020B0604020202020204" pitchFamily="34" charset="0"/>
+                <a:ea typeface="MS PGothic" panose="020B0600070205080204" pitchFamily="34" charset="-128"/>
+              </a:defRPr>
+            </a:lvl9pPr>
+          </a:lstStyle>
+          <a:p>
+            <a:fld id="{1765B1E0-D791-45CB-934D-83E6090821CD}" type="slidenum">
+              <a:rPr lang="en-US" altLang="en-US" sz="1200" smtClean="0"/>
+              <a:pPr/>
+              <a:t>1</a:t>
+            </a:fld>
+            <a:endParaRPr lang="en-US" altLang="en-US" sz="1200"/>
+          </a:p>
+        </p:txBody>
+      </p:sp>
+    </p:spTree>
+    <p:extLst>
+      <p:ext uri="{BB962C8B-B14F-4D97-AF65-F5344CB8AC3E}">
+        <p14:creationId xmlns:p14="http://schemas.microsoft.com/office/powerpoint/2010/main" val="2040502567"/>
+      </p:ext>
+    </p:extLst>
+  </p:cSld>
+  <p:clrMapOvr>
+    <a:masterClrMapping/>
+  </p:clrMapOvr>
+</p:notes>
 </file>
 
 <file path=ppt/slideLayouts/slideLayout1.xml><?xml version="1.0" encoding="utf-8"?>
@@ -126,13 +780,7 @@
       </p:grpSpPr>
       <p:sp>
         <p:nvSpPr>
-          <p:cNvPr id="2" name="Title 1">
-            <a:extLst>
-              <a:ext uri="{FF2B5EF4-FFF2-40B4-BE49-F238E27FC236}">
-                <a16:creationId xmlns:a16="http://schemas.microsoft.com/office/drawing/2014/main" id="{3463A7E0-244D-D27E-F11E-214127F6D07F}"/>
-              </a:ext>
-            </a:extLst>
-          </p:cNvPr>
+          <p:cNvPr id="2" name="Title 1"/>
           <p:cNvSpPr>
             <a:spLocks noGrp="1"/>
           </p:cNvSpPr>
@@ -142,8 +790,8 @@
         </p:nvSpPr>
         <p:spPr>
           <a:xfrm>
-            <a:off x="1524000" y="1122363"/>
-            <a:ext cx="9144000" cy="2387600"/>
+            <a:off x="685800" y="1122363"/>
+            <a:ext cx="7772400" cy="2387600"/>
           </a:xfrm>
         </p:spPr>
         <p:txBody>
@@ -158,19 +806,13 @@
               <a:rPr lang="en-GB"/>
               <a:t>Click to edit Master title style</a:t>
             </a:r>
-            <a:endParaRPr lang="en-IE"/>
+            <a:endParaRPr lang="en-US" dirty="0"/>
           </a:p>
         </p:txBody>
       </p:sp>
       <p:sp>
         <p:nvSpPr>
-          <p:cNvPr id="3" name="Subtitle 2">
-            <a:extLst>
-              <a:ext uri="{FF2B5EF4-FFF2-40B4-BE49-F238E27FC236}">
-                <a16:creationId xmlns:a16="http://schemas.microsoft.com/office/drawing/2014/main" id="{57042E4F-6527-1E9B-0D29-6B2288D196E2}"/>
-              </a:ext>
-            </a:extLst>
-          </p:cNvPr>
+          <p:cNvPr id="3" name="Subtitle 2"/>
           <p:cNvSpPr>
             <a:spLocks noGrp="1"/>
           </p:cNvSpPr>
@@ -180,8 +822,8 @@
         </p:nvSpPr>
         <p:spPr>
           <a:xfrm>
-            <a:off x="1524000" y="3602038"/>
-            <a:ext cx="9144000" cy="1655762"/>
+            <a:off x="1143000" y="3602038"/>
+            <a:ext cx="6858000" cy="1655762"/>
           </a:xfrm>
         </p:spPr>
         <p:txBody>
@@ -229,19 +871,13 @@
               <a:rPr lang="en-GB"/>
               <a:t>Click to edit Master subtitle style</a:t>
             </a:r>
-            <a:endParaRPr lang="en-IE"/>
+            <a:endParaRPr lang="en-US" dirty="0"/>
           </a:p>
         </p:txBody>
       </p:sp>
       <p:sp>
         <p:nvSpPr>
-          <p:cNvPr id="4" name="Date Placeholder 3">
-            <a:extLst>
-              <a:ext uri="{FF2B5EF4-FFF2-40B4-BE49-F238E27FC236}">
-                <a16:creationId xmlns:a16="http://schemas.microsoft.com/office/drawing/2014/main" id="{59957864-7CB2-D8B5-724A-CC7DE6A19112}"/>
-              </a:ext>
-            </a:extLst>
-          </p:cNvPr>
+          <p:cNvPr id="4" name="Date Placeholder 3"/>
           <p:cNvSpPr>
             <a:spLocks noGrp="1"/>
           </p:cNvSpPr>
@@ -256,7 +892,7 @@
           <a:p>
             <a:fld id="{2CA29558-1C25-4B84-8B2A-BC68C4A0CDF1}" type="datetimeFigureOut">
               <a:rPr lang="en-IE" smtClean="0"/>
-              <a:t>14/04/2026</a:t>
+              <a:t>24/05/2026</a:t>
             </a:fld>
             <a:endParaRPr lang="en-IE"/>
           </a:p>
@@ -264,13 +900,7 @@
       </p:sp>
       <p:sp>
         <p:nvSpPr>
-          <p:cNvPr id="5" name="Footer Placeholder 4">
-            <a:extLst>
-              <a:ext uri="{FF2B5EF4-FFF2-40B4-BE49-F238E27FC236}">
-                <a16:creationId xmlns:a16="http://schemas.microsoft.com/office/drawing/2014/main" id="{F46C6D7F-9AC4-8A49-5CDB-29ADF60ABC16}"/>
-              </a:ext>
-            </a:extLst>
-          </p:cNvPr>
+          <p:cNvPr id="5" name="Footer Placeholder 4"/>
           <p:cNvSpPr>
             <a:spLocks noGrp="1"/>
           </p:cNvSpPr>
@@ -289,13 +919,7 @@
       </p:sp>
       <p:sp>
         <p:nvSpPr>
-          <p:cNvPr id="6" name="Slide Number Placeholder 5">
-            <a:extLst>
-              <a:ext uri="{FF2B5EF4-FFF2-40B4-BE49-F238E27FC236}">
-                <a16:creationId xmlns:a16="http://schemas.microsoft.com/office/drawing/2014/main" id="{1EA0F1CB-2A93-EC6C-7A33-A14D0BCAFCC1}"/>
-              </a:ext>
-            </a:extLst>
-          </p:cNvPr>
+          <p:cNvPr id="6" name="Slide Number Placeholder 5"/>
           <p:cNvSpPr>
             <a:spLocks noGrp="1"/>
           </p:cNvSpPr>
@@ -319,7 +943,7 @@
     </p:spTree>
     <p:extLst>
       <p:ext uri="{BB962C8B-B14F-4D97-AF65-F5344CB8AC3E}">
-        <p14:creationId xmlns:p14="http://schemas.microsoft.com/office/powerpoint/2010/main" val="2057560733"/>
+        <p14:creationId xmlns:p14="http://schemas.microsoft.com/office/powerpoint/2010/main" val="1424462181"/>
       </p:ext>
     </p:extLst>
   </p:cSld>
@@ -348,13 +972,7 @@
       </p:grpSpPr>
       <p:sp>
         <p:nvSpPr>
-          <p:cNvPr id="2" name="Title 1">
-            <a:extLst>
-              <a:ext uri="{FF2B5EF4-FFF2-40B4-BE49-F238E27FC236}">
-                <a16:creationId xmlns:a16="http://schemas.microsoft.com/office/drawing/2014/main" id="{6BA83086-B23A-5601-9D79-F8B5949DF2BD}"/>
-              </a:ext>
-            </a:extLst>
-          </p:cNvPr>
+          <p:cNvPr id="2" name="Title 1"/>
           <p:cNvSpPr>
             <a:spLocks noGrp="1"/>
           </p:cNvSpPr>
@@ -371,19 +989,13 @@
               <a:rPr lang="en-GB"/>
               <a:t>Click to edit Master title style</a:t>
             </a:r>
-            <a:endParaRPr lang="en-IE"/>
+            <a:endParaRPr lang="en-US" dirty="0"/>
           </a:p>
         </p:txBody>
       </p:sp>
       <p:sp>
         <p:nvSpPr>
-          <p:cNvPr id="3" name="Vertical Text Placeholder 2">
-            <a:extLst>
-              <a:ext uri="{FF2B5EF4-FFF2-40B4-BE49-F238E27FC236}">
-                <a16:creationId xmlns:a16="http://schemas.microsoft.com/office/drawing/2014/main" id="{2D4EE11D-0613-CA13-CD93-7B5159148DC3}"/>
-              </a:ext>
-            </a:extLst>
-          </p:cNvPr>
+          <p:cNvPr id="3" name="Vertical Text Placeholder 2"/>
           <p:cNvSpPr>
             <a:spLocks noGrp="1"/>
           </p:cNvSpPr>
@@ -429,19 +1041,13 @@
               <a:rPr lang="en-GB"/>
               <a:t>Fifth level</a:t>
             </a:r>
-            <a:endParaRPr lang="en-IE"/>
+            <a:endParaRPr lang="en-US" dirty="0"/>
           </a:p>
         </p:txBody>
       </p:sp>
       <p:sp>
         <p:nvSpPr>
-          <p:cNvPr id="4" name="Date Placeholder 3">
-            <a:extLst>
-              <a:ext uri="{FF2B5EF4-FFF2-40B4-BE49-F238E27FC236}">
-                <a16:creationId xmlns:a16="http://schemas.microsoft.com/office/drawing/2014/main" id="{11F70F01-2A95-A1F5-5A16-472ECB884E6C}"/>
-              </a:ext>
-            </a:extLst>
-          </p:cNvPr>
+          <p:cNvPr id="4" name="Date Placeholder 3"/>
           <p:cNvSpPr>
             <a:spLocks noGrp="1"/>
           </p:cNvSpPr>
@@ -456,7 +1062,7 @@
           <a:p>
             <a:fld id="{2CA29558-1C25-4B84-8B2A-BC68C4A0CDF1}" type="datetimeFigureOut">
               <a:rPr lang="en-IE" smtClean="0"/>
-              <a:t>14/04/2026</a:t>
+              <a:t>24/05/2026</a:t>
             </a:fld>
             <a:endParaRPr lang="en-IE"/>
           </a:p>
@@ -464,13 +1070,7 @@
       </p:sp>
       <p:sp>
         <p:nvSpPr>
-          <p:cNvPr id="5" name="Footer Placeholder 4">
-            <a:extLst>
-              <a:ext uri="{FF2B5EF4-FFF2-40B4-BE49-F238E27FC236}">
-                <a16:creationId xmlns:a16="http://schemas.microsoft.com/office/drawing/2014/main" id="{53A7C2A0-DD57-607E-FD12-8878F472F8FA}"/>
-              </a:ext>
-            </a:extLst>
-          </p:cNvPr>
+          <p:cNvPr id="5" name="Footer Placeholder 4"/>
           <p:cNvSpPr>
             <a:spLocks noGrp="1"/>
           </p:cNvSpPr>
@@ -489,13 +1089,7 @@
       </p:sp>
       <p:sp>
         <p:nvSpPr>
-          <p:cNvPr id="6" name="Slide Number Placeholder 5">
-            <a:extLst>
-              <a:ext uri="{FF2B5EF4-FFF2-40B4-BE49-F238E27FC236}">
-                <a16:creationId xmlns:a16="http://schemas.microsoft.com/office/drawing/2014/main" id="{9C1E76E6-C33A-3031-2566-5A13A2896265}"/>
-              </a:ext>
-            </a:extLst>
-          </p:cNvPr>
+          <p:cNvPr id="6" name="Slide Number Placeholder 5"/>
           <p:cNvSpPr>
             <a:spLocks noGrp="1"/>
           </p:cNvSpPr>
@@ -519,7 +1113,7 @@
     </p:spTree>
     <p:extLst>
       <p:ext uri="{BB962C8B-B14F-4D97-AF65-F5344CB8AC3E}">
-        <p14:creationId xmlns:p14="http://schemas.microsoft.com/office/powerpoint/2010/main" val="2556968416"/>
+        <p14:creationId xmlns:p14="http://schemas.microsoft.com/office/powerpoint/2010/main" val="508659986"/>
       </p:ext>
     </p:extLst>
   </p:cSld>
@@ -548,13 +1142,7 @@
       </p:grpSpPr>
       <p:sp>
         <p:nvSpPr>
-          <p:cNvPr id="2" name="Vertical Title 1">
-            <a:extLst>
-              <a:ext uri="{FF2B5EF4-FFF2-40B4-BE49-F238E27FC236}">
-                <a16:creationId xmlns:a16="http://schemas.microsoft.com/office/drawing/2014/main" id="{8D9B0246-1388-D4DA-627E-0D55FC39C007}"/>
-              </a:ext>
-            </a:extLst>
-          </p:cNvPr>
+          <p:cNvPr id="2" name="Vertical Title 1"/>
           <p:cNvSpPr>
             <a:spLocks noGrp="1"/>
           </p:cNvSpPr>
@@ -564,8 +1152,8 @@
         </p:nvSpPr>
         <p:spPr>
           <a:xfrm>
-            <a:off x="8724900" y="365125"/>
-            <a:ext cx="2628900" cy="5811838"/>
+            <a:off x="6543675" y="365125"/>
+            <a:ext cx="1971675" cy="5811838"/>
           </a:xfrm>
         </p:spPr>
         <p:txBody>
@@ -576,19 +1164,13 @@
               <a:rPr lang="en-GB"/>
               <a:t>Click to edit Master title style</a:t>
             </a:r>
-            <a:endParaRPr lang="en-IE"/>
+            <a:endParaRPr lang="en-US" dirty="0"/>
           </a:p>
         </p:txBody>
       </p:sp>
       <p:sp>
         <p:nvSpPr>
-          <p:cNvPr id="3" name="Vertical Text Placeholder 2">
-            <a:extLst>
-              <a:ext uri="{FF2B5EF4-FFF2-40B4-BE49-F238E27FC236}">
-                <a16:creationId xmlns:a16="http://schemas.microsoft.com/office/drawing/2014/main" id="{616BA534-4C1F-6D99-DD12-BE37730B9EBC}"/>
-              </a:ext>
-            </a:extLst>
-          </p:cNvPr>
+          <p:cNvPr id="3" name="Vertical Text Placeholder 2"/>
           <p:cNvSpPr>
             <a:spLocks noGrp="1"/>
           </p:cNvSpPr>
@@ -598,8 +1180,8 @@
         </p:nvSpPr>
         <p:spPr>
           <a:xfrm>
-            <a:off x="838200" y="365125"/>
-            <a:ext cx="7734300" cy="5811838"/>
+            <a:off x="628650" y="365125"/>
+            <a:ext cx="5800725" cy="5811838"/>
           </a:xfrm>
         </p:spPr>
         <p:txBody>
@@ -639,19 +1221,13 @@
               <a:rPr lang="en-GB"/>
               <a:t>Fifth level</a:t>
             </a:r>
-            <a:endParaRPr lang="en-IE"/>
+            <a:endParaRPr lang="en-US" dirty="0"/>
           </a:p>
         </p:txBody>
       </p:sp>
       <p:sp>
         <p:nvSpPr>
-          <p:cNvPr id="4" name="Date Placeholder 3">
-            <a:extLst>
-              <a:ext uri="{FF2B5EF4-FFF2-40B4-BE49-F238E27FC236}">
-                <a16:creationId xmlns:a16="http://schemas.microsoft.com/office/drawing/2014/main" id="{10EC05E3-4785-AB53-4F32-52B6498033B2}"/>
-              </a:ext>
-            </a:extLst>
-          </p:cNvPr>
+          <p:cNvPr id="4" name="Date Placeholder 3"/>
           <p:cNvSpPr>
             <a:spLocks noGrp="1"/>
           </p:cNvSpPr>
@@ -666,7 +1242,7 @@
           <a:p>
             <a:fld id="{2CA29558-1C25-4B84-8B2A-BC68C4A0CDF1}" type="datetimeFigureOut">
               <a:rPr lang="en-IE" smtClean="0"/>
-              <a:t>14/04/2026</a:t>
+              <a:t>24/05/2026</a:t>
             </a:fld>
             <a:endParaRPr lang="en-IE"/>
           </a:p>
@@ -674,13 +1250,7 @@
       </p:sp>
       <p:sp>
         <p:nvSpPr>
-          <p:cNvPr id="5" name="Footer Placeholder 4">
-            <a:extLst>
-              <a:ext uri="{FF2B5EF4-FFF2-40B4-BE49-F238E27FC236}">
-                <a16:creationId xmlns:a16="http://schemas.microsoft.com/office/drawing/2014/main" id="{EABA3DFE-A426-5E6E-FBEB-D563F9F36126}"/>
-              </a:ext>
-            </a:extLst>
-          </p:cNvPr>
+          <p:cNvPr id="5" name="Footer Placeholder 4"/>
           <p:cNvSpPr>
             <a:spLocks noGrp="1"/>
           </p:cNvSpPr>
@@ -699,13 +1269,7 @@
       </p:sp>
       <p:sp>
         <p:nvSpPr>
-          <p:cNvPr id="6" name="Slide Number Placeholder 5">
-            <a:extLst>
-              <a:ext uri="{FF2B5EF4-FFF2-40B4-BE49-F238E27FC236}">
-                <a16:creationId xmlns:a16="http://schemas.microsoft.com/office/drawing/2014/main" id="{2C937D22-1ADC-DE40-D950-923FB8C038FD}"/>
-              </a:ext>
-            </a:extLst>
-          </p:cNvPr>
+          <p:cNvPr id="6" name="Slide Number Placeholder 5"/>
           <p:cNvSpPr>
             <a:spLocks noGrp="1"/>
           </p:cNvSpPr>
@@ -729,7 +1293,7 @@
     </p:spTree>
     <p:extLst>
       <p:ext uri="{BB962C8B-B14F-4D97-AF65-F5344CB8AC3E}">
-        <p14:creationId xmlns:p14="http://schemas.microsoft.com/office/powerpoint/2010/main" val="244362322"/>
+        <p14:creationId xmlns:p14="http://schemas.microsoft.com/office/powerpoint/2010/main" val="536977291"/>
       </p:ext>
     </p:extLst>
   </p:cSld>
@@ -758,13 +1322,7 @@
       </p:grpSpPr>
       <p:sp>
         <p:nvSpPr>
-          <p:cNvPr id="2" name="Title 1">
-            <a:extLst>
-              <a:ext uri="{FF2B5EF4-FFF2-40B4-BE49-F238E27FC236}">
-                <a16:creationId xmlns:a16="http://schemas.microsoft.com/office/drawing/2014/main" id="{7721EFD8-8A49-E3AA-8E2B-F8F7EEDE448E}"/>
-              </a:ext>
-            </a:extLst>
-          </p:cNvPr>
+          <p:cNvPr id="2" name="Title 1"/>
           <p:cNvSpPr>
             <a:spLocks noGrp="1"/>
           </p:cNvSpPr>
@@ -781,19 +1339,13 @@
               <a:rPr lang="en-GB"/>
               <a:t>Click to edit Master title style</a:t>
             </a:r>
-            <a:endParaRPr lang="en-IE"/>
+            <a:endParaRPr lang="en-US" dirty="0"/>
           </a:p>
         </p:txBody>
       </p:sp>
       <p:sp>
         <p:nvSpPr>
-          <p:cNvPr id="3" name="Content Placeholder 2">
-            <a:extLst>
-              <a:ext uri="{FF2B5EF4-FFF2-40B4-BE49-F238E27FC236}">
-                <a16:creationId xmlns:a16="http://schemas.microsoft.com/office/drawing/2014/main" id="{DB77FDFF-FD19-C19F-EAD4-1BDC350DD355}"/>
-              </a:ext>
-            </a:extLst>
-          </p:cNvPr>
+          <p:cNvPr id="3" name="Content Placeholder 2"/>
           <p:cNvSpPr>
             <a:spLocks noGrp="1"/>
           </p:cNvSpPr>
@@ -839,19 +1391,13 @@
               <a:rPr lang="en-GB"/>
               <a:t>Fifth level</a:t>
             </a:r>
-            <a:endParaRPr lang="en-IE"/>
+            <a:endParaRPr lang="en-US" dirty="0"/>
           </a:p>
         </p:txBody>
       </p:sp>
       <p:sp>
         <p:nvSpPr>
-          <p:cNvPr id="4" name="Date Placeholder 3">
-            <a:extLst>
-              <a:ext uri="{FF2B5EF4-FFF2-40B4-BE49-F238E27FC236}">
-                <a16:creationId xmlns:a16="http://schemas.microsoft.com/office/drawing/2014/main" id="{D69308A0-69BA-6D69-ED79-AC7C98AA6484}"/>
-              </a:ext>
-            </a:extLst>
-          </p:cNvPr>
+          <p:cNvPr id="4" name="Date Placeholder 3"/>
           <p:cNvSpPr>
             <a:spLocks noGrp="1"/>
           </p:cNvSpPr>
@@ -866,7 +1412,7 @@
           <a:p>
             <a:fld id="{2CA29558-1C25-4B84-8B2A-BC68C4A0CDF1}" type="datetimeFigureOut">
               <a:rPr lang="en-IE" smtClean="0"/>
-              <a:t>14/04/2026</a:t>
+              <a:t>24/05/2026</a:t>
             </a:fld>
             <a:endParaRPr lang="en-IE"/>
           </a:p>
@@ -874,13 +1420,7 @@
       </p:sp>
       <p:sp>
         <p:nvSpPr>
-          <p:cNvPr id="5" name="Footer Placeholder 4">
-            <a:extLst>
-              <a:ext uri="{FF2B5EF4-FFF2-40B4-BE49-F238E27FC236}">
-                <a16:creationId xmlns:a16="http://schemas.microsoft.com/office/drawing/2014/main" id="{BCE671D5-0ECF-11D4-9B10-5988A8221773}"/>
-              </a:ext>
-            </a:extLst>
-          </p:cNvPr>
+          <p:cNvPr id="5" name="Footer Placeholder 4"/>
           <p:cNvSpPr>
             <a:spLocks noGrp="1"/>
           </p:cNvSpPr>
@@ -899,13 +1439,7 @@
       </p:sp>
       <p:sp>
         <p:nvSpPr>
-          <p:cNvPr id="6" name="Slide Number Placeholder 5">
-            <a:extLst>
-              <a:ext uri="{FF2B5EF4-FFF2-40B4-BE49-F238E27FC236}">
-                <a16:creationId xmlns:a16="http://schemas.microsoft.com/office/drawing/2014/main" id="{D01FFD61-2BC8-033A-15D2-97C984E545C0}"/>
-              </a:ext>
-            </a:extLst>
-          </p:cNvPr>
+          <p:cNvPr id="6" name="Slide Number Placeholder 5"/>
           <p:cNvSpPr>
             <a:spLocks noGrp="1"/>
           </p:cNvSpPr>
@@ -929,7 +1463,7 @@
     </p:spTree>
     <p:extLst>
       <p:ext uri="{BB962C8B-B14F-4D97-AF65-F5344CB8AC3E}">
-        <p14:creationId xmlns:p14="http://schemas.microsoft.com/office/powerpoint/2010/main" val="332776512"/>
+        <p14:creationId xmlns:p14="http://schemas.microsoft.com/office/powerpoint/2010/main" val="1459628133"/>
       </p:ext>
     </p:extLst>
   </p:cSld>
@@ -958,13 +1492,7 @@
       </p:grpSpPr>
       <p:sp>
         <p:nvSpPr>
-          <p:cNvPr id="2" name="Title 1">
-            <a:extLst>
-              <a:ext uri="{FF2B5EF4-FFF2-40B4-BE49-F238E27FC236}">
-                <a16:creationId xmlns:a16="http://schemas.microsoft.com/office/drawing/2014/main" id="{E406E285-5253-1BFD-DBF8-E72E4ACA15A2}"/>
-              </a:ext>
-            </a:extLst>
-          </p:cNvPr>
+          <p:cNvPr id="2" name="Title 1"/>
           <p:cNvSpPr>
             <a:spLocks noGrp="1"/>
           </p:cNvSpPr>
@@ -974,8 +1502,8 @@
         </p:nvSpPr>
         <p:spPr>
           <a:xfrm>
-            <a:off x="831850" y="1709738"/>
-            <a:ext cx="10515600" cy="2852737"/>
+            <a:off x="623888" y="1709739"/>
+            <a:ext cx="7886700" cy="2852737"/>
           </a:xfrm>
         </p:spPr>
         <p:txBody>
@@ -990,19 +1518,13 @@
               <a:rPr lang="en-GB"/>
               <a:t>Click to edit Master title style</a:t>
             </a:r>
-            <a:endParaRPr lang="en-IE"/>
+            <a:endParaRPr lang="en-US" dirty="0"/>
           </a:p>
         </p:txBody>
       </p:sp>
       <p:sp>
         <p:nvSpPr>
-          <p:cNvPr id="3" name="Text Placeholder 2">
-            <a:extLst>
-              <a:ext uri="{FF2B5EF4-FFF2-40B4-BE49-F238E27FC236}">
-                <a16:creationId xmlns:a16="http://schemas.microsoft.com/office/drawing/2014/main" id="{213F04FE-2A8F-C755-66C9-76D78331D8F3}"/>
-              </a:ext>
-            </a:extLst>
-          </p:cNvPr>
+          <p:cNvPr id="3" name="Text Placeholder 2"/>
           <p:cNvSpPr>
             <a:spLocks noGrp="1"/>
           </p:cNvSpPr>
@@ -1012,8 +1534,8 @@
         </p:nvSpPr>
         <p:spPr>
           <a:xfrm>
-            <a:off x="831850" y="4589463"/>
-            <a:ext cx="10515600" cy="1500187"/>
+            <a:off x="623888" y="4589464"/>
+            <a:ext cx="7886700" cy="1500187"/>
           </a:xfrm>
         </p:spPr>
         <p:txBody>
@@ -1121,13 +1643,7 @@
       </p:sp>
       <p:sp>
         <p:nvSpPr>
-          <p:cNvPr id="4" name="Date Placeholder 3">
-            <a:extLst>
-              <a:ext uri="{FF2B5EF4-FFF2-40B4-BE49-F238E27FC236}">
-                <a16:creationId xmlns:a16="http://schemas.microsoft.com/office/drawing/2014/main" id="{0D556F10-771F-163A-3366-BCFA8C138F89}"/>
-              </a:ext>
-            </a:extLst>
-          </p:cNvPr>
+          <p:cNvPr id="4" name="Date Placeholder 3"/>
           <p:cNvSpPr>
             <a:spLocks noGrp="1"/>
           </p:cNvSpPr>
@@ -1142,7 +1658,7 @@
           <a:p>
             <a:fld id="{2CA29558-1C25-4B84-8B2A-BC68C4A0CDF1}" type="datetimeFigureOut">
               <a:rPr lang="en-IE" smtClean="0"/>
-              <a:t>14/04/2026</a:t>
+              <a:t>24/05/2026</a:t>
             </a:fld>
             <a:endParaRPr lang="en-IE"/>
           </a:p>
@@ -1150,13 +1666,7 @@
       </p:sp>
       <p:sp>
         <p:nvSpPr>
-          <p:cNvPr id="5" name="Footer Placeholder 4">
-            <a:extLst>
-              <a:ext uri="{FF2B5EF4-FFF2-40B4-BE49-F238E27FC236}">
-                <a16:creationId xmlns:a16="http://schemas.microsoft.com/office/drawing/2014/main" id="{01C5F290-F994-01D4-B361-74BF08292FFA}"/>
-              </a:ext>
-            </a:extLst>
-          </p:cNvPr>
+          <p:cNvPr id="5" name="Footer Placeholder 4"/>
           <p:cNvSpPr>
             <a:spLocks noGrp="1"/>
           </p:cNvSpPr>
@@ -1175,13 +1685,7 @@
       </p:sp>
       <p:sp>
         <p:nvSpPr>
-          <p:cNvPr id="6" name="Slide Number Placeholder 5">
-            <a:extLst>
-              <a:ext uri="{FF2B5EF4-FFF2-40B4-BE49-F238E27FC236}">
-                <a16:creationId xmlns:a16="http://schemas.microsoft.com/office/drawing/2014/main" id="{01B867AB-CB79-6D70-20B6-34B859B4C50D}"/>
-              </a:ext>
-            </a:extLst>
-          </p:cNvPr>
+          <p:cNvPr id="6" name="Slide Number Placeholder 5"/>
           <p:cNvSpPr>
             <a:spLocks noGrp="1"/>
           </p:cNvSpPr>
@@ -1205,7 +1709,7 @@
     </p:spTree>
     <p:extLst>
       <p:ext uri="{BB962C8B-B14F-4D97-AF65-F5344CB8AC3E}">
-        <p14:creationId xmlns:p14="http://schemas.microsoft.com/office/powerpoint/2010/main" val="125832028"/>
+        <p14:creationId xmlns:p14="http://schemas.microsoft.com/office/powerpoint/2010/main" val="2019477704"/>
       </p:ext>
     </p:extLst>
   </p:cSld>
@@ -1234,13 +1738,7 @@
       </p:grpSpPr>
       <p:sp>
         <p:nvSpPr>
-          <p:cNvPr id="2" name="Title 1">
-            <a:extLst>
-              <a:ext uri="{FF2B5EF4-FFF2-40B4-BE49-F238E27FC236}">
-                <a16:creationId xmlns:a16="http://schemas.microsoft.com/office/drawing/2014/main" id="{998EC36B-7398-9F2B-AF48-36CB55AEBCA9}"/>
-              </a:ext>
-            </a:extLst>
-          </p:cNvPr>
+          <p:cNvPr id="2" name="Title 1"/>
           <p:cNvSpPr>
             <a:spLocks noGrp="1"/>
           </p:cNvSpPr>
@@ -1257,19 +1755,13 @@
               <a:rPr lang="en-GB"/>
               <a:t>Click to edit Master title style</a:t>
             </a:r>
-            <a:endParaRPr lang="en-IE"/>
+            <a:endParaRPr lang="en-US" dirty="0"/>
           </a:p>
         </p:txBody>
       </p:sp>
       <p:sp>
         <p:nvSpPr>
-          <p:cNvPr id="3" name="Content Placeholder 2">
-            <a:extLst>
-              <a:ext uri="{FF2B5EF4-FFF2-40B4-BE49-F238E27FC236}">
-                <a16:creationId xmlns:a16="http://schemas.microsoft.com/office/drawing/2014/main" id="{1FE19CC9-704A-AA9E-51C5-D3C8B31029E6}"/>
-              </a:ext>
-            </a:extLst>
-          </p:cNvPr>
+          <p:cNvPr id="3" name="Content Placeholder 2"/>
           <p:cNvSpPr>
             <a:spLocks noGrp="1"/>
           </p:cNvSpPr>
@@ -1279,8 +1771,8 @@
         </p:nvSpPr>
         <p:spPr>
           <a:xfrm>
-            <a:off x="838200" y="1825625"/>
-            <a:ext cx="5181600" cy="4351338"/>
+            <a:off x="628650" y="1825625"/>
+            <a:ext cx="3886200" cy="4351338"/>
           </a:xfrm>
         </p:spPr>
         <p:txBody>
@@ -1320,19 +1812,13 @@
               <a:rPr lang="en-GB"/>
               <a:t>Fifth level</a:t>
             </a:r>
-            <a:endParaRPr lang="en-IE"/>
+            <a:endParaRPr lang="en-US" dirty="0"/>
           </a:p>
         </p:txBody>
       </p:sp>
       <p:sp>
         <p:nvSpPr>
-          <p:cNvPr id="4" name="Content Placeholder 3">
-            <a:extLst>
-              <a:ext uri="{FF2B5EF4-FFF2-40B4-BE49-F238E27FC236}">
-                <a16:creationId xmlns:a16="http://schemas.microsoft.com/office/drawing/2014/main" id="{3C982AB2-8017-1696-A32E-3F3200B89A4A}"/>
-              </a:ext>
-            </a:extLst>
-          </p:cNvPr>
+          <p:cNvPr id="4" name="Content Placeholder 3"/>
           <p:cNvSpPr>
             <a:spLocks noGrp="1"/>
           </p:cNvSpPr>
@@ -1342,8 +1828,8 @@
         </p:nvSpPr>
         <p:spPr>
           <a:xfrm>
-            <a:off x="6172200" y="1825625"/>
-            <a:ext cx="5181600" cy="4351338"/>
+            <a:off x="4629150" y="1825625"/>
+            <a:ext cx="3886200" cy="4351338"/>
           </a:xfrm>
         </p:spPr>
         <p:txBody>
@@ -1383,19 +1869,13 @@
               <a:rPr lang="en-GB"/>
               <a:t>Fifth level</a:t>
             </a:r>
-            <a:endParaRPr lang="en-IE"/>
+            <a:endParaRPr lang="en-US" dirty="0"/>
           </a:p>
         </p:txBody>
       </p:sp>
       <p:sp>
         <p:nvSpPr>
-          <p:cNvPr id="5" name="Date Placeholder 4">
-            <a:extLst>
-              <a:ext uri="{FF2B5EF4-FFF2-40B4-BE49-F238E27FC236}">
-                <a16:creationId xmlns:a16="http://schemas.microsoft.com/office/drawing/2014/main" id="{EA74C955-157E-E7A3-842A-CD2906840DD1}"/>
-              </a:ext>
-            </a:extLst>
-          </p:cNvPr>
+          <p:cNvPr id="5" name="Date Placeholder 4"/>
           <p:cNvSpPr>
             <a:spLocks noGrp="1"/>
           </p:cNvSpPr>
@@ -1410,7 +1890,7 @@
           <a:p>
             <a:fld id="{2CA29558-1C25-4B84-8B2A-BC68C4A0CDF1}" type="datetimeFigureOut">
               <a:rPr lang="en-IE" smtClean="0"/>
-              <a:t>14/04/2026</a:t>
+              <a:t>24/05/2026</a:t>
             </a:fld>
             <a:endParaRPr lang="en-IE"/>
           </a:p>
@@ -1418,13 +1898,7 @@
       </p:sp>
       <p:sp>
         <p:nvSpPr>
-          <p:cNvPr id="6" name="Footer Placeholder 5">
-            <a:extLst>
-              <a:ext uri="{FF2B5EF4-FFF2-40B4-BE49-F238E27FC236}">
-                <a16:creationId xmlns:a16="http://schemas.microsoft.com/office/drawing/2014/main" id="{4B8D43FF-8BD5-6C4D-A52D-EFF9BD6D6D5C}"/>
-              </a:ext>
-            </a:extLst>
-          </p:cNvPr>
+          <p:cNvPr id="6" name="Footer Placeholder 5"/>
           <p:cNvSpPr>
             <a:spLocks noGrp="1"/>
           </p:cNvSpPr>
@@ -1443,13 +1917,7 @@
       </p:sp>
       <p:sp>
         <p:nvSpPr>
-          <p:cNvPr id="7" name="Slide Number Placeholder 6">
-            <a:extLst>
-              <a:ext uri="{FF2B5EF4-FFF2-40B4-BE49-F238E27FC236}">
-                <a16:creationId xmlns:a16="http://schemas.microsoft.com/office/drawing/2014/main" id="{0BCA8DFE-FDDA-DC4A-787F-ACE34F55E8B5}"/>
-              </a:ext>
-            </a:extLst>
-          </p:cNvPr>
+          <p:cNvPr id="7" name="Slide Number Placeholder 6"/>
           <p:cNvSpPr>
             <a:spLocks noGrp="1"/>
           </p:cNvSpPr>
@@ -1473,7 +1941,7 @@
     </p:spTree>
     <p:extLst>
       <p:ext uri="{BB962C8B-B14F-4D97-AF65-F5344CB8AC3E}">
-        <p14:creationId xmlns:p14="http://schemas.microsoft.com/office/powerpoint/2010/main" val="2969911064"/>
+        <p14:creationId xmlns:p14="http://schemas.microsoft.com/office/powerpoint/2010/main" val="3976449845"/>
       </p:ext>
     </p:extLst>
   </p:cSld>
@@ -1502,13 +1970,7 @@
       </p:grpSpPr>
       <p:sp>
         <p:nvSpPr>
-          <p:cNvPr id="2" name="Title 1">
-            <a:extLst>
-              <a:ext uri="{FF2B5EF4-FFF2-40B4-BE49-F238E27FC236}">
-                <a16:creationId xmlns:a16="http://schemas.microsoft.com/office/drawing/2014/main" id="{935C0B7D-9999-AE96-3727-6F2F0C28BFF9}"/>
-              </a:ext>
-            </a:extLst>
-          </p:cNvPr>
+          <p:cNvPr id="2" name="Title 1"/>
           <p:cNvSpPr>
             <a:spLocks noGrp="1"/>
           </p:cNvSpPr>
@@ -1518,8 +1980,8 @@
         </p:nvSpPr>
         <p:spPr>
           <a:xfrm>
-            <a:off x="839788" y="365125"/>
-            <a:ext cx="10515600" cy="1325563"/>
+            <a:off x="629841" y="365126"/>
+            <a:ext cx="7886700" cy="1325563"/>
           </a:xfrm>
         </p:spPr>
         <p:txBody>
@@ -1530,19 +1992,13 @@
               <a:rPr lang="en-GB"/>
               <a:t>Click to edit Master title style</a:t>
             </a:r>
-            <a:endParaRPr lang="en-IE"/>
+            <a:endParaRPr lang="en-US" dirty="0"/>
           </a:p>
         </p:txBody>
       </p:sp>
       <p:sp>
         <p:nvSpPr>
-          <p:cNvPr id="3" name="Text Placeholder 2">
-            <a:extLst>
-              <a:ext uri="{FF2B5EF4-FFF2-40B4-BE49-F238E27FC236}">
-                <a16:creationId xmlns:a16="http://schemas.microsoft.com/office/drawing/2014/main" id="{129E21EE-BE36-0FFE-A700-600EA2465A0A}"/>
-              </a:ext>
-            </a:extLst>
-          </p:cNvPr>
+          <p:cNvPr id="3" name="Text Placeholder 2"/>
           <p:cNvSpPr>
             <a:spLocks noGrp="1"/>
           </p:cNvSpPr>
@@ -1552,8 +2008,8 @@
         </p:nvSpPr>
         <p:spPr>
           <a:xfrm>
-            <a:off x="839788" y="1681163"/>
-            <a:ext cx="5157787" cy="823912"/>
+            <a:off x="629842" y="1681163"/>
+            <a:ext cx="3868340" cy="823912"/>
           </a:xfrm>
         </p:spPr>
         <p:txBody>
@@ -1607,13 +2063,7 @@
       </p:sp>
       <p:sp>
         <p:nvSpPr>
-          <p:cNvPr id="4" name="Content Placeholder 3">
-            <a:extLst>
-              <a:ext uri="{FF2B5EF4-FFF2-40B4-BE49-F238E27FC236}">
-                <a16:creationId xmlns:a16="http://schemas.microsoft.com/office/drawing/2014/main" id="{037746E5-858C-E2C5-A574-A6C4A8C092F7}"/>
-              </a:ext>
-            </a:extLst>
-          </p:cNvPr>
+          <p:cNvPr id="4" name="Content Placeholder 3"/>
           <p:cNvSpPr>
             <a:spLocks noGrp="1"/>
           </p:cNvSpPr>
@@ -1623,8 +2073,8 @@
         </p:nvSpPr>
         <p:spPr>
           <a:xfrm>
-            <a:off x="839788" y="2505075"/>
-            <a:ext cx="5157787" cy="3684588"/>
+            <a:off x="629842" y="2505075"/>
+            <a:ext cx="3868340" cy="3684588"/>
           </a:xfrm>
         </p:spPr>
         <p:txBody>
@@ -1664,19 +2114,13 @@
               <a:rPr lang="en-GB"/>
               <a:t>Fifth level</a:t>
             </a:r>
-            <a:endParaRPr lang="en-IE"/>
+            <a:endParaRPr lang="en-US" dirty="0"/>
           </a:p>
         </p:txBody>
       </p:sp>
       <p:sp>
         <p:nvSpPr>
-          <p:cNvPr id="5" name="Text Placeholder 4">
-            <a:extLst>
-              <a:ext uri="{FF2B5EF4-FFF2-40B4-BE49-F238E27FC236}">
-                <a16:creationId xmlns:a16="http://schemas.microsoft.com/office/drawing/2014/main" id="{7B4160A7-ADED-396F-3BD1-FA0A97913171}"/>
-              </a:ext>
-            </a:extLst>
-          </p:cNvPr>
+          <p:cNvPr id="5" name="Text Placeholder 4"/>
           <p:cNvSpPr>
             <a:spLocks noGrp="1"/>
           </p:cNvSpPr>
@@ -1686,8 +2130,8 @@
         </p:nvSpPr>
         <p:spPr>
           <a:xfrm>
-            <a:off x="6172200" y="1681163"/>
-            <a:ext cx="5183188" cy="823912"/>
+            <a:off x="4629150" y="1681163"/>
+            <a:ext cx="3887391" cy="823912"/>
           </a:xfrm>
         </p:spPr>
         <p:txBody>
@@ -1741,13 +2185,7 @@
       </p:sp>
       <p:sp>
         <p:nvSpPr>
-          <p:cNvPr id="6" name="Content Placeholder 5">
-            <a:extLst>
-              <a:ext uri="{FF2B5EF4-FFF2-40B4-BE49-F238E27FC236}">
-                <a16:creationId xmlns:a16="http://schemas.microsoft.com/office/drawing/2014/main" id="{6DD6C6D5-8F39-2717-96FC-105BCAE83E20}"/>
-              </a:ext>
-            </a:extLst>
-          </p:cNvPr>
+          <p:cNvPr id="6" name="Content Placeholder 5"/>
           <p:cNvSpPr>
             <a:spLocks noGrp="1"/>
           </p:cNvSpPr>
@@ -1757,8 +2195,8 @@
         </p:nvSpPr>
         <p:spPr>
           <a:xfrm>
-            <a:off x="6172200" y="2505075"/>
-            <a:ext cx="5183188" cy="3684588"/>
+            <a:off x="4629150" y="2505075"/>
+            <a:ext cx="3887391" cy="3684588"/>
           </a:xfrm>
         </p:spPr>
         <p:txBody>
@@ -1798,19 +2236,13 @@
               <a:rPr lang="en-GB"/>
               <a:t>Fifth level</a:t>
             </a:r>
-            <a:endParaRPr lang="en-IE"/>
+            <a:endParaRPr lang="en-US" dirty="0"/>
           </a:p>
         </p:txBody>
       </p:sp>
       <p:sp>
         <p:nvSpPr>
-          <p:cNvPr id="7" name="Date Placeholder 6">
-            <a:extLst>
-              <a:ext uri="{FF2B5EF4-FFF2-40B4-BE49-F238E27FC236}">
-                <a16:creationId xmlns:a16="http://schemas.microsoft.com/office/drawing/2014/main" id="{42D6BFD7-43DD-2EBE-6382-3B3D2D8F9640}"/>
-              </a:ext>
-            </a:extLst>
-          </p:cNvPr>
+          <p:cNvPr id="7" name="Date Placeholder 6"/>
           <p:cNvSpPr>
             <a:spLocks noGrp="1"/>
           </p:cNvSpPr>
@@ -1825,7 +2257,7 @@
           <a:p>
             <a:fld id="{2CA29558-1C25-4B84-8B2A-BC68C4A0CDF1}" type="datetimeFigureOut">
               <a:rPr lang="en-IE" smtClean="0"/>
-              <a:t>14/04/2026</a:t>
+              <a:t>24/05/2026</a:t>
             </a:fld>
             <a:endParaRPr lang="en-IE"/>
           </a:p>
@@ -1833,13 +2265,7 @@
       </p:sp>
       <p:sp>
         <p:nvSpPr>
-          <p:cNvPr id="8" name="Footer Placeholder 7">
-            <a:extLst>
-              <a:ext uri="{FF2B5EF4-FFF2-40B4-BE49-F238E27FC236}">
-                <a16:creationId xmlns:a16="http://schemas.microsoft.com/office/drawing/2014/main" id="{D80935C5-D91A-FDCF-3FD5-713C436F1A8E}"/>
-              </a:ext>
-            </a:extLst>
-          </p:cNvPr>
+          <p:cNvPr id="8" name="Footer Placeholder 7"/>
           <p:cNvSpPr>
             <a:spLocks noGrp="1"/>
           </p:cNvSpPr>
@@ -1858,13 +2284,7 @@
       </p:sp>
       <p:sp>
         <p:nvSpPr>
-          <p:cNvPr id="9" name="Slide Number Placeholder 8">
-            <a:extLst>
-              <a:ext uri="{FF2B5EF4-FFF2-40B4-BE49-F238E27FC236}">
-                <a16:creationId xmlns:a16="http://schemas.microsoft.com/office/drawing/2014/main" id="{FD33E6B9-543D-916F-D9DB-819F5A19F0FA}"/>
-              </a:ext>
-            </a:extLst>
-          </p:cNvPr>
+          <p:cNvPr id="9" name="Slide Number Placeholder 8"/>
           <p:cNvSpPr>
             <a:spLocks noGrp="1"/>
           </p:cNvSpPr>
@@ -1888,7 +2308,7 @@
     </p:spTree>
     <p:extLst>
       <p:ext uri="{BB962C8B-B14F-4D97-AF65-F5344CB8AC3E}">
-        <p14:creationId xmlns:p14="http://schemas.microsoft.com/office/powerpoint/2010/main" val="3981309042"/>
+        <p14:creationId xmlns:p14="http://schemas.microsoft.com/office/powerpoint/2010/main" val="739148330"/>
       </p:ext>
     </p:extLst>
   </p:cSld>
@@ -1917,13 +2337,7 @@
       </p:grpSpPr>
       <p:sp>
         <p:nvSpPr>
-          <p:cNvPr id="2" name="Title 1">
-            <a:extLst>
-              <a:ext uri="{FF2B5EF4-FFF2-40B4-BE49-F238E27FC236}">
-                <a16:creationId xmlns:a16="http://schemas.microsoft.com/office/drawing/2014/main" id="{76668D30-8A52-0609-14CC-9622EBF83381}"/>
-              </a:ext>
-            </a:extLst>
-          </p:cNvPr>
+          <p:cNvPr id="2" name="Title 1"/>
           <p:cNvSpPr>
             <a:spLocks noGrp="1"/>
           </p:cNvSpPr>
@@ -1940,19 +2354,13 @@
               <a:rPr lang="en-GB"/>
               <a:t>Click to edit Master title style</a:t>
             </a:r>
-            <a:endParaRPr lang="en-IE"/>
+            <a:endParaRPr lang="en-US" dirty="0"/>
           </a:p>
         </p:txBody>
       </p:sp>
       <p:sp>
         <p:nvSpPr>
-          <p:cNvPr id="3" name="Date Placeholder 2">
-            <a:extLst>
-              <a:ext uri="{FF2B5EF4-FFF2-40B4-BE49-F238E27FC236}">
-                <a16:creationId xmlns:a16="http://schemas.microsoft.com/office/drawing/2014/main" id="{795D9611-5800-259A-BB43-E58B858F8D86}"/>
-              </a:ext>
-            </a:extLst>
-          </p:cNvPr>
+          <p:cNvPr id="3" name="Date Placeholder 2"/>
           <p:cNvSpPr>
             <a:spLocks noGrp="1"/>
           </p:cNvSpPr>
@@ -1967,7 +2375,7 @@
           <a:p>
             <a:fld id="{2CA29558-1C25-4B84-8B2A-BC68C4A0CDF1}" type="datetimeFigureOut">
               <a:rPr lang="en-IE" smtClean="0"/>
-              <a:t>14/04/2026</a:t>
+              <a:t>24/05/2026</a:t>
             </a:fld>
             <a:endParaRPr lang="en-IE"/>
           </a:p>
@@ -1975,13 +2383,7 @@
       </p:sp>
       <p:sp>
         <p:nvSpPr>
-          <p:cNvPr id="4" name="Footer Placeholder 3">
-            <a:extLst>
-              <a:ext uri="{FF2B5EF4-FFF2-40B4-BE49-F238E27FC236}">
-                <a16:creationId xmlns:a16="http://schemas.microsoft.com/office/drawing/2014/main" id="{757D72D3-5745-05A3-3A0E-614D61F0AC1F}"/>
-              </a:ext>
-            </a:extLst>
-          </p:cNvPr>
+          <p:cNvPr id="4" name="Footer Placeholder 3"/>
           <p:cNvSpPr>
             <a:spLocks noGrp="1"/>
           </p:cNvSpPr>
@@ -2000,13 +2402,7 @@
       </p:sp>
       <p:sp>
         <p:nvSpPr>
-          <p:cNvPr id="5" name="Slide Number Placeholder 4">
-            <a:extLst>
-              <a:ext uri="{FF2B5EF4-FFF2-40B4-BE49-F238E27FC236}">
-                <a16:creationId xmlns:a16="http://schemas.microsoft.com/office/drawing/2014/main" id="{CEF0B51D-86C0-B01C-017A-AF055B79AF64}"/>
-              </a:ext>
-            </a:extLst>
-          </p:cNvPr>
+          <p:cNvPr id="5" name="Slide Number Placeholder 4"/>
           <p:cNvSpPr>
             <a:spLocks noGrp="1"/>
           </p:cNvSpPr>
@@ -2030,7 +2426,7 @@
     </p:spTree>
     <p:extLst>
       <p:ext uri="{BB962C8B-B14F-4D97-AF65-F5344CB8AC3E}">
-        <p14:creationId xmlns:p14="http://schemas.microsoft.com/office/powerpoint/2010/main" val="1594231985"/>
+        <p14:creationId xmlns:p14="http://schemas.microsoft.com/office/powerpoint/2010/main" val="507499821"/>
       </p:ext>
     </p:extLst>
   </p:cSld>
@@ -2059,13 +2455,7 @@
       </p:grpSpPr>
       <p:sp>
         <p:nvSpPr>
-          <p:cNvPr id="2" name="Date Placeholder 1">
-            <a:extLst>
-              <a:ext uri="{FF2B5EF4-FFF2-40B4-BE49-F238E27FC236}">
-                <a16:creationId xmlns:a16="http://schemas.microsoft.com/office/drawing/2014/main" id="{8698A4DF-57CE-5381-2369-AE1F86BFAB60}"/>
-              </a:ext>
-            </a:extLst>
-          </p:cNvPr>
+          <p:cNvPr id="2" name="Date Placeholder 1"/>
           <p:cNvSpPr>
             <a:spLocks noGrp="1"/>
           </p:cNvSpPr>
@@ -2080,7 +2470,7 @@
           <a:p>
             <a:fld id="{2CA29558-1C25-4B84-8B2A-BC68C4A0CDF1}" type="datetimeFigureOut">
               <a:rPr lang="en-IE" smtClean="0"/>
-              <a:t>14/04/2026</a:t>
+              <a:t>24/05/2026</a:t>
             </a:fld>
             <a:endParaRPr lang="en-IE"/>
           </a:p>
@@ -2088,13 +2478,7 @@
       </p:sp>
       <p:sp>
         <p:nvSpPr>
-          <p:cNvPr id="3" name="Footer Placeholder 2">
-            <a:extLst>
-              <a:ext uri="{FF2B5EF4-FFF2-40B4-BE49-F238E27FC236}">
-                <a16:creationId xmlns:a16="http://schemas.microsoft.com/office/drawing/2014/main" id="{A254262B-018E-196B-FB4D-E6F24778AC78}"/>
-              </a:ext>
-            </a:extLst>
-          </p:cNvPr>
+          <p:cNvPr id="3" name="Footer Placeholder 2"/>
           <p:cNvSpPr>
             <a:spLocks noGrp="1"/>
           </p:cNvSpPr>
@@ -2113,13 +2497,7 @@
       </p:sp>
       <p:sp>
         <p:nvSpPr>
-          <p:cNvPr id="4" name="Slide Number Placeholder 3">
-            <a:extLst>
-              <a:ext uri="{FF2B5EF4-FFF2-40B4-BE49-F238E27FC236}">
-                <a16:creationId xmlns:a16="http://schemas.microsoft.com/office/drawing/2014/main" id="{2B6BE527-9AB7-261C-42C2-5937AF744EA9}"/>
-              </a:ext>
-            </a:extLst>
-          </p:cNvPr>
+          <p:cNvPr id="4" name="Slide Number Placeholder 3"/>
           <p:cNvSpPr>
             <a:spLocks noGrp="1"/>
           </p:cNvSpPr>
@@ -2143,7 +2521,7 @@
     </p:spTree>
     <p:extLst>
       <p:ext uri="{BB962C8B-B14F-4D97-AF65-F5344CB8AC3E}">
-        <p14:creationId xmlns:p14="http://schemas.microsoft.com/office/powerpoint/2010/main" val="687227383"/>
+        <p14:creationId xmlns:p14="http://schemas.microsoft.com/office/powerpoint/2010/main" val="1876508491"/>
       </p:ext>
     </p:extLst>
   </p:cSld>
@@ -2172,13 +2550,7 @@
       </p:grpSpPr>
       <p:sp>
         <p:nvSpPr>
-          <p:cNvPr id="2" name="Title 1">
-            <a:extLst>
-              <a:ext uri="{FF2B5EF4-FFF2-40B4-BE49-F238E27FC236}">
-                <a16:creationId xmlns:a16="http://schemas.microsoft.com/office/drawing/2014/main" id="{B3E619C4-6A8F-BE38-D233-03C2FF4F0CB7}"/>
-              </a:ext>
-            </a:extLst>
-          </p:cNvPr>
+          <p:cNvPr id="2" name="Title 1"/>
           <p:cNvSpPr>
             <a:spLocks noGrp="1"/>
           </p:cNvSpPr>
@@ -2188,8 +2560,8 @@
         </p:nvSpPr>
         <p:spPr>
           <a:xfrm>
-            <a:off x="839788" y="457200"/>
-            <a:ext cx="3932237" cy="1600200"/>
+            <a:off x="629841" y="457200"/>
+            <a:ext cx="2949178" cy="1600200"/>
           </a:xfrm>
         </p:spPr>
         <p:txBody>
@@ -2204,19 +2576,13 @@
               <a:rPr lang="en-GB"/>
               <a:t>Click to edit Master title style</a:t>
             </a:r>
-            <a:endParaRPr lang="en-IE"/>
+            <a:endParaRPr lang="en-US" dirty="0"/>
           </a:p>
         </p:txBody>
       </p:sp>
       <p:sp>
         <p:nvSpPr>
-          <p:cNvPr id="3" name="Content Placeholder 2">
-            <a:extLst>
-              <a:ext uri="{FF2B5EF4-FFF2-40B4-BE49-F238E27FC236}">
-                <a16:creationId xmlns:a16="http://schemas.microsoft.com/office/drawing/2014/main" id="{A8441789-C660-84B3-064E-A4851F858AEE}"/>
-              </a:ext>
-            </a:extLst>
-          </p:cNvPr>
+          <p:cNvPr id="3" name="Content Placeholder 2"/>
           <p:cNvSpPr>
             <a:spLocks noGrp="1"/>
           </p:cNvSpPr>
@@ -2226,8 +2592,8 @@
         </p:nvSpPr>
         <p:spPr>
           <a:xfrm>
-            <a:off x="5183188" y="987425"/>
-            <a:ext cx="6172200" cy="4873625"/>
+            <a:off x="3887391" y="987426"/>
+            <a:ext cx="4629150" cy="4873625"/>
           </a:xfrm>
         </p:spPr>
         <p:txBody>
@@ -2295,19 +2661,13 @@
               <a:rPr lang="en-GB"/>
               <a:t>Fifth level</a:t>
             </a:r>
-            <a:endParaRPr lang="en-IE"/>
+            <a:endParaRPr lang="en-US" dirty="0"/>
           </a:p>
         </p:txBody>
       </p:sp>
       <p:sp>
         <p:nvSpPr>
-          <p:cNvPr id="4" name="Text Placeholder 3">
-            <a:extLst>
-              <a:ext uri="{FF2B5EF4-FFF2-40B4-BE49-F238E27FC236}">
-                <a16:creationId xmlns:a16="http://schemas.microsoft.com/office/drawing/2014/main" id="{BA30F7BE-0976-FA47-D02C-9598B32A3F66}"/>
-              </a:ext>
-            </a:extLst>
-          </p:cNvPr>
+          <p:cNvPr id="4" name="Text Placeholder 3"/>
           <p:cNvSpPr>
             <a:spLocks noGrp="1"/>
           </p:cNvSpPr>
@@ -2317,8 +2677,8 @@
         </p:nvSpPr>
         <p:spPr>
           <a:xfrm>
-            <a:off x="839788" y="2057400"/>
-            <a:ext cx="3932237" cy="3811588"/>
+            <a:off x="629841" y="2057400"/>
+            <a:ext cx="2949178" cy="3811588"/>
           </a:xfrm>
         </p:spPr>
         <p:txBody>
@@ -2372,13 +2732,7 @@
       </p:sp>
       <p:sp>
         <p:nvSpPr>
-          <p:cNvPr id="5" name="Date Placeholder 4">
-            <a:extLst>
-              <a:ext uri="{FF2B5EF4-FFF2-40B4-BE49-F238E27FC236}">
-                <a16:creationId xmlns:a16="http://schemas.microsoft.com/office/drawing/2014/main" id="{F31852F4-F428-0794-90BA-5035CB226673}"/>
-              </a:ext>
-            </a:extLst>
-          </p:cNvPr>
+          <p:cNvPr id="5" name="Date Placeholder 4"/>
           <p:cNvSpPr>
             <a:spLocks noGrp="1"/>
           </p:cNvSpPr>
@@ -2393,7 +2747,7 @@
           <a:p>
             <a:fld id="{2CA29558-1C25-4B84-8B2A-BC68C4A0CDF1}" type="datetimeFigureOut">
               <a:rPr lang="en-IE" smtClean="0"/>
-              <a:t>14/04/2026</a:t>
+              <a:t>24/05/2026</a:t>
             </a:fld>
             <a:endParaRPr lang="en-IE"/>
           </a:p>
@@ -2401,13 +2755,7 @@
       </p:sp>
       <p:sp>
         <p:nvSpPr>
-          <p:cNvPr id="6" name="Footer Placeholder 5">
-            <a:extLst>
-              <a:ext uri="{FF2B5EF4-FFF2-40B4-BE49-F238E27FC236}">
-                <a16:creationId xmlns:a16="http://schemas.microsoft.com/office/drawing/2014/main" id="{5D63D6F0-7448-BF47-0D08-67C4ECA757CB}"/>
-              </a:ext>
-            </a:extLst>
-          </p:cNvPr>
+          <p:cNvPr id="6" name="Footer Placeholder 5"/>
           <p:cNvSpPr>
             <a:spLocks noGrp="1"/>
           </p:cNvSpPr>
@@ -2426,13 +2774,7 @@
       </p:sp>
       <p:sp>
         <p:nvSpPr>
-          <p:cNvPr id="7" name="Slide Number Placeholder 6">
-            <a:extLst>
-              <a:ext uri="{FF2B5EF4-FFF2-40B4-BE49-F238E27FC236}">
-                <a16:creationId xmlns:a16="http://schemas.microsoft.com/office/drawing/2014/main" id="{FFC383E8-5BBE-9BD9-416B-CB440BF017F3}"/>
-              </a:ext>
-            </a:extLst>
-          </p:cNvPr>
+          <p:cNvPr id="7" name="Slide Number Placeholder 6"/>
           <p:cNvSpPr>
             <a:spLocks noGrp="1"/>
           </p:cNvSpPr>
@@ -2456,7 +2798,7 @@
     </p:spTree>
     <p:extLst>
       <p:ext uri="{BB962C8B-B14F-4D97-AF65-F5344CB8AC3E}">
-        <p14:creationId xmlns:p14="http://schemas.microsoft.com/office/powerpoint/2010/main" val="3798133674"/>
+        <p14:creationId xmlns:p14="http://schemas.microsoft.com/office/powerpoint/2010/main" val="2345160763"/>
       </p:ext>
     </p:extLst>
   </p:cSld>
@@ -2485,13 +2827,7 @@
       </p:grpSpPr>
       <p:sp>
         <p:nvSpPr>
-          <p:cNvPr id="2" name="Title 1">
-            <a:extLst>
-              <a:ext uri="{FF2B5EF4-FFF2-40B4-BE49-F238E27FC236}">
-                <a16:creationId xmlns:a16="http://schemas.microsoft.com/office/drawing/2014/main" id="{999F2EEE-63C1-8B82-545E-8AA4C365E334}"/>
-              </a:ext>
-            </a:extLst>
-          </p:cNvPr>
+          <p:cNvPr id="2" name="Title 1"/>
           <p:cNvSpPr>
             <a:spLocks noGrp="1"/>
           </p:cNvSpPr>
@@ -2501,8 +2837,8 @@
         </p:nvSpPr>
         <p:spPr>
           <a:xfrm>
-            <a:off x="839788" y="457200"/>
-            <a:ext cx="3932237" cy="1600200"/>
+            <a:off x="629841" y="457200"/>
+            <a:ext cx="2949178" cy="1600200"/>
           </a:xfrm>
         </p:spPr>
         <p:txBody>
@@ -2517,21 +2853,15 @@
               <a:rPr lang="en-GB"/>
               <a:t>Click to edit Master title style</a:t>
             </a:r>
-            <a:endParaRPr lang="en-IE"/>
+            <a:endParaRPr lang="en-US" dirty="0"/>
           </a:p>
         </p:txBody>
       </p:sp>
       <p:sp>
         <p:nvSpPr>
-          <p:cNvPr id="3" name="Picture Placeholder 2">
-            <a:extLst>
-              <a:ext uri="{FF2B5EF4-FFF2-40B4-BE49-F238E27FC236}">
-                <a16:creationId xmlns:a16="http://schemas.microsoft.com/office/drawing/2014/main" id="{43C20C5E-2F27-FC42-8F3F-2058131CFAD8}"/>
-              </a:ext>
-            </a:extLst>
-          </p:cNvPr>
+          <p:cNvPr id="3" name="Picture Placeholder 2"/>
           <p:cNvSpPr>
-            <a:spLocks noGrp="1"/>
+            <a:spLocks noGrp="1" noChangeAspect="1"/>
           </p:cNvSpPr>
           <p:nvPr>
             <p:ph type="pic" idx="1"/>
@@ -2539,12 +2869,12 @@
         </p:nvSpPr>
         <p:spPr>
           <a:xfrm>
-            <a:off x="5183188" y="987425"/>
-            <a:ext cx="6172200" cy="4873625"/>
+            <a:off x="3887391" y="987426"/>
+            <a:ext cx="4629150" cy="4873625"/>
           </a:xfrm>
         </p:spPr>
         <p:txBody>
-          <a:bodyPr/>
+          <a:bodyPr anchor="t"/>
           <a:lstStyle>
             <a:lvl1pPr marL="0" indent="0">
               <a:buNone/>
@@ -2584,19 +2914,17 @@
             </a:lvl9pPr>
           </a:lstStyle>
           <a:p>
-            <a:endParaRPr lang="en-IE"/>
+            <a:r>
+              <a:rPr lang="en-GB"/>
+              <a:t>Click icon to add picture</a:t>
+            </a:r>
+            <a:endParaRPr lang="en-US" dirty="0"/>
           </a:p>
         </p:txBody>
       </p:sp>
       <p:sp>
         <p:nvSpPr>
-          <p:cNvPr id="4" name="Text Placeholder 3">
-            <a:extLst>
-              <a:ext uri="{FF2B5EF4-FFF2-40B4-BE49-F238E27FC236}">
-                <a16:creationId xmlns:a16="http://schemas.microsoft.com/office/drawing/2014/main" id="{4CC3ED19-529F-7122-0AA2-8DCB8834BDA4}"/>
-              </a:ext>
-            </a:extLst>
-          </p:cNvPr>
+          <p:cNvPr id="4" name="Text Placeholder 3"/>
           <p:cNvSpPr>
             <a:spLocks noGrp="1"/>
           </p:cNvSpPr>
@@ -2606,8 +2934,8 @@
         </p:nvSpPr>
         <p:spPr>
           <a:xfrm>
-            <a:off x="839788" y="2057400"/>
-            <a:ext cx="3932237" cy="3811588"/>
+            <a:off x="629841" y="2057400"/>
+            <a:ext cx="2949178" cy="3811588"/>
           </a:xfrm>
         </p:spPr>
         <p:txBody>
@@ -2661,13 +2989,7 @@
       </p:sp>
       <p:sp>
         <p:nvSpPr>
-          <p:cNvPr id="5" name="Date Placeholder 4">
-            <a:extLst>
-              <a:ext uri="{FF2B5EF4-FFF2-40B4-BE49-F238E27FC236}">
-                <a16:creationId xmlns:a16="http://schemas.microsoft.com/office/drawing/2014/main" id="{E740E93C-2AB4-6E98-0847-5D9CE9B03FFB}"/>
-              </a:ext>
-            </a:extLst>
-          </p:cNvPr>
+          <p:cNvPr id="5" name="Date Placeholder 4"/>
           <p:cNvSpPr>
             <a:spLocks noGrp="1"/>
           </p:cNvSpPr>
@@ -2682,7 +3004,7 @@
           <a:p>
             <a:fld id="{2CA29558-1C25-4B84-8B2A-BC68C4A0CDF1}" type="datetimeFigureOut">
               <a:rPr lang="en-IE" smtClean="0"/>
-              <a:t>14/04/2026</a:t>
+              <a:t>24/05/2026</a:t>
             </a:fld>
             <a:endParaRPr lang="en-IE"/>
           </a:p>
@@ -2690,13 +3012,7 @@
       </p:sp>
       <p:sp>
         <p:nvSpPr>
-          <p:cNvPr id="6" name="Footer Placeholder 5">
-            <a:extLst>
-              <a:ext uri="{FF2B5EF4-FFF2-40B4-BE49-F238E27FC236}">
-                <a16:creationId xmlns:a16="http://schemas.microsoft.com/office/drawing/2014/main" id="{D17AAAB8-1BFC-8241-E5A5-A866E40DD606}"/>
-              </a:ext>
-            </a:extLst>
-          </p:cNvPr>
+          <p:cNvPr id="6" name="Footer Placeholder 5"/>
           <p:cNvSpPr>
             <a:spLocks noGrp="1"/>
           </p:cNvSpPr>
@@ -2715,13 +3031,7 @@
       </p:sp>
       <p:sp>
         <p:nvSpPr>
-          <p:cNvPr id="7" name="Slide Number Placeholder 6">
-            <a:extLst>
-              <a:ext uri="{FF2B5EF4-FFF2-40B4-BE49-F238E27FC236}">
-                <a16:creationId xmlns:a16="http://schemas.microsoft.com/office/drawing/2014/main" id="{900899D7-3A3A-AA86-5B49-EEDECF9E1C8F}"/>
-              </a:ext>
-            </a:extLst>
-          </p:cNvPr>
+          <p:cNvPr id="7" name="Slide Number Placeholder 6"/>
           <p:cNvSpPr>
             <a:spLocks noGrp="1"/>
           </p:cNvSpPr>
@@ -2745,7 +3055,7 @@
     </p:spTree>
     <p:extLst>
       <p:ext uri="{BB962C8B-B14F-4D97-AF65-F5344CB8AC3E}">
-        <p14:creationId xmlns:p14="http://schemas.microsoft.com/office/powerpoint/2010/main" val="3766520637"/>
+        <p14:creationId xmlns:p14="http://schemas.microsoft.com/office/powerpoint/2010/main" val="1181313533"/>
       </p:ext>
     </p:extLst>
   </p:cSld>
@@ -2779,13 +3089,7 @@
       </p:grpSpPr>
       <p:sp>
         <p:nvSpPr>
-          <p:cNvPr id="2" name="Title Placeholder 1">
-            <a:extLst>
-              <a:ext uri="{FF2B5EF4-FFF2-40B4-BE49-F238E27FC236}">
-                <a16:creationId xmlns:a16="http://schemas.microsoft.com/office/drawing/2014/main" id="{FDD41547-C8E1-BDAF-A2F8-67FB52011498}"/>
-              </a:ext>
-            </a:extLst>
-          </p:cNvPr>
+          <p:cNvPr id="2" name="Title Placeholder 1"/>
           <p:cNvSpPr>
             <a:spLocks noGrp="1"/>
           </p:cNvSpPr>
@@ -2795,8 +3099,8 @@
         </p:nvSpPr>
         <p:spPr>
           <a:xfrm>
-            <a:off x="838200" y="365125"/>
-            <a:ext cx="10515600" cy="1325563"/>
+            <a:off x="628650" y="365126"/>
+            <a:ext cx="7886700" cy="1325563"/>
           </a:xfrm>
           <a:prstGeom prst="rect">
             <a:avLst/>
@@ -2812,19 +3116,13 @@
               <a:rPr lang="en-GB"/>
               <a:t>Click to edit Master title style</a:t>
             </a:r>
-            <a:endParaRPr lang="en-IE"/>
+            <a:endParaRPr lang="en-US" dirty="0"/>
           </a:p>
         </p:txBody>
       </p:sp>
       <p:sp>
         <p:nvSpPr>
-          <p:cNvPr id="3" name="Text Placeholder 2">
-            <a:extLst>
-              <a:ext uri="{FF2B5EF4-FFF2-40B4-BE49-F238E27FC236}">
-                <a16:creationId xmlns:a16="http://schemas.microsoft.com/office/drawing/2014/main" id="{7CCA8880-9EFD-75F3-3C04-C472752CB63E}"/>
-              </a:ext>
-            </a:extLst>
-          </p:cNvPr>
+          <p:cNvPr id="3" name="Text Placeholder 2"/>
           <p:cNvSpPr>
             <a:spLocks noGrp="1"/>
           </p:cNvSpPr>
@@ -2834,8 +3132,8 @@
         </p:nvSpPr>
         <p:spPr>
           <a:xfrm>
-            <a:off x="838200" y="1825625"/>
-            <a:ext cx="10515600" cy="4351338"/>
+            <a:off x="628650" y="1825625"/>
+            <a:ext cx="7886700" cy="4351338"/>
           </a:xfrm>
           <a:prstGeom prst="rect">
             <a:avLst/>
@@ -2880,19 +3178,13 @@
               <a:rPr lang="en-GB"/>
               <a:t>Fifth level</a:t>
             </a:r>
-            <a:endParaRPr lang="en-IE"/>
+            <a:endParaRPr lang="en-US" dirty="0"/>
           </a:p>
         </p:txBody>
       </p:sp>
       <p:sp>
         <p:nvSpPr>
-          <p:cNvPr id="4" name="Date Placeholder 3">
-            <a:extLst>
-              <a:ext uri="{FF2B5EF4-FFF2-40B4-BE49-F238E27FC236}">
-                <a16:creationId xmlns:a16="http://schemas.microsoft.com/office/drawing/2014/main" id="{A744CCC2-0822-3A61-F248-73D694EE6124}"/>
-              </a:ext>
-            </a:extLst>
-          </p:cNvPr>
+          <p:cNvPr id="4" name="Date Placeholder 3"/>
           <p:cNvSpPr>
             <a:spLocks noGrp="1"/>
           </p:cNvSpPr>
@@ -2902,8 +3194,8 @@
         </p:nvSpPr>
         <p:spPr>
           <a:xfrm>
-            <a:off x="838200" y="6356350"/>
-            <a:ext cx="2743200" cy="365125"/>
+            <a:off x="628650" y="6356351"/>
+            <a:ext cx="2057400" cy="365125"/>
           </a:xfrm>
           <a:prstGeom prst="rect">
             <a:avLst/>
@@ -2925,7 +3217,7 @@
           <a:p>
             <a:fld id="{2CA29558-1C25-4B84-8B2A-BC68C4A0CDF1}" type="datetimeFigureOut">
               <a:rPr lang="en-IE" smtClean="0"/>
-              <a:t>14/04/2026</a:t>
+              <a:t>24/05/2026</a:t>
             </a:fld>
             <a:endParaRPr lang="en-IE"/>
           </a:p>
@@ -2933,13 +3225,7 @@
       </p:sp>
       <p:sp>
         <p:nvSpPr>
-          <p:cNvPr id="5" name="Footer Placeholder 4">
-            <a:extLst>
-              <a:ext uri="{FF2B5EF4-FFF2-40B4-BE49-F238E27FC236}">
-                <a16:creationId xmlns:a16="http://schemas.microsoft.com/office/drawing/2014/main" id="{CD609D5D-05ED-01EC-C911-BF368CB737A4}"/>
-              </a:ext>
-            </a:extLst>
-          </p:cNvPr>
+          <p:cNvPr id="5" name="Footer Placeholder 4"/>
           <p:cNvSpPr>
             <a:spLocks noGrp="1"/>
           </p:cNvSpPr>
@@ -2949,8 +3235,8 @@
         </p:nvSpPr>
         <p:spPr>
           <a:xfrm>
-            <a:off x="4038600" y="6356350"/>
-            <a:ext cx="4114800" cy="365125"/>
+            <a:off x="3028950" y="6356351"/>
+            <a:ext cx="3086100" cy="365125"/>
           </a:xfrm>
           <a:prstGeom prst="rect">
             <a:avLst/>
@@ -2976,13 +3262,7 @@
       </p:sp>
       <p:sp>
         <p:nvSpPr>
-          <p:cNvPr id="6" name="Slide Number Placeholder 5">
-            <a:extLst>
-              <a:ext uri="{FF2B5EF4-FFF2-40B4-BE49-F238E27FC236}">
-                <a16:creationId xmlns:a16="http://schemas.microsoft.com/office/drawing/2014/main" id="{92E251D2-A64C-C5E6-D3A0-0C11EB474224}"/>
-              </a:ext>
-            </a:extLst>
-          </p:cNvPr>
+          <p:cNvPr id="6" name="Slide Number Placeholder 5"/>
           <p:cNvSpPr>
             <a:spLocks noGrp="1"/>
           </p:cNvSpPr>
@@ -2992,8 +3272,8 @@
         </p:nvSpPr>
         <p:spPr>
           <a:xfrm>
-            <a:off x="8610600" y="6356350"/>
-            <a:ext cx="2743200" cy="365125"/>
+            <a:off x="6457950" y="6356351"/>
+            <a:ext cx="2057400" cy="365125"/>
           </a:xfrm>
           <a:prstGeom prst="rect">
             <a:avLst/>
@@ -3024,23 +3304,23 @@
     </p:spTree>
     <p:extLst>
       <p:ext uri="{BB962C8B-B14F-4D97-AF65-F5344CB8AC3E}">
-        <p14:creationId xmlns:p14="http://schemas.microsoft.com/office/powerpoint/2010/main" val="3224736222"/>
+        <p14:creationId xmlns:p14="http://schemas.microsoft.com/office/powerpoint/2010/main" val="2440633720"/>
       </p:ext>
     </p:extLst>
   </p:cSld>
   <p:clrMap bg1="lt1" tx1="dk1" bg2="lt2" tx2="dk2" accent1="accent1" accent2="accent2" accent3="accent3" accent4="accent4" accent5="accent5" accent6="accent6" hlink="hlink" folHlink="folHlink"/>
   <p:sldLayoutIdLst>
-    <p:sldLayoutId id="2147483649" r:id="rId1"/>
-    <p:sldLayoutId id="2147483650" r:id="rId2"/>
-    <p:sldLayoutId id="2147483651" r:id="rId3"/>
-    <p:sldLayoutId id="2147483652" r:id="rId4"/>
-    <p:sldLayoutId id="2147483653" r:id="rId5"/>
-    <p:sldLayoutId id="2147483654" r:id="rId6"/>
-    <p:sldLayoutId id="2147483655" r:id="rId7"/>
-    <p:sldLayoutId id="2147483656" r:id="rId8"/>
-    <p:sldLayoutId id="2147483657" r:id="rId9"/>
-    <p:sldLayoutId id="2147483658" r:id="rId10"/>
-    <p:sldLayoutId id="2147483659" r:id="rId11"/>
+    <p:sldLayoutId id="2147483661" r:id="rId1"/>
+    <p:sldLayoutId id="2147483662" r:id="rId2"/>
+    <p:sldLayoutId id="2147483663" r:id="rId3"/>
+    <p:sldLayoutId id="2147483664" r:id="rId4"/>
+    <p:sldLayoutId id="2147483665" r:id="rId5"/>
+    <p:sldLayoutId id="2147483666" r:id="rId6"/>
+    <p:sldLayoutId id="2147483667" r:id="rId7"/>
+    <p:sldLayoutId id="2147483668" r:id="rId8"/>
+    <p:sldLayoutId id="2147483669" r:id="rId9"/>
+    <p:sldLayoutId id="2147483670" r:id="rId10"/>
+    <p:sldLayoutId id="2147483671" r:id="rId11"/>
   </p:sldLayoutIdLst>
   <p:txStyles>
     <p:titleStyle>
@@ -3330,7 +3610,13 @@
   <p:cSld>
     <p:spTree>
       <p:nvGrpSpPr>
-        <p:cNvPr id="1" name=""/>
+        <p:cNvPr id="1" name="">
+          <a:extLst>
+            <a:ext uri="{FF2B5EF4-FFF2-40B4-BE49-F238E27FC236}">
+              <a16:creationId xmlns:a16="http://schemas.microsoft.com/office/drawing/2014/main" id="{20FDEA7E-AFF0-3771-1363-9A81CDBF7F2D}"/>
+            </a:ext>
+          </a:extLst>
+        </p:cNvPr>
         <p:cNvGrpSpPr/>
         <p:nvPr/>
       </p:nvGrpSpPr>
@@ -3344,36 +3630,5779 @@
       </p:grpSpPr>
       <p:sp>
         <p:nvSpPr>
-          <p:cNvPr id="2" name="Title 1">
+          <p:cNvPr id="3075" name="Text Box 81">
             <a:extLst>
               <a:ext uri="{FF2B5EF4-FFF2-40B4-BE49-F238E27FC236}">
-                <a16:creationId xmlns:a16="http://schemas.microsoft.com/office/drawing/2014/main" id="{658AF5CE-8359-069C-780E-D047F7D4FEF5}"/>
+                <a16:creationId xmlns:a16="http://schemas.microsoft.com/office/drawing/2014/main" id="{93FD83C5-069E-74DC-7959-72F4880CF458}"/>
+              </a:ext>
+            </a:extLst>
+          </p:cNvPr>
+          <p:cNvSpPr txBox="1">
+            <a:spLocks noChangeArrowheads="1"/>
+          </p:cNvSpPr>
+          <p:nvPr/>
+        </p:nvSpPr>
+        <p:spPr bwMode="auto">
+          <a:xfrm>
+            <a:off x="0" y="6552482"/>
+            <a:ext cx="9144000" cy="305518"/>
+          </a:xfrm>
+          <a:prstGeom prst="rect">
+            <a:avLst/>
+          </a:prstGeom>
+          <a:solidFill>
+            <a:srgbClr val="006684"/>
+          </a:solidFill>
+          <a:ln>
+            <a:noFill/>
+          </a:ln>
+          <a:extLst>
+            <a:ext uri="{91240B29-F687-4F45-9708-019B960494DF}">
+              <a14:hiddenLine xmlns:a14="http://schemas.microsoft.com/office/drawing/2010/main" w="9525">
+                <a:solidFill>
+                  <a:srgbClr val="000000"/>
+                </a:solidFill>
+                <a:miter lim="800000"/>
+                <a:headEnd/>
+                <a:tailEnd/>
+              </a14:hiddenLine>
+            </a:ext>
+          </a:extLst>
+        </p:spPr>
+        <p:txBody>
+          <a:bodyPr anchor="ctr" anchorCtr="1"/>
+          <a:lstStyle>
+            <a:lvl1pPr defTabSz="915988">
+              <a:defRPr sz="2300">
+                <a:solidFill>
+                  <a:schemeClr val="tx1"/>
+                </a:solidFill>
+                <a:latin typeface="Arial" panose="020B0604020202020204" pitchFamily="34" charset="0"/>
+                <a:ea typeface="MS PGothic" panose="020B0600070205080204" pitchFamily="34" charset="-128"/>
+              </a:defRPr>
+            </a:lvl1pPr>
+            <a:lvl2pPr marL="742950" indent="-285750" defTabSz="915988">
+              <a:defRPr sz="2300">
+                <a:solidFill>
+                  <a:schemeClr val="tx1"/>
+                </a:solidFill>
+                <a:latin typeface="Arial" panose="020B0604020202020204" pitchFamily="34" charset="0"/>
+                <a:ea typeface="MS PGothic" panose="020B0600070205080204" pitchFamily="34" charset="-128"/>
+              </a:defRPr>
+            </a:lvl2pPr>
+            <a:lvl3pPr marL="1143000" indent="-228600" defTabSz="915988">
+              <a:defRPr sz="2300">
+                <a:solidFill>
+                  <a:schemeClr val="tx1"/>
+                </a:solidFill>
+                <a:latin typeface="Arial" panose="020B0604020202020204" pitchFamily="34" charset="0"/>
+                <a:ea typeface="MS PGothic" panose="020B0600070205080204" pitchFamily="34" charset="-128"/>
+              </a:defRPr>
+            </a:lvl3pPr>
+            <a:lvl4pPr marL="1600200" indent="-228600" defTabSz="915988">
+              <a:defRPr sz="2300">
+                <a:solidFill>
+                  <a:schemeClr val="tx1"/>
+                </a:solidFill>
+                <a:latin typeface="Arial" panose="020B0604020202020204" pitchFamily="34" charset="0"/>
+                <a:ea typeface="MS PGothic" panose="020B0600070205080204" pitchFamily="34" charset="-128"/>
+              </a:defRPr>
+            </a:lvl4pPr>
+            <a:lvl5pPr marL="2057400" indent="-228600" defTabSz="915988">
+              <a:defRPr sz="2300">
+                <a:solidFill>
+                  <a:schemeClr val="tx1"/>
+                </a:solidFill>
+                <a:latin typeface="Arial" panose="020B0604020202020204" pitchFamily="34" charset="0"/>
+                <a:ea typeface="MS PGothic" panose="020B0600070205080204" pitchFamily="34" charset="-128"/>
+              </a:defRPr>
+            </a:lvl5pPr>
+            <a:lvl6pPr marL="2514600" indent="-228600" defTabSz="915988" eaLnBrk="0" fontAlgn="base" hangingPunct="0">
+              <a:spcBef>
+                <a:spcPct val="0"/>
+              </a:spcBef>
+              <a:spcAft>
+                <a:spcPct val="0"/>
+              </a:spcAft>
+              <a:defRPr sz="2300">
+                <a:solidFill>
+                  <a:schemeClr val="tx1"/>
+                </a:solidFill>
+                <a:latin typeface="Arial" panose="020B0604020202020204" pitchFamily="34" charset="0"/>
+                <a:ea typeface="MS PGothic" panose="020B0600070205080204" pitchFamily="34" charset="-128"/>
+              </a:defRPr>
+            </a:lvl6pPr>
+            <a:lvl7pPr marL="2971800" indent="-228600" defTabSz="915988" eaLnBrk="0" fontAlgn="base" hangingPunct="0">
+              <a:spcBef>
+                <a:spcPct val="0"/>
+              </a:spcBef>
+              <a:spcAft>
+                <a:spcPct val="0"/>
+              </a:spcAft>
+              <a:defRPr sz="2300">
+                <a:solidFill>
+                  <a:schemeClr val="tx1"/>
+                </a:solidFill>
+                <a:latin typeface="Arial" panose="020B0604020202020204" pitchFamily="34" charset="0"/>
+                <a:ea typeface="MS PGothic" panose="020B0600070205080204" pitchFamily="34" charset="-128"/>
+              </a:defRPr>
+            </a:lvl7pPr>
+            <a:lvl8pPr marL="3429000" indent="-228600" defTabSz="915988" eaLnBrk="0" fontAlgn="base" hangingPunct="0">
+              <a:spcBef>
+                <a:spcPct val="0"/>
+              </a:spcBef>
+              <a:spcAft>
+                <a:spcPct val="0"/>
+              </a:spcAft>
+              <a:defRPr sz="2300">
+                <a:solidFill>
+                  <a:schemeClr val="tx1"/>
+                </a:solidFill>
+                <a:latin typeface="Arial" panose="020B0604020202020204" pitchFamily="34" charset="0"/>
+                <a:ea typeface="MS PGothic" panose="020B0600070205080204" pitchFamily="34" charset="-128"/>
+              </a:defRPr>
+            </a:lvl8pPr>
+            <a:lvl9pPr marL="3886200" indent="-228600" defTabSz="915988" eaLnBrk="0" fontAlgn="base" hangingPunct="0">
+              <a:spcBef>
+                <a:spcPct val="0"/>
+              </a:spcBef>
+              <a:spcAft>
+                <a:spcPct val="0"/>
+              </a:spcAft>
+              <a:defRPr sz="2300">
+                <a:solidFill>
+                  <a:schemeClr val="tx1"/>
+                </a:solidFill>
+                <a:latin typeface="Arial" panose="020B0604020202020204" pitchFamily="34" charset="0"/>
+                <a:ea typeface="MS PGothic" panose="020B0600070205080204" pitchFamily="34" charset="-128"/>
+              </a:defRPr>
+            </a:lvl9pPr>
+          </a:lstStyle>
+          <a:p>
+            <a:pPr eaLnBrk="1" hangingPunct="1">
+              <a:spcBef>
+                <a:spcPct val="50000"/>
+              </a:spcBef>
+            </a:pPr>
+            <a:endParaRPr lang="en-US" altLang="en-US" sz="917" b="1">
+              <a:solidFill>
+                <a:srgbClr val="D11242"/>
+              </a:solidFill>
+              <a:cs typeface="Arial" panose="020B0604020202020204" pitchFamily="34" charset="0"/>
+            </a:endParaRPr>
+          </a:p>
+        </p:txBody>
+      </p:sp>
+      <p:sp>
+        <p:nvSpPr>
+          <p:cNvPr id="3076" name="Rectangle 9">
+            <a:extLst>
+              <a:ext uri="{FF2B5EF4-FFF2-40B4-BE49-F238E27FC236}">
+                <a16:creationId xmlns:a16="http://schemas.microsoft.com/office/drawing/2014/main" id="{4160EE50-4CB1-8CA2-997A-D2F7D5B3E3C2}"/>
               </a:ext>
             </a:extLst>
           </p:cNvPr>
           <p:cNvSpPr>
-            <a:spLocks noGrp="1"/>
+            <a:spLocks noChangeArrowheads="1"/>
           </p:cNvSpPr>
-          <p:nvPr>
-            <p:ph type="ctrTitle"/>
-          </p:nvPr>
+          <p:nvPr/>
         </p:nvSpPr>
-        <p:spPr/>
+        <p:spPr bwMode="auto">
+          <a:xfrm>
+            <a:off x="208052" y="6567945"/>
+            <a:ext cx="6357665" cy="233462"/>
+          </a:xfrm>
+          <a:prstGeom prst="rect">
+            <a:avLst/>
+          </a:prstGeom>
+          <a:noFill/>
+          <a:ln>
+            <a:noFill/>
+          </a:ln>
+          <a:extLst>
+            <a:ext uri="{909E8E84-426E-40DD-AFC4-6F175D3DCCD1}">
+              <a14:hiddenFill xmlns:a14="http://schemas.microsoft.com/office/drawing/2010/main">
+                <a:solidFill>
+                  <a:srgbClr val="FFFFFF"/>
+                </a:solidFill>
+              </a14:hiddenFill>
+            </a:ext>
+            <a:ext uri="{91240B29-F687-4F45-9708-019B960494DF}">
+              <a14:hiddenLine xmlns:a14="http://schemas.microsoft.com/office/drawing/2010/main" w="9525">
+                <a:solidFill>
+                  <a:srgbClr val="000000"/>
+                </a:solidFill>
+                <a:miter lim="800000"/>
+                <a:headEnd/>
+                <a:tailEnd/>
+              </a14:hiddenLine>
+            </a:ext>
+          </a:extLst>
+        </p:spPr>
         <p:txBody>
-          <a:bodyPr/>
+          <a:bodyPr wrap="square">
+            <a:spAutoFit/>
+          </a:bodyPr>
+          <a:lstStyle>
+            <a:lvl1pPr>
+              <a:defRPr sz="2300">
+                <a:solidFill>
+                  <a:schemeClr val="tx1"/>
+                </a:solidFill>
+                <a:latin typeface="Arial" panose="020B0604020202020204" pitchFamily="34" charset="0"/>
+                <a:ea typeface="MS PGothic" panose="020B0600070205080204" pitchFamily="34" charset="-128"/>
+              </a:defRPr>
+            </a:lvl1pPr>
+            <a:lvl2pPr marL="742950" indent="-285750">
+              <a:defRPr sz="2300">
+                <a:solidFill>
+                  <a:schemeClr val="tx1"/>
+                </a:solidFill>
+                <a:latin typeface="Arial" panose="020B0604020202020204" pitchFamily="34" charset="0"/>
+                <a:ea typeface="MS PGothic" panose="020B0600070205080204" pitchFamily="34" charset="-128"/>
+              </a:defRPr>
+            </a:lvl2pPr>
+            <a:lvl3pPr marL="1143000" indent="-228600">
+              <a:defRPr sz="2300">
+                <a:solidFill>
+                  <a:schemeClr val="tx1"/>
+                </a:solidFill>
+                <a:latin typeface="Arial" panose="020B0604020202020204" pitchFamily="34" charset="0"/>
+                <a:ea typeface="MS PGothic" panose="020B0600070205080204" pitchFamily="34" charset="-128"/>
+              </a:defRPr>
+            </a:lvl3pPr>
+            <a:lvl4pPr marL="1600200" indent="-228600">
+              <a:defRPr sz="2300">
+                <a:solidFill>
+                  <a:schemeClr val="tx1"/>
+                </a:solidFill>
+                <a:latin typeface="Arial" panose="020B0604020202020204" pitchFamily="34" charset="0"/>
+                <a:ea typeface="MS PGothic" panose="020B0600070205080204" pitchFamily="34" charset="-128"/>
+              </a:defRPr>
+            </a:lvl4pPr>
+            <a:lvl5pPr marL="2057400" indent="-228600">
+              <a:defRPr sz="2300">
+                <a:solidFill>
+                  <a:schemeClr val="tx1"/>
+                </a:solidFill>
+                <a:latin typeface="Arial" panose="020B0604020202020204" pitchFamily="34" charset="0"/>
+                <a:ea typeface="MS PGothic" panose="020B0600070205080204" pitchFamily="34" charset="-128"/>
+              </a:defRPr>
+            </a:lvl5pPr>
+            <a:lvl6pPr marL="2514600" indent="-228600" eaLnBrk="0" fontAlgn="base" hangingPunct="0">
+              <a:spcBef>
+                <a:spcPct val="0"/>
+              </a:spcBef>
+              <a:spcAft>
+                <a:spcPct val="0"/>
+              </a:spcAft>
+              <a:defRPr sz="2300">
+                <a:solidFill>
+                  <a:schemeClr val="tx1"/>
+                </a:solidFill>
+                <a:latin typeface="Arial" panose="020B0604020202020204" pitchFamily="34" charset="0"/>
+                <a:ea typeface="MS PGothic" panose="020B0600070205080204" pitchFamily="34" charset="-128"/>
+              </a:defRPr>
+            </a:lvl6pPr>
+            <a:lvl7pPr marL="2971800" indent="-228600" eaLnBrk="0" fontAlgn="base" hangingPunct="0">
+              <a:spcBef>
+                <a:spcPct val="0"/>
+              </a:spcBef>
+              <a:spcAft>
+                <a:spcPct val="0"/>
+              </a:spcAft>
+              <a:defRPr sz="2300">
+                <a:solidFill>
+                  <a:schemeClr val="tx1"/>
+                </a:solidFill>
+                <a:latin typeface="Arial" panose="020B0604020202020204" pitchFamily="34" charset="0"/>
+                <a:ea typeface="MS PGothic" panose="020B0600070205080204" pitchFamily="34" charset="-128"/>
+              </a:defRPr>
+            </a:lvl7pPr>
+            <a:lvl8pPr marL="3429000" indent="-228600" eaLnBrk="0" fontAlgn="base" hangingPunct="0">
+              <a:spcBef>
+                <a:spcPct val="0"/>
+              </a:spcBef>
+              <a:spcAft>
+                <a:spcPct val="0"/>
+              </a:spcAft>
+              <a:defRPr sz="2300">
+                <a:solidFill>
+                  <a:schemeClr val="tx1"/>
+                </a:solidFill>
+                <a:latin typeface="Arial" panose="020B0604020202020204" pitchFamily="34" charset="0"/>
+                <a:ea typeface="MS PGothic" panose="020B0600070205080204" pitchFamily="34" charset="-128"/>
+              </a:defRPr>
+            </a:lvl8pPr>
+            <a:lvl9pPr marL="3886200" indent="-228600" eaLnBrk="0" fontAlgn="base" hangingPunct="0">
+              <a:spcBef>
+                <a:spcPct val="0"/>
+              </a:spcBef>
+              <a:spcAft>
+                <a:spcPct val="0"/>
+              </a:spcAft>
+              <a:defRPr sz="2300">
+                <a:solidFill>
+                  <a:schemeClr val="tx1"/>
+                </a:solidFill>
+                <a:latin typeface="Arial" panose="020B0604020202020204" pitchFamily="34" charset="0"/>
+                <a:ea typeface="MS PGothic" panose="020B0600070205080204" pitchFamily="34" charset="-128"/>
+              </a:defRPr>
+            </a:lvl9pPr>
+          </a:lstStyle>
+          <a:p>
+            <a:pPr eaLnBrk="1" hangingPunct="1">
+              <a:spcBef>
+                <a:spcPct val="50000"/>
+              </a:spcBef>
+            </a:pPr>
+            <a:r>
+              <a:rPr lang="en-GB" altLang="en-US" sz="917" b="1" dirty="0">
+                <a:solidFill>
+                  <a:schemeClr val="bg1"/>
+                </a:solidFill>
+                <a:cs typeface="Arial" panose="020B0604020202020204" pitchFamily="34" charset="0"/>
+              </a:rPr>
+              <a:t>Our </a:t>
+            </a:r>
+            <a:r>
+              <a:rPr lang="en-GB" altLang="en-US" sz="917" b="1" dirty="0" err="1">
+                <a:solidFill>
+                  <a:schemeClr val="bg1"/>
+                </a:solidFill>
+                <a:cs typeface="Arial" panose="020B0604020202020204" pitchFamily="34" charset="0"/>
+              </a:rPr>
+              <a:t>Dedication.Your</a:t>
+            </a:r>
+            <a:r>
+              <a:rPr lang="en-GB" altLang="en-US" sz="917" b="1" dirty="0">
+                <a:solidFill>
+                  <a:schemeClr val="bg1"/>
+                </a:solidFill>
+                <a:cs typeface="Arial" panose="020B0604020202020204" pitchFamily="34" charset="0"/>
+              </a:rPr>
+              <a:t> Journey.</a:t>
+            </a:r>
+          </a:p>
+        </p:txBody>
+      </p:sp>
+      <p:sp>
+        <p:nvSpPr>
+          <p:cNvPr id="3077" name="Rectangle 5">
+            <a:extLst>
+              <a:ext uri="{FF2B5EF4-FFF2-40B4-BE49-F238E27FC236}">
+                <a16:creationId xmlns:a16="http://schemas.microsoft.com/office/drawing/2014/main" id="{26AEE3C8-48C0-8A89-CFA4-F16B1AB2A7E6}"/>
+              </a:ext>
+            </a:extLst>
+          </p:cNvPr>
+          <p:cNvSpPr>
+            <a:spLocks noChangeArrowheads="1"/>
+          </p:cNvSpPr>
+          <p:nvPr/>
+        </p:nvSpPr>
+        <p:spPr bwMode="auto">
+          <a:xfrm>
+            <a:off x="7031380" y="6591993"/>
+            <a:ext cx="2031925" cy="233462"/>
+          </a:xfrm>
+          <a:prstGeom prst="rect">
+            <a:avLst/>
+          </a:prstGeom>
+          <a:noFill/>
+          <a:ln>
+            <a:noFill/>
+          </a:ln>
+          <a:extLst>
+            <a:ext uri="{909E8E84-426E-40DD-AFC4-6F175D3DCCD1}">
+              <a14:hiddenFill xmlns:a14="http://schemas.microsoft.com/office/drawing/2010/main">
+                <a:solidFill>
+                  <a:srgbClr val="FFFFFF"/>
+                </a:solidFill>
+              </a14:hiddenFill>
+            </a:ext>
+            <a:ext uri="{91240B29-F687-4F45-9708-019B960494DF}">
+              <a14:hiddenLine xmlns:a14="http://schemas.microsoft.com/office/drawing/2010/main" w="9525">
+                <a:solidFill>
+                  <a:srgbClr val="000000"/>
+                </a:solidFill>
+                <a:miter lim="800000"/>
+                <a:headEnd/>
+                <a:tailEnd/>
+              </a14:hiddenLine>
+            </a:ext>
+          </a:extLst>
+        </p:spPr>
+        <p:txBody>
+          <a:bodyPr wrap="square">
+            <a:spAutoFit/>
+          </a:bodyPr>
+          <a:lstStyle>
+            <a:lvl1pPr>
+              <a:defRPr sz="2300">
+                <a:solidFill>
+                  <a:schemeClr val="tx1"/>
+                </a:solidFill>
+                <a:latin typeface="Arial" panose="020B0604020202020204" pitchFamily="34" charset="0"/>
+                <a:ea typeface="MS PGothic" panose="020B0600070205080204" pitchFamily="34" charset="-128"/>
+              </a:defRPr>
+            </a:lvl1pPr>
+            <a:lvl2pPr marL="742950" indent="-285750">
+              <a:defRPr sz="2300">
+                <a:solidFill>
+                  <a:schemeClr val="tx1"/>
+                </a:solidFill>
+                <a:latin typeface="Arial" panose="020B0604020202020204" pitchFamily="34" charset="0"/>
+                <a:ea typeface="MS PGothic" panose="020B0600070205080204" pitchFamily="34" charset="-128"/>
+              </a:defRPr>
+            </a:lvl2pPr>
+            <a:lvl3pPr marL="1143000" indent="-228600">
+              <a:defRPr sz="2300">
+                <a:solidFill>
+                  <a:schemeClr val="tx1"/>
+                </a:solidFill>
+                <a:latin typeface="Arial" panose="020B0604020202020204" pitchFamily="34" charset="0"/>
+                <a:ea typeface="MS PGothic" panose="020B0600070205080204" pitchFamily="34" charset="-128"/>
+              </a:defRPr>
+            </a:lvl3pPr>
+            <a:lvl4pPr marL="1600200" indent="-228600">
+              <a:defRPr sz="2300">
+                <a:solidFill>
+                  <a:schemeClr val="tx1"/>
+                </a:solidFill>
+                <a:latin typeface="Arial" panose="020B0604020202020204" pitchFamily="34" charset="0"/>
+                <a:ea typeface="MS PGothic" panose="020B0600070205080204" pitchFamily="34" charset="-128"/>
+              </a:defRPr>
+            </a:lvl4pPr>
+            <a:lvl5pPr marL="2057400" indent="-228600">
+              <a:defRPr sz="2300">
+                <a:solidFill>
+                  <a:schemeClr val="tx1"/>
+                </a:solidFill>
+                <a:latin typeface="Arial" panose="020B0604020202020204" pitchFamily="34" charset="0"/>
+                <a:ea typeface="MS PGothic" panose="020B0600070205080204" pitchFamily="34" charset="-128"/>
+              </a:defRPr>
+            </a:lvl5pPr>
+            <a:lvl6pPr marL="2514600" indent="-228600" eaLnBrk="0" fontAlgn="base" hangingPunct="0">
+              <a:spcBef>
+                <a:spcPct val="0"/>
+              </a:spcBef>
+              <a:spcAft>
+                <a:spcPct val="0"/>
+              </a:spcAft>
+              <a:defRPr sz="2300">
+                <a:solidFill>
+                  <a:schemeClr val="tx1"/>
+                </a:solidFill>
+                <a:latin typeface="Arial" panose="020B0604020202020204" pitchFamily="34" charset="0"/>
+                <a:ea typeface="MS PGothic" panose="020B0600070205080204" pitchFamily="34" charset="-128"/>
+              </a:defRPr>
+            </a:lvl6pPr>
+            <a:lvl7pPr marL="2971800" indent="-228600" eaLnBrk="0" fontAlgn="base" hangingPunct="0">
+              <a:spcBef>
+                <a:spcPct val="0"/>
+              </a:spcBef>
+              <a:spcAft>
+                <a:spcPct val="0"/>
+              </a:spcAft>
+              <a:defRPr sz="2300">
+                <a:solidFill>
+                  <a:schemeClr val="tx1"/>
+                </a:solidFill>
+                <a:latin typeface="Arial" panose="020B0604020202020204" pitchFamily="34" charset="0"/>
+                <a:ea typeface="MS PGothic" panose="020B0600070205080204" pitchFamily="34" charset="-128"/>
+              </a:defRPr>
+            </a:lvl7pPr>
+            <a:lvl8pPr marL="3429000" indent="-228600" eaLnBrk="0" fontAlgn="base" hangingPunct="0">
+              <a:spcBef>
+                <a:spcPct val="0"/>
+              </a:spcBef>
+              <a:spcAft>
+                <a:spcPct val="0"/>
+              </a:spcAft>
+              <a:defRPr sz="2300">
+                <a:solidFill>
+                  <a:schemeClr val="tx1"/>
+                </a:solidFill>
+                <a:latin typeface="Arial" panose="020B0604020202020204" pitchFamily="34" charset="0"/>
+                <a:ea typeface="MS PGothic" panose="020B0600070205080204" pitchFamily="34" charset="-128"/>
+              </a:defRPr>
+            </a:lvl8pPr>
+            <a:lvl9pPr marL="3886200" indent="-228600" eaLnBrk="0" fontAlgn="base" hangingPunct="0">
+              <a:spcBef>
+                <a:spcPct val="0"/>
+              </a:spcBef>
+              <a:spcAft>
+                <a:spcPct val="0"/>
+              </a:spcAft>
+              <a:defRPr sz="2300">
+                <a:solidFill>
+                  <a:schemeClr val="tx1"/>
+                </a:solidFill>
+                <a:latin typeface="Arial" panose="020B0604020202020204" pitchFamily="34" charset="0"/>
+                <a:ea typeface="MS PGothic" panose="020B0600070205080204" pitchFamily="34" charset="-128"/>
+              </a:defRPr>
+            </a:lvl9pPr>
+          </a:lstStyle>
+          <a:p>
+            <a:pPr algn="r" eaLnBrk="1" hangingPunct="1">
+              <a:spcBef>
+                <a:spcPct val="50000"/>
+              </a:spcBef>
+            </a:pPr>
+            <a:r>
+              <a:rPr lang="en-GB" altLang="en-US" sz="917" b="1" dirty="0">
+                <a:solidFill>
+                  <a:schemeClr val="bg1"/>
+                </a:solidFill>
+                <a:cs typeface="Arial" panose="020B0604020202020204" pitchFamily="34" charset="0"/>
+              </a:rPr>
+              <a:t>www.cct.ie</a:t>
+            </a:r>
+          </a:p>
+        </p:txBody>
+      </p:sp>
+      <p:grpSp>
+        <p:nvGrpSpPr>
+          <p:cNvPr id="3078" name="Group 26">
+            <a:extLst>
+              <a:ext uri="{FF2B5EF4-FFF2-40B4-BE49-F238E27FC236}">
+                <a16:creationId xmlns:a16="http://schemas.microsoft.com/office/drawing/2014/main" id="{54EB672D-AD3F-097E-A31D-402013E9F59D}"/>
+              </a:ext>
+            </a:extLst>
+          </p:cNvPr>
+          <p:cNvGrpSpPr>
+            <a:grpSpLocks/>
+          </p:cNvGrpSpPr>
+          <p:nvPr/>
+        </p:nvGrpSpPr>
+        <p:grpSpPr bwMode="auto">
+          <a:xfrm>
+            <a:off x="208052" y="3615977"/>
+            <a:ext cx="2189102" cy="258854"/>
+            <a:chOff x="943194" y="16379716"/>
+            <a:chExt cx="12887106" cy="1523769"/>
+          </a:xfrm>
+        </p:grpSpPr>
+        <p:sp>
+          <p:nvSpPr>
+            <p:cNvPr id="3103" name="Rectangle 249">
+              <a:extLst>
+                <a:ext uri="{FF2B5EF4-FFF2-40B4-BE49-F238E27FC236}">
+                  <a16:creationId xmlns:a16="http://schemas.microsoft.com/office/drawing/2014/main" id="{98A5429B-99DC-95F6-19AE-2BCA8C8087A7}"/>
+                </a:ext>
+              </a:extLst>
+            </p:cNvPr>
+            <p:cNvSpPr>
+              <a:spLocks noChangeArrowheads="1"/>
+            </p:cNvSpPr>
+            <p:nvPr/>
+          </p:nvSpPr>
+          <p:spPr bwMode="auto">
+            <a:xfrm>
+              <a:off x="943194" y="16657905"/>
+              <a:ext cx="12887106" cy="1245580"/>
+            </a:xfrm>
+            <a:prstGeom prst="rect">
+              <a:avLst/>
+            </a:prstGeom>
+            <a:noFill/>
+            <a:ln>
+              <a:noFill/>
+            </a:ln>
+            <a:extLst>
+              <a:ext uri="{909E8E84-426E-40DD-AFC4-6F175D3DCCD1}">
+                <a14:hiddenFill xmlns:a14="http://schemas.microsoft.com/office/drawing/2010/main">
+                  <a:solidFill>
+                    <a:srgbClr val="FFFFFF"/>
+                  </a:solidFill>
+                </a14:hiddenFill>
+              </a:ext>
+              <a:ext uri="{91240B29-F687-4F45-9708-019B960494DF}">
+                <a14:hiddenLine xmlns:a14="http://schemas.microsoft.com/office/drawing/2010/main" w="9525">
+                  <a:solidFill>
+                    <a:srgbClr val="000000"/>
+                  </a:solidFill>
+                  <a:miter lim="800000"/>
+                  <a:headEnd/>
+                  <a:tailEnd/>
+                </a14:hiddenLine>
+              </a:ext>
+            </a:extLst>
+          </p:spPr>
+          <p:txBody>
+            <a:bodyPr>
+              <a:spAutoFit/>
+            </a:bodyPr>
+            <a:lstStyle>
+              <a:lvl1pPr>
+                <a:defRPr sz="2300">
+                  <a:solidFill>
+                    <a:schemeClr val="tx1"/>
+                  </a:solidFill>
+                  <a:latin typeface="Arial" panose="020B0604020202020204" pitchFamily="34" charset="0"/>
+                  <a:ea typeface="MS PGothic" panose="020B0600070205080204" pitchFamily="34" charset="-128"/>
+                </a:defRPr>
+              </a:lvl1pPr>
+              <a:lvl2pPr marL="742950" indent="-285750">
+                <a:defRPr sz="2300">
+                  <a:solidFill>
+                    <a:schemeClr val="tx1"/>
+                  </a:solidFill>
+                  <a:latin typeface="Arial" panose="020B0604020202020204" pitchFamily="34" charset="0"/>
+                  <a:ea typeface="MS PGothic" panose="020B0600070205080204" pitchFamily="34" charset="-128"/>
+                </a:defRPr>
+              </a:lvl2pPr>
+              <a:lvl3pPr marL="1143000" indent="-228600">
+                <a:defRPr sz="2300">
+                  <a:solidFill>
+                    <a:schemeClr val="tx1"/>
+                  </a:solidFill>
+                  <a:latin typeface="Arial" panose="020B0604020202020204" pitchFamily="34" charset="0"/>
+                  <a:ea typeface="MS PGothic" panose="020B0600070205080204" pitchFamily="34" charset="-128"/>
+                </a:defRPr>
+              </a:lvl3pPr>
+              <a:lvl4pPr marL="1600200" indent="-228600">
+                <a:defRPr sz="2300">
+                  <a:solidFill>
+                    <a:schemeClr val="tx1"/>
+                  </a:solidFill>
+                  <a:latin typeface="Arial" panose="020B0604020202020204" pitchFamily="34" charset="0"/>
+                  <a:ea typeface="MS PGothic" panose="020B0600070205080204" pitchFamily="34" charset="-128"/>
+                </a:defRPr>
+              </a:lvl4pPr>
+              <a:lvl5pPr marL="2057400" indent="-228600">
+                <a:defRPr sz="2300">
+                  <a:solidFill>
+                    <a:schemeClr val="tx1"/>
+                  </a:solidFill>
+                  <a:latin typeface="Arial" panose="020B0604020202020204" pitchFamily="34" charset="0"/>
+                  <a:ea typeface="MS PGothic" panose="020B0600070205080204" pitchFamily="34" charset="-128"/>
+                </a:defRPr>
+              </a:lvl5pPr>
+              <a:lvl6pPr marL="2514600" indent="-228600" eaLnBrk="0" fontAlgn="base" hangingPunct="0">
+                <a:spcBef>
+                  <a:spcPct val="0"/>
+                </a:spcBef>
+                <a:spcAft>
+                  <a:spcPct val="0"/>
+                </a:spcAft>
+                <a:defRPr sz="2300">
+                  <a:solidFill>
+                    <a:schemeClr val="tx1"/>
+                  </a:solidFill>
+                  <a:latin typeface="Arial" panose="020B0604020202020204" pitchFamily="34" charset="0"/>
+                  <a:ea typeface="MS PGothic" panose="020B0600070205080204" pitchFamily="34" charset="-128"/>
+                </a:defRPr>
+              </a:lvl6pPr>
+              <a:lvl7pPr marL="2971800" indent="-228600" eaLnBrk="0" fontAlgn="base" hangingPunct="0">
+                <a:spcBef>
+                  <a:spcPct val="0"/>
+                </a:spcBef>
+                <a:spcAft>
+                  <a:spcPct val="0"/>
+                </a:spcAft>
+                <a:defRPr sz="2300">
+                  <a:solidFill>
+                    <a:schemeClr val="tx1"/>
+                  </a:solidFill>
+                  <a:latin typeface="Arial" panose="020B0604020202020204" pitchFamily="34" charset="0"/>
+                  <a:ea typeface="MS PGothic" panose="020B0600070205080204" pitchFamily="34" charset="-128"/>
+                </a:defRPr>
+              </a:lvl7pPr>
+              <a:lvl8pPr marL="3429000" indent="-228600" eaLnBrk="0" fontAlgn="base" hangingPunct="0">
+                <a:spcBef>
+                  <a:spcPct val="0"/>
+                </a:spcBef>
+                <a:spcAft>
+                  <a:spcPct val="0"/>
+                </a:spcAft>
+                <a:defRPr sz="2300">
+                  <a:solidFill>
+                    <a:schemeClr val="tx1"/>
+                  </a:solidFill>
+                  <a:latin typeface="Arial" panose="020B0604020202020204" pitchFamily="34" charset="0"/>
+                  <a:ea typeface="MS PGothic" panose="020B0600070205080204" pitchFamily="34" charset="-128"/>
+                </a:defRPr>
+              </a:lvl8pPr>
+              <a:lvl9pPr marL="3886200" indent="-228600" eaLnBrk="0" fontAlgn="base" hangingPunct="0">
+                <a:spcBef>
+                  <a:spcPct val="0"/>
+                </a:spcBef>
+                <a:spcAft>
+                  <a:spcPct val="0"/>
+                </a:spcAft>
+                <a:defRPr sz="2300">
+                  <a:solidFill>
+                    <a:schemeClr val="tx1"/>
+                  </a:solidFill>
+                  <a:latin typeface="Arial" panose="020B0604020202020204" pitchFamily="34" charset="0"/>
+                  <a:ea typeface="MS PGothic" panose="020B0600070205080204" pitchFamily="34" charset="-128"/>
+                </a:defRPr>
+              </a:lvl9pPr>
+            </a:lstStyle>
+            <a:p>
+              <a:pPr algn="just">
+                <a:lnSpc>
+                  <a:spcPts val="850"/>
+                </a:lnSpc>
+                <a:spcBef>
+                  <a:spcPts val="306"/>
+                </a:spcBef>
+                <a:defRPr/>
+              </a:pPr>
+              <a:r>
+                <a:rPr lang="en-GB" altLang="en-US" sz="1121" b="1" dirty="0">
+                  <a:solidFill>
+                    <a:srgbClr val="006684"/>
+                  </a:solidFill>
+                  <a:latin typeface="Helvetica" panose="020B0604020202020204" pitchFamily="34" charset="0"/>
+                </a:rPr>
+                <a:t>Data Understanding</a:t>
+              </a:r>
+            </a:p>
+          </p:txBody>
+        </p:sp>
+        <p:cxnSp>
+          <p:nvCxnSpPr>
+            <p:cNvPr id="3104" name="Straight Connector 6">
+              <a:extLst>
+                <a:ext uri="{FF2B5EF4-FFF2-40B4-BE49-F238E27FC236}">
+                  <a16:creationId xmlns:a16="http://schemas.microsoft.com/office/drawing/2014/main" id="{8F507EAC-703C-07C4-2232-006A99F09FF6}"/>
+                </a:ext>
+              </a:extLst>
+            </p:cNvPr>
+            <p:cNvCxnSpPr>
+              <a:cxnSpLocks noChangeShapeType="1"/>
+            </p:cNvCxnSpPr>
+            <p:nvPr/>
+          </p:nvCxnSpPr>
+          <p:spPr bwMode="auto">
+            <a:xfrm flipV="1">
+              <a:off x="1084786" y="16379716"/>
+              <a:ext cx="12745514" cy="1"/>
+            </a:xfrm>
+            <a:prstGeom prst="line">
+              <a:avLst/>
+            </a:prstGeom>
+            <a:noFill/>
+            <a:ln w="12700">
+              <a:solidFill>
+                <a:srgbClr val="006684"/>
+              </a:solidFill>
+              <a:round/>
+              <a:headEnd/>
+              <a:tailEnd/>
+            </a:ln>
+            <a:extLst>
+              <a:ext uri="{909E8E84-426E-40DD-AFC4-6F175D3DCCD1}">
+                <a14:hiddenFill xmlns:a14="http://schemas.microsoft.com/office/drawing/2010/main">
+                  <a:noFill/>
+                </a14:hiddenFill>
+              </a:ext>
+            </a:extLst>
+          </p:spPr>
+        </p:cxnSp>
+      </p:grpSp>
+      <p:sp>
+        <p:nvSpPr>
+          <p:cNvPr id="2" name="Rectangle 24">
+            <a:extLst>
+              <a:ext uri="{FF2B5EF4-FFF2-40B4-BE49-F238E27FC236}">
+                <a16:creationId xmlns:a16="http://schemas.microsoft.com/office/drawing/2014/main" id="{982AA2F2-7F8C-8CFA-A3FF-D2B563CF8BA2}"/>
+              </a:ext>
+            </a:extLst>
+          </p:cNvPr>
+          <p:cNvSpPr>
+            <a:spLocks noChangeArrowheads="1"/>
+          </p:cNvSpPr>
+          <p:nvPr/>
+        </p:nvSpPr>
+        <p:spPr bwMode="auto">
+          <a:xfrm>
+            <a:off x="218798" y="1057570"/>
+            <a:ext cx="2197462" cy="2054409"/>
+          </a:xfrm>
+          <a:prstGeom prst="rect">
+            <a:avLst/>
+          </a:prstGeom>
+          <a:noFill/>
+          <a:ln>
+            <a:noFill/>
+          </a:ln>
+        </p:spPr>
+        <p:txBody>
+          <a:bodyPr>
+            <a:spAutoFit/>
+          </a:bodyPr>
+          <a:lstStyle>
+            <a:lvl1pPr defTabSz="915988">
+              <a:defRPr sz="2300">
+                <a:solidFill>
+                  <a:schemeClr val="tx1"/>
+                </a:solidFill>
+                <a:latin typeface="Arial" panose="020B0604020202020204" pitchFamily="34" charset="0"/>
+                <a:ea typeface="MS PGothic" panose="020B0600070205080204" pitchFamily="34" charset="-128"/>
+              </a:defRPr>
+            </a:lvl1pPr>
+            <a:lvl2pPr marL="742950" indent="-285750" defTabSz="915988">
+              <a:defRPr sz="2300">
+                <a:solidFill>
+                  <a:schemeClr val="tx1"/>
+                </a:solidFill>
+                <a:latin typeface="Arial" panose="020B0604020202020204" pitchFamily="34" charset="0"/>
+                <a:ea typeface="MS PGothic" panose="020B0600070205080204" pitchFamily="34" charset="-128"/>
+              </a:defRPr>
+            </a:lvl2pPr>
+            <a:lvl3pPr marL="1143000" indent="-228600" defTabSz="915988">
+              <a:defRPr sz="2300">
+                <a:solidFill>
+                  <a:schemeClr val="tx1"/>
+                </a:solidFill>
+                <a:latin typeface="Arial" panose="020B0604020202020204" pitchFamily="34" charset="0"/>
+                <a:ea typeface="MS PGothic" panose="020B0600070205080204" pitchFamily="34" charset="-128"/>
+              </a:defRPr>
+            </a:lvl3pPr>
+            <a:lvl4pPr marL="1600200" indent="-228600" defTabSz="915988">
+              <a:defRPr sz="2300">
+                <a:solidFill>
+                  <a:schemeClr val="tx1"/>
+                </a:solidFill>
+                <a:latin typeface="Arial" panose="020B0604020202020204" pitchFamily="34" charset="0"/>
+                <a:ea typeface="MS PGothic" panose="020B0600070205080204" pitchFamily="34" charset="-128"/>
+              </a:defRPr>
+            </a:lvl4pPr>
+            <a:lvl5pPr marL="2057400" indent="-228600" defTabSz="915988">
+              <a:defRPr sz="2300">
+                <a:solidFill>
+                  <a:schemeClr val="tx1"/>
+                </a:solidFill>
+                <a:latin typeface="Arial" panose="020B0604020202020204" pitchFamily="34" charset="0"/>
+                <a:ea typeface="MS PGothic" panose="020B0600070205080204" pitchFamily="34" charset="-128"/>
+              </a:defRPr>
+            </a:lvl5pPr>
+            <a:lvl6pPr marL="2514600" indent="-228600" defTabSz="915988" eaLnBrk="0" fontAlgn="base" hangingPunct="0">
+              <a:spcBef>
+                <a:spcPct val="0"/>
+              </a:spcBef>
+              <a:spcAft>
+                <a:spcPct val="0"/>
+              </a:spcAft>
+              <a:defRPr sz="2300">
+                <a:solidFill>
+                  <a:schemeClr val="tx1"/>
+                </a:solidFill>
+                <a:latin typeface="Arial" panose="020B0604020202020204" pitchFamily="34" charset="0"/>
+                <a:ea typeface="MS PGothic" panose="020B0600070205080204" pitchFamily="34" charset="-128"/>
+              </a:defRPr>
+            </a:lvl6pPr>
+            <a:lvl7pPr marL="2971800" indent="-228600" defTabSz="915988" eaLnBrk="0" fontAlgn="base" hangingPunct="0">
+              <a:spcBef>
+                <a:spcPct val="0"/>
+              </a:spcBef>
+              <a:spcAft>
+                <a:spcPct val="0"/>
+              </a:spcAft>
+              <a:defRPr sz="2300">
+                <a:solidFill>
+                  <a:schemeClr val="tx1"/>
+                </a:solidFill>
+                <a:latin typeface="Arial" panose="020B0604020202020204" pitchFamily="34" charset="0"/>
+                <a:ea typeface="MS PGothic" panose="020B0600070205080204" pitchFamily="34" charset="-128"/>
+              </a:defRPr>
+            </a:lvl7pPr>
+            <a:lvl8pPr marL="3429000" indent="-228600" defTabSz="915988" eaLnBrk="0" fontAlgn="base" hangingPunct="0">
+              <a:spcBef>
+                <a:spcPct val="0"/>
+              </a:spcBef>
+              <a:spcAft>
+                <a:spcPct val="0"/>
+              </a:spcAft>
+              <a:defRPr sz="2300">
+                <a:solidFill>
+                  <a:schemeClr val="tx1"/>
+                </a:solidFill>
+                <a:latin typeface="Arial" panose="020B0604020202020204" pitchFamily="34" charset="0"/>
+                <a:ea typeface="MS PGothic" panose="020B0600070205080204" pitchFamily="34" charset="-128"/>
+              </a:defRPr>
+            </a:lvl8pPr>
+            <a:lvl9pPr marL="3886200" indent="-228600" defTabSz="915988" eaLnBrk="0" fontAlgn="base" hangingPunct="0">
+              <a:spcBef>
+                <a:spcPct val="0"/>
+              </a:spcBef>
+              <a:spcAft>
+                <a:spcPct val="0"/>
+              </a:spcAft>
+              <a:defRPr sz="2300">
+                <a:solidFill>
+                  <a:schemeClr val="tx1"/>
+                </a:solidFill>
+                <a:latin typeface="Arial" panose="020B0604020202020204" pitchFamily="34" charset="0"/>
+                <a:ea typeface="MS PGothic" panose="020B0600070205080204" pitchFamily="34" charset="-128"/>
+              </a:defRPr>
+            </a:lvl9pPr>
+          </a:lstStyle>
+          <a:p>
+            <a:pPr algn="just">
+              <a:lnSpc>
+                <a:spcPts val="850"/>
+              </a:lnSpc>
+              <a:spcBef>
+                <a:spcPts val="306"/>
+              </a:spcBef>
+              <a:defRPr/>
+            </a:pPr>
+            <a:r>
+              <a:rPr lang="en-GB" altLang="en-US" sz="900" dirty="0">
+                <a:latin typeface="Helvetica" panose="020B0604020202020204" pitchFamily="34" charset="0"/>
+              </a:rPr>
+              <a:t>Can fuel prices, government grants, and time predict EV adoption in Ireland?</a:t>
+            </a:r>
+          </a:p>
+          <a:p>
+            <a:pPr algn="just">
+              <a:lnSpc>
+                <a:spcPts val="850"/>
+              </a:lnSpc>
+              <a:spcBef>
+                <a:spcPts val="306"/>
+              </a:spcBef>
+              <a:defRPr/>
+            </a:pPr>
+            <a:r>
+              <a:rPr lang="en-GB" altLang="en-US" sz="900" dirty="0">
+                <a:latin typeface="Helvetica" panose="020B0604020202020204" pitchFamily="34" charset="0"/>
+              </a:rPr>
+              <a:t>- Ireland targets significant EV growth by 2030</a:t>
+            </a:r>
+          </a:p>
+          <a:p>
+            <a:pPr algn="just">
+              <a:lnSpc>
+                <a:spcPts val="850"/>
+              </a:lnSpc>
+              <a:spcBef>
+                <a:spcPts val="306"/>
+              </a:spcBef>
+              <a:defRPr/>
+            </a:pPr>
+            <a:r>
+              <a:rPr lang="en-GB" altLang="en-US" sz="900" dirty="0">
+                <a:latin typeface="Helvetica" panose="020B0604020202020204" pitchFamily="34" charset="0"/>
+              </a:rPr>
+              <a:t>-Transport sector heavily dependent on petrol and diesel</a:t>
+            </a:r>
+          </a:p>
+          <a:p>
+            <a:pPr algn="just">
+              <a:lnSpc>
+                <a:spcPts val="850"/>
+              </a:lnSpc>
+              <a:spcBef>
+                <a:spcPts val="306"/>
+              </a:spcBef>
+              <a:defRPr/>
+            </a:pPr>
+            <a:r>
+              <a:rPr lang="en-GB" altLang="en-US" sz="900" dirty="0">
+                <a:latin typeface="Helvetica" panose="020B0604020202020204" pitchFamily="34" charset="0"/>
+              </a:rPr>
+              <a:t>- EV adoption influenced by fuel costs, grants, and market trends</a:t>
+            </a:r>
+          </a:p>
+          <a:p>
+            <a:pPr algn="just">
+              <a:lnSpc>
+                <a:spcPts val="850"/>
+              </a:lnSpc>
+              <a:spcBef>
+                <a:spcPts val="306"/>
+              </a:spcBef>
+              <a:defRPr/>
+            </a:pPr>
+            <a:r>
+              <a:rPr lang="en-GB" altLang="en-US" sz="900" dirty="0">
+                <a:latin typeface="Helvetica" panose="020B0604020202020204" pitchFamily="34" charset="0"/>
+              </a:rPr>
+              <a:t>- Project uses CRISP-DM framework and machine learning</a:t>
+            </a:r>
+          </a:p>
+          <a:p>
+            <a:pPr algn="just">
+              <a:lnSpc>
+                <a:spcPts val="850"/>
+              </a:lnSpc>
+              <a:spcBef>
+                <a:spcPts val="306"/>
+              </a:spcBef>
+              <a:defRPr/>
+            </a:pPr>
+            <a:r>
+              <a:rPr lang="en-GB" altLang="en-US" sz="900" dirty="0">
+                <a:latin typeface="Helvetica" panose="020B0604020202020204" pitchFamily="34" charset="0"/>
+              </a:rPr>
+              <a:t>- Dataset covers 2015–2024 annual observations</a:t>
+            </a:r>
+          </a:p>
+          <a:p>
+            <a:pPr algn="just">
+              <a:lnSpc>
+                <a:spcPts val="850"/>
+              </a:lnSpc>
+              <a:spcBef>
+                <a:spcPts val="306"/>
+              </a:spcBef>
+              <a:defRPr/>
+            </a:pPr>
+            <a:r>
+              <a:rPr lang="en-GB" altLang="en-US" sz="900" dirty="0">
+                <a:latin typeface="Helvetica" panose="020B0604020202020204" pitchFamily="34" charset="0"/>
+              </a:rPr>
+              <a:t>- Decision-support tool for policymakers and analysts</a:t>
+            </a:r>
+          </a:p>
+        </p:txBody>
+      </p:sp>
+      <p:sp>
+        <p:nvSpPr>
+          <p:cNvPr id="3080" name="Rectangle 86">
+            <a:extLst>
+              <a:ext uri="{FF2B5EF4-FFF2-40B4-BE49-F238E27FC236}">
+                <a16:creationId xmlns:a16="http://schemas.microsoft.com/office/drawing/2014/main" id="{2254BC73-1087-53E0-77CC-B80BF995C29C}"/>
+              </a:ext>
+            </a:extLst>
+          </p:cNvPr>
+          <p:cNvSpPr>
+            <a:spLocks noChangeArrowheads="1"/>
+          </p:cNvSpPr>
+          <p:nvPr/>
+        </p:nvSpPr>
+        <p:spPr bwMode="auto">
+          <a:xfrm>
+            <a:off x="244492" y="3819635"/>
+            <a:ext cx="2026192" cy="2516073"/>
+          </a:xfrm>
+          <a:prstGeom prst="rect">
+            <a:avLst/>
+          </a:prstGeom>
+          <a:noFill/>
+          <a:ln>
+            <a:noFill/>
+          </a:ln>
+          <a:extLst>
+            <a:ext uri="{909E8E84-426E-40DD-AFC4-6F175D3DCCD1}">
+              <a14:hiddenFill xmlns:a14="http://schemas.microsoft.com/office/drawing/2010/main">
+                <a:solidFill>
+                  <a:srgbClr val="FFFFFF"/>
+                </a:solidFill>
+              </a14:hiddenFill>
+            </a:ext>
+            <a:ext uri="{91240B29-F687-4F45-9708-019B960494DF}">
+              <a14:hiddenLine xmlns:a14="http://schemas.microsoft.com/office/drawing/2010/main" w="9525">
+                <a:solidFill>
+                  <a:srgbClr val="000000"/>
+                </a:solidFill>
+                <a:miter lim="800000"/>
+                <a:headEnd/>
+                <a:tailEnd/>
+              </a14:hiddenLine>
+            </a:ext>
+          </a:extLst>
+        </p:spPr>
+        <p:txBody>
+          <a:bodyPr wrap="square">
+            <a:spAutoFit/>
+          </a:bodyPr>
+          <a:lstStyle>
+            <a:lvl1pPr defTabSz="915988">
+              <a:defRPr sz="2300">
+                <a:solidFill>
+                  <a:schemeClr val="tx1"/>
+                </a:solidFill>
+                <a:latin typeface="Arial" panose="020B0604020202020204" pitchFamily="34" charset="0"/>
+                <a:ea typeface="MS PGothic" panose="020B0600070205080204" pitchFamily="34" charset="-128"/>
+              </a:defRPr>
+            </a:lvl1pPr>
+            <a:lvl2pPr marL="742950" indent="-285750" defTabSz="915988">
+              <a:defRPr sz="2300">
+                <a:solidFill>
+                  <a:schemeClr val="tx1"/>
+                </a:solidFill>
+                <a:latin typeface="Arial" panose="020B0604020202020204" pitchFamily="34" charset="0"/>
+                <a:ea typeface="MS PGothic" panose="020B0600070205080204" pitchFamily="34" charset="-128"/>
+              </a:defRPr>
+            </a:lvl2pPr>
+            <a:lvl3pPr marL="1143000" indent="-228600" defTabSz="915988">
+              <a:defRPr sz="2300">
+                <a:solidFill>
+                  <a:schemeClr val="tx1"/>
+                </a:solidFill>
+                <a:latin typeface="Arial" panose="020B0604020202020204" pitchFamily="34" charset="0"/>
+                <a:ea typeface="MS PGothic" panose="020B0600070205080204" pitchFamily="34" charset="-128"/>
+              </a:defRPr>
+            </a:lvl3pPr>
+            <a:lvl4pPr marL="1600200" indent="-228600" defTabSz="915988">
+              <a:defRPr sz="2300">
+                <a:solidFill>
+                  <a:schemeClr val="tx1"/>
+                </a:solidFill>
+                <a:latin typeface="Arial" panose="020B0604020202020204" pitchFamily="34" charset="0"/>
+                <a:ea typeface="MS PGothic" panose="020B0600070205080204" pitchFamily="34" charset="-128"/>
+              </a:defRPr>
+            </a:lvl4pPr>
+            <a:lvl5pPr marL="2057400" indent="-228600" defTabSz="915988">
+              <a:defRPr sz="2300">
+                <a:solidFill>
+                  <a:schemeClr val="tx1"/>
+                </a:solidFill>
+                <a:latin typeface="Arial" panose="020B0604020202020204" pitchFamily="34" charset="0"/>
+                <a:ea typeface="MS PGothic" panose="020B0600070205080204" pitchFamily="34" charset="-128"/>
+              </a:defRPr>
+            </a:lvl5pPr>
+            <a:lvl6pPr marL="2514600" indent="-228600" defTabSz="915988" eaLnBrk="0" fontAlgn="base" hangingPunct="0">
+              <a:spcBef>
+                <a:spcPct val="0"/>
+              </a:spcBef>
+              <a:spcAft>
+                <a:spcPct val="0"/>
+              </a:spcAft>
+              <a:defRPr sz="2300">
+                <a:solidFill>
+                  <a:schemeClr val="tx1"/>
+                </a:solidFill>
+                <a:latin typeface="Arial" panose="020B0604020202020204" pitchFamily="34" charset="0"/>
+                <a:ea typeface="MS PGothic" panose="020B0600070205080204" pitchFamily="34" charset="-128"/>
+              </a:defRPr>
+            </a:lvl6pPr>
+            <a:lvl7pPr marL="2971800" indent="-228600" defTabSz="915988" eaLnBrk="0" fontAlgn="base" hangingPunct="0">
+              <a:spcBef>
+                <a:spcPct val="0"/>
+              </a:spcBef>
+              <a:spcAft>
+                <a:spcPct val="0"/>
+              </a:spcAft>
+              <a:defRPr sz="2300">
+                <a:solidFill>
+                  <a:schemeClr val="tx1"/>
+                </a:solidFill>
+                <a:latin typeface="Arial" panose="020B0604020202020204" pitchFamily="34" charset="0"/>
+                <a:ea typeface="MS PGothic" panose="020B0600070205080204" pitchFamily="34" charset="-128"/>
+              </a:defRPr>
+            </a:lvl7pPr>
+            <a:lvl8pPr marL="3429000" indent="-228600" defTabSz="915988" eaLnBrk="0" fontAlgn="base" hangingPunct="0">
+              <a:spcBef>
+                <a:spcPct val="0"/>
+              </a:spcBef>
+              <a:spcAft>
+                <a:spcPct val="0"/>
+              </a:spcAft>
+              <a:defRPr sz="2300">
+                <a:solidFill>
+                  <a:schemeClr val="tx1"/>
+                </a:solidFill>
+                <a:latin typeface="Arial" panose="020B0604020202020204" pitchFamily="34" charset="0"/>
+                <a:ea typeface="MS PGothic" panose="020B0600070205080204" pitchFamily="34" charset="-128"/>
+              </a:defRPr>
+            </a:lvl8pPr>
+            <a:lvl9pPr marL="3886200" indent="-228600" defTabSz="915988" eaLnBrk="0" fontAlgn="base" hangingPunct="0">
+              <a:spcBef>
+                <a:spcPct val="0"/>
+              </a:spcBef>
+              <a:spcAft>
+                <a:spcPct val="0"/>
+              </a:spcAft>
+              <a:defRPr sz="2300">
+                <a:solidFill>
+                  <a:schemeClr val="tx1"/>
+                </a:solidFill>
+                <a:latin typeface="Arial" panose="020B0604020202020204" pitchFamily="34" charset="0"/>
+                <a:ea typeface="MS PGothic" panose="020B0600070205080204" pitchFamily="34" charset="-128"/>
+              </a:defRPr>
+            </a:lvl9pPr>
+          </a:lstStyle>
+          <a:p>
+            <a:pPr algn="just">
+              <a:lnSpc>
+                <a:spcPts val="850"/>
+              </a:lnSpc>
+              <a:spcBef>
+                <a:spcPts val="306"/>
+              </a:spcBef>
+              <a:defRPr/>
+            </a:pPr>
+            <a:r>
+              <a:rPr lang="en-GB" altLang="en-US" sz="900" dirty="0">
+                <a:latin typeface="Helvetica" panose="020B0604020202020204" pitchFamily="34" charset="0"/>
+              </a:rPr>
+              <a:t>Four datasets combined into one modelling dataset:</a:t>
+            </a:r>
+          </a:p>
+          <a:p>
+            <a:pPr algn="just">
+              <a:lnSpc>
+                <a:spcPts val="850"/>
+              </a:lnSpc>
+              <a:spcBef>
+                <a:spcPts val="306"/>
+              </a:spcBef>
+              <a:defRPr/>
+            </a:pPr>
+            <a:r>
+              <a:rPr lang="en-GB" altLang="en-US" sz="900" dirty="0">
+                <a:latin typeface="Helvetica" panose="020B0604020202020204" pitchFamily="34" charset="0"/>
+              </a:rPr>
+              <a:t>- IEA Global EV Data Explorer — annual BEV sales, Ireland</a:t>
+            </a:r>
+          </a:p>
+          <a:p>
+            <a:pPr algn="just">
+              <a:lnSpc>
+                <a:spcPts val="850"/>
+              </a:lnSpc>
+              <a:spcBef>
+                <a:spcPts val="306"/>
+              </a:spcBef>
+              <a:defRPr/>
+            </a:pPr>
+            <a:r>
+              <a:rPr lang="en-GB" altLang="en-US" sz="900" dirty="0">
+                <a:latin typeface="Helvetica" panose="020B0604020202020204" pitchFamily="34" charset="0"/>
+              </a:rPr>
+              <a:t>- CSO CPM12 — monthly fuel prices, aggregated to yearly average</a:t>
+            </a:r>
+          </a:p>
+          <a:p>
+            <a:pPr algn="just">
+              <a:lnSpc>
+                <a:spcPts val="850"/>
+              </a:lnSpc>
+              <a:spcBef>
+                <a:spcPts val="306"/>
+              </a:spcBef>
+              <a:defRPr/>
+            </a:pPr>
+            <a:r>
+              <a:rPr lang="en-GB" altLang="en-US" sz="900" dirty="0">
+                <a:latin typeface="Helvetica" panose="020B0604020202020204" pitchFamily="34" charset="0"/>
+              </a:rPr>
+              <a:t>- SEAI Grant Data — manually compiled annual grant values 2011–2024</a:t>
+            </a:r>
+          </a:p>
+          <a:p>
+            <a:pPr algn="just">
+              <a:lnSpc>
+                <a:spcPts val="850"/>
+              </a:lnSpc>
+              <a:spcBef>
+                <a:spcPts val="306"/>
+              </a:spcBef>
+              <a:defRPr/>
+            </a:pPr>
+            <a:r>
+              <a:rPr lang="en-GB" altLang="en-US" sz="900" dirty="0">
+                <a:latin typeface="Helvetica" panose="020B0604020202020204" pitchFamily="34" charset="0"/>
+              </a:rPr>
+              <a:t>- CSO ETA02 — environmental tax data, used for context only</a:t>
+            </a:r>
+          </a:p>
+          <a:p>
+            <a:pPr algn="just">
+              <a:lnSpc>
+                <a:spcPts val="850"/>
+              </a:lnSpc>
+              <a:spcBef>
+                <a:spcPts val="306"/>
+              </a:spcBef>
+              <a:defRPr/>
+            </a:pPr>
+            <a:r>
+              <a:rPr lang="en-GB" altLang="en-US" sz="900" dirty="0">
+                <a:latin typeface="Helvetica" panose="020B0604020202020204" pitchFamily="34" charset="0"/>
+              </a:rPr>
+              <a:t>Strong correlations found year (~0.90) and fuel price (~0.90) with EV salesGrant value showed negative correlation (-0.80) — reflects timing, not causation</a:t>
+            </a:r>
+          </a:p>
+          <a:p>
+            <a:pPr algn="just">
+              <a:lnSpc>
+                <a:spcPts val="850"/>
+              </a:lnSpc>
+              <a:spcBef>
+                <a:spcPts val="306"/>
+              </a:spcBef>
+              <a:defRPr/>
+            </a:pPr>
+            <a:r>
+              <a:rPr lang="en-GB" altLang="en-US" sz="900" dirty="0">
+                <a:latin typeface="Helvetica" panose="020B0604020202020204" pitchFamily="34" charset="0"/>
+              </a:rPr>
+              <a:t>No missing values in final modelling dataset (10 rows, 2015–2024)</a:t>
+            </a:r>
+          </a:p>
+        </p:txBody>
+      </p:sp>
+      <p:sp>
+        <p:nvSpPr>
+          <p:cNvPr id="3081" name="Rectangle 20">
+            <a:extLst>
+              <a:ext uri="{FF2B5EF4-FFF2-40B4-BE49-F238E27FC236}">
+                <a16:creationId xmlns:a16="http://schemas.microsoft.com/office/drawing/2014/main" id="{B5F48AA4-4765-D9C1-3931-AA7B142CAFDD}"/>
+              </a:ext>
+            </a:extLst>
+          </p:cNvPr>
+          <p:cNvSpPr>
+            <a:spLocks noChangeArrowheads="1"/>
+          </p:cNvSpPr>
+          <p:nvPr/>
+        </p:nvSpPr>
+        <p:spPr bwMode="auto">
+          <a:xfrm>
+            <a:off x="6130638" y="1984746"/>
+            <a:ext cx="2172113" cy="155107"/>
+          </a:xfrm>
+          <a:prstGeom prst="rect">
+            <a:avLst/>
+          </a:prstGeom>
+          <a:noFill/>
+          <a:ln>
+            <a:noFill/>
+          </a:ln>
+          <a:extLst>
+            <a:ext uri="{909E8E84-426E-40DD-AFC4-6F175D3DCCD1}">
+              <a14:hiddenFill xmlns:a14="http://schemas.microsoft.com/office/drawing/2010/main">
+                <a:solidFill>
+                  <a:srgbClr val="FFFFFF"/>
+                </a:solidFill>
+              </a14:hiddenFill>
+            </a:ext>
+            <a:ext uri="{91240B29-F687-4F45-9708-019B960494DF}">
+              <a14:hiddenLine xmlns:a14="http://schemas.microsoft.com/office/drawing/2010/main" w="9525">
+                <a:solidFill>
+                  <a:srgbClr val="000000"/>
+                </a:solidFill>
+                <a:miter lim="800000"/>
+                <a:headEnd/>
+                <a:tailEnd/>
+              </a14:hiddenLine>
+            </a:ext>
+          </a:extLst>
+        </p:spPr>
+        <p:txBody>
+          <a:bodyPr>
+            <a:spAutoFit/>
+          </a:bodyPr>
+          <a:lstStyle>
+            <a:lvl1pPr>
+              <a:defRPr sz="2300">
+                <a:solidFill>
+                  <a:schemeClr val="tx1"/>
+                </a:solidFill>
+                <a:latin typeface="Arial" panose="020B0604020202020204" pitchFamily="34" charset="0"/>
+                <a:ea typeface="MS PGothic" panose="020B0600070205080204" pitchFamily="34" charset="-128"/>
+              </a:defRPr>
+            </a:lvl1pPr>
+            <a:lvl2pPr marL="742950" indent="-285750">
+              <a:defRPr sz="2300">
+                <a:solidFill>
+                  <a:schemeClr val="tx1"/>
+                </a:solidFill>
+                <a:latin typeface="Arial" panose="020B0604020202020204" pitchFamily="34" charset="0"/>
+                <a:ea typeface="MS PGothic" panose="020B0600070205080204" pitchFamily="34" charset="-128"/>
+              </a:defRPr>
+            </a:lvl2pPr>
+            <a:lvl3pPr marL="1143000" indent="-228600">
+              <a:defRPr sz="2300">
+                <a:solidFill>
+                  <a:schemeClr val="tx1"/>
+                </a:solidFill>
+                <a:latin typeface="Arial" panose="020B0604020202020204" pitchFamily="34" charset="0"/>
+                <a:ea typeface="MS PGothic" panose="020B0600070205080204" pitchFamily="34" charset="-128"/>
+              </a:defRPr>
+            </a:lvl3pPr>
+            <a:lvl4pPr marL="1600200" indent="-228600">
+              <a:defRPr sz="2300">
+                <a:solidFill>
+                  <a:schemeClr val="tx1"/>
+                </a:solidFill>
+                <a:latin typeface="Arial" panose="020B0604020202020204" pitchFamily="34" charset="0"/>
+                <a:ea typeface="MS PGothic" panose="020B0600070205080204" pitchFamily="34" charset="-128"/>
+              </a:defRPr>
+            </a:lvl4pPr>
+            <a:lvl5pPr marL="2057400" indent="-228600">
+              <a:defRPr sz="2300">
+                <a:solidFill>
+                  <a:schemeClr val="tx1"/>
+                </a:solidFill>
+                <a:latin typeface="Arial" panose="020B0604020202020204" pitchFamily="34" charset="0"/>
+                <a:ea typeface="MS PGothic" panose="020B0600070205080204" pitchFamily="34" charset="-128"/>
+              </a:defRPr>
+            </a:lvl5pPr>
+            <a:lvl6pPr marL="2514600" indent="-228600" eaLnBrk="0" fontAlgn="base" hangingPunct="0">
+              <a:spcBef>
+                <a:spcPct val="0"/>
+              </a:spcBef>
+              <a:spcAft>
+                <a:spcPct val="0"/>
+              </a:spcAft>
+              <a:defRPr sz="2300">
+                <a:solidFill>
+                  <a:schemeClr val="tx1"/>
+                </a:solidFill>
+                <a:latin typeface="Arial" panose="020B0604020202020204" pitchFamily="34" charset="0"/>
+                <a:ea typeface="MS PGothic" panose="020B0600070205080204" pitchFamily="34" charset="-128"/>
+              </a:defRPr>
+            </a:lvl6pPr>
+            <a:lvl7pPr marL="2971800" indent="-228600" eaLnBrk="0" fontAlgn="base" hangingPunct="0">
+              <a:spcBef>
+                <a:spcPct val="0"/>
+              </a:spcBef>
+              <a:spcAft>
+                <a:spcPct val="0"/>
+              </a:spcAft>
+              <a:defRPr sz="2300">
+                <a:solidFill>
+                  <a:schemeClr val="tx1"/>
+                </a:solidFill>
+                <a:latin typeface="Arial" panose="020B0604020202020204" pitchFamily="34" charset="0"/>
+                <a:ea typeface="MS PGothic" panose="020B0600070205080204" pitchFamily="34" charset="-128"/>
+              </a:defRPr>
+            </a:lvl7pPr>
+            <a:lvl8pPr marL="3429000" indent="-228600" eaLnBrk="0" fontAlgn="base" hangingPunct="0">
+              <a:spcBef>
+                <a:spcPct val="0"/>
+              </a:spcBef>
+              <a:spcAft>
+                <a:spcPct val="0"/>
+              </a:spcAft>
+              <a:defRPr sz="2300">
+                <a:solidFill>
+                  <a:schemeClr val="tx1"/>
+                </a:solidFill>
+                <a:latin typeface="Arial" panose="020B0604020202020204" pitchFamily="34" charset="0"/>
+                <a:ea typeface="MS PGothic" panose="020B0600070205080204" pitchFamily="34" charset="-128"/>
+              </a:defRPr>
+            </a:lvl8pPr>
+            <a:lvl9pPr marL="3886200" indent="-228600" eaLnBrk="0" fontAlgn="base" hangingPunct="0">
+              <a:spcBef>
+                <a:spcPct val="0"/>
+              </a:spcBef>
+              <a:spcAft>
+                <a:spcPct val="0"/>
+              </a:spcAft>
+              <a:defRPr sz="2300">
+                <a:solidFill>
+                  <a:schemeClr val="tx1"/>
+                </a:solidFill>
+                <a:latin typeface="Arial" panose="020B0604020202020204" pitchFamily="34" charset="0"/>
+                <a:ea typeface="MS PGothic" panose="020B0600070205080204" pitchFamily="34" charset="-128"/>
+              </a:defRPr>
+            </a:lvl9pPr>
+          </a:lstStyle>
+          <a:p>
+            <a:pPr eaLnBrk="1" hangingPunct="1"/>
+            <a:endParaRPr lang="en-US" altLang="en-US" sz="408">
+              <a:cs typeface="Arial" panose="020B0604020202020204" pitchFamily="34" charset="0"/>
+            </a:endParaRPr>
+          </a:p>
+        </p:txBody>
+      </p:sp>
+      <p:sp>
+        <p:nvSpPr>
+          <p:cNvPr id="3083" name="Rectangle 30">
+            <a:extLst>
+              <a:ext uri="{FF2B5EF4-FFF2-40B4-BE49-F238E27FC236}">
+                <a16:creationId xmlns:a16="http://schemas.microsoft.com/office/drawing/2014/main" id="{8A8BA9C8-39D1-BD1E-6917-35754C0CBFB5}"/>
+              </a:ext>
+            </a:extLst>
+          </p:cNvPr>
+          <p:cNvSpPr>
+            <a:spLocks noChangeArrowheads="1"/>
+          </p:cNvSpPr>
+          <p:nvPr/>
+        </p:nvSpPr>
+        <p:spPr bwMode="auto">
+          <a:xfrm>
+            <a:off x="2985363" y="2346938"/>
+            <a:ext cx="87909" cy="186333"/>
+          </a:xfrm>
+          <a:prstGeom prst="rect">
+            <a:avLst/>
+          </a:prstGeom>
+          <a:noFill/>
+          <a:ln>
+            <a:noFill/>
+          </a:ln>
+          <a:extLst>
+            <a:ext uri="{909E8E84-426E-40DD-AFC4-6F175D3DCCD1}">
+              <a14:hiddenFill xmlns:a14="http://schemas.microsoft.com/office/drawing/2010/main">
+                <a:solidFill>
+                  <a:srgbClr val="FFFFFF"/>
+                </a:solidFill>
+              </a14:hiddenFill>
+            </a:ext>
+            <a:ext uri="{91240B29-F687-4F45-9708-019B960494DF}">
+              <a14:hiddenLine xmlns:a14="http://schemas.microsoft.com/office/drawing/2010/main" w="9525">
+                <a:solidFill>
+                  <a:srgbClr val="000000"/>
+                </a:solidFill>
+                <a:miter lim="800000"/>
+                <a:headEnd/>
+                <a:tailEnd/>
+              </a14:hiddenLine>
+            </a:ext>
+          </a:extLst>
+        </p:spPr>
+        <p:txBody>
+          <a:bodyPr>
+            <a:spAutoFit/>
+          </a:bodyPr>
+          <a:lstStyle>
+            <a:lvl1pPr>
+              <a:defRPr sz="2300">
+                <a:solidFill>
+                  <a:schemeClr val="tx1"/>
+                </a:solidFill>
+                <a:latin typeface="Arial" panose="020B0604020202020204" pitchFamily="34" charset="0"/>
+                <a:ea typeface="MS PGothic" panose="020B0600070205080204" pitchFamily="34" charset="-128"/>
+              </a:defRPr>
+            </a:lvl1pPr>
+            <a:lvl2pPr marL="742950" indent="-285750">
+              <a:defRPr sz="2300">
+                <a:solidFill>
+                  <a:schemeClr val="tx1"/>
+                </a:solidFill>
+                <a:latin typeface="Arial" panose="020B0604020202020204" pitchFamily="34" charset="0"/>
+                <a:ea typeface="MS PGothic" panose="020B0600070205080204" pitchFamily="34" charset="-128"/>
+              </a:defRPr>
+            </a:lvl2pPr>
+            <a:lvl3pPr marL="1143000" indent="-228600">
+              <a:defRPr sz="2300">
+                <a:solidFill>
+                  <a:schemeClr val="tx1"/>
+                </a:solidFill>
+                <a:latin typeface="Arial" panose="020B0604020202020204" pitchFamily="34" charset="0"/>
+                <a:ea typeface="MS PGothic" panose="020B0600070205080204" pitchFamily="34" charset="-128"/>
+              </a:defRPr>
+            </a:lvl3pPr>
+            <a:lvl4pPr marL="1600200" indent="-228600">
+              <a:defRPr sz="2300">
+                <a:solidFill>
+                  <a:schemeClr val="tx1"/>
+                </a:solidFill>
+                <a:latin typeface="Arial" panose="020B0604020202020204" pitchFamily="34" charset="0"/>
+                <a:ea typeface="MS PGothic" panose="020B0600070205080204" pitchFamily="34" charset="-128"/>
+              </a:defRPr>
+            </a:lvl4pPr>
+            <a:lvl5pPr marL="2057400" indent="-228600">
+              <a:defRPr sz="2300">
+                <a:solidFill>
+                  <a:schemeClr val="tx1"/>
+                </a:solidFill>
+                <a:latin typeface="Arial" panose="020B0604020202020204" pitchFamily="34" charset="0"/>
+                <a:ea typeface="MS PGothic" panose="020B0600070205080204" pitchFamily="34" charset="-128"/>
+              </a:defRPr>
+            </a:lvl5pPr>
+            <a:lvl6pPr marL="2514600" indent="-228600" eaLnBrk="0" fontAlgn="base" hangingPunct="0">
+              <a:spcBef>
+                <a:spcPct val="0"/>
+              </a:spcBef>
+              <a:spcAft>
+                <a:spcPct val="0"/>
+              </a:spcAft>
+              <a:defRPr sz="2300">
+                <a:solidFill>
+                  <a:schemeClr val="tx1"/>
+                </a:solidFill>
+                <a:latin typeface="Arial" panose="020B0604020202020204" pitchFamily="34" charset="0"/>
+                <a:ea typeface="MS PGothic" panose="020B0600070205080204" pitchFamily="34" charset="-128"/>
+              </a:defRPr>
+            </a:lvl6pPr>
+            <a:lvl7pPr marL="2971800" indent="-228600" eaLnBrk="0" fontAlgn="base" hangingPunct="0">
+              <a:spcBef>
+                <a:spcPct val="0"/>
+              </a:spcBef>
+              <a:spcAft>
+                <a:spcPct val="0"/>
+              </a:spcAft>
+              <a:defRPr sz="2300">
+                <a:solidFill>
+                  <a:schemeClr val="tx1"/>
+                </a:solidFill>
+                <a:latin typeface="Arial" panose="020B0604020202020204" pitchFamily="34" charset="0"/>
+                <a:ea typeface="MS PGothic" panose="020B0600070205080204" pitchFamily="34" charset="-128"/>
+              </a:defRPr>
+            </a:lvl7pPr>
+            <a:lvl8pPr marL="3429000" indent="-228600" eaLnBrk="0" fontAlgn="base" hangingPunct="0">
+              <a:spcBef>
+                <a:spcPct val="0"/>
+              </a:spcBef>
+              <a:spcAft>
+                <a:spcPct val="0"/>
+              </a:spcAft>
+              <a:defRPr sz="2300">
+                <a:solidFill>
+                  <a:schemeClr val="tx1"/>
+                </a:solidFill>
+                <a:latin typeface="Arial" panose="020B0604020202020204" pitchFamily="34" charset="0"/>
+                <a:ea typeface="MS PGothic" panose="020B0600070205080204" pitchFamily="34" charset="-128"/>
+              </a:defRPr>
+            </a:lvl8pPr>
+            <a:lvl9pPr marL="3886200" indent="-228600" eaLnBrk="0" fontAlgn="base" hangingPunct="0">
+              <a:spcBef>
+                <a:spcPct val="0"/>
+              </a:spcBef>
+              <a:spcAft>
+                <a:spcPct val="0"/>
+              </a:spcAft>
+              <a:defRPr sz="2300">
+                <a:solidFill>
+                  <a:schemeClr val="tx1"/>
+                </a:solidFill>
+                <a:latin typeface="Arial" panose="020B0604020202020204" pitchFamily="34" charset="0"/>
+                <a:ea typeface="MS PGothic" panose="020B0600070205080204" pitchFamily="34" charset="-128"/>
+              </a:defRPr>
+            </a:lvl9pPr>
+          </a:lstStyle>
+          <a:p>
+            <a:endParaRPr lang="en-US" altLang="en-US" sz="611" b="1"/>
+          </a:p>
+        </p:txBody>
+      </p:sp>
+      <p:sp>
+        <p:nvSpPr>
+          <p:cNvPr id="3084" name="Rectangle 102">
+            <a:extLst>
+              <a:ext uri="{FF2B5EF4-FFF2-40B4-BE49-F238E27FC236}">
+                <a16:creationId xmlns:a16="http://schemas.microsoft.com/office/drawing/2014/main" id="{CDBF055F-8878-329B-3F18-B9F9B8C80D9A}"/>
+              </a:ext>
+            </a:extLst>
+          </p:cNvPr>
+          <p:cNvSpPr>
+            <a:spLocks noChangeArrowheads="1"/>
+          </p:cNvSpPr>
+          <p:nvPr/>
+        </p:nvSpPr>
+        <p:spPr bwMode="auto">
+          <a:xfrm>
+            <a:off x="3502798" y="3886614"/>
+            <a:ext cx="87909" cy="186333"/>
+          </a:xfrm>
+          <a:prstGeom prst="rect">
+            <a:avLst/>
+          </a:prstGeom>
+          <a:noFill/>
+          <a:ln>
+            <a:noFill/>
+          </a:ln>
+          <a:extLst>
+            <a:ext uri="{909E8E84-426E-40DD-AFC4-6F175D3DCCD1}">
+              <a14:hiddenFill xmlns:a14="http://schemas.microsoft.com/office/drawing/2010/main">
+                <a:solidFill>
+                  <a:srgbClr val="FFFFFF"/>
+                </a:solidFill>
+              </a14:hiddenFill>
+            </a:ext>
+            <a:ext uri="{91240B29-F687-4F45-9708-019B960494DF}">
+              <a14:hiddenLine xmlns:a14="http://schemas.microsoft.com/office/drawing/2010/main" w="9525">
+                <a:solidFill>
+                  <a:srgbClr val="000000"/>
+                </a:solidFill>
+                <a:miter lim="800000"/>
+                <a:headEnd/>
+                <a:tailEnd/>
+              </a14:hiddenLine>
+            </a:ext>
+          </a:extLst>
+        </p:spPr>
+        <p:txBody>
+          <a:bodyPr>
+            <a:spAutoFit/>
+          </a:bodyPr>
+          <a:lstStyle>
+            <a:lvl1pPr>
+              <a:defRPr sz="2300">
+                <a:solidFill>
+                  <a:schemeClr val="tx1"/>
+                </a:solidFill>
+                <a:latin typeface="Arial" panose="020B0604020202020204" pitchFamily="34" charset="0"/>
+                <a:ea typeface="MS PGothic" panose="020B0600070205080204" pitchFamily="34" charset="-128"/>
+              </a:defRPr>
+            </a:lvl1pPr>
+            <a:lvl2pPr marL="742950" indent="-285750">
+              <a:defRPr sz="2300">
+                <a:solidFill>
+                  <a:schemeClr val="tx1"/>
+                </a:solidFill>
+                <a:latin typeface="Arial" panose="020B0604020202020204" pitchFamily="34" charset="0"/>
+                <a:ea typeface="MS PGothic" panose="020B0600070205080204" pitchFamily="34" charset="-128"/>
+              </a:defRPr>
+            </a:lvl2pPr>
+            <a:lvl3pPr marL="1143000" indent="-228600">
+              <a:defRPr sz="2300">
+                <a:solidFill>
+                  <a:schemeClr val="tx1"/>
+                </a:solidFill>
+                <a:latin typeface="Arial" panose="020B0604020202020204" pitchFamily="34" charset="0"/>
+                <a:ea typeface="MS PGothic" panose="020B0600070205080204" pitchFamily="34" charset="-128"/>
+              </a:defRPr>
+            </a:lvl3pPr>
+            <a:lvl4pPr marL="1600200" indent="-228600">
+              <a:defRPr sz="2300">
+                <a:solidFill>
+                  <a:schemeClr val="tx1"/>
+                </a:solidFill>
+                <a:latin typeface="Arial" panose="020B0604020202020204" pitchFamily="34" charset="0"/>
+                <a:ea typeface="MS PGothic" panose="020B0600070205080204" pitchFamily="34" charset="-128"/>
+              </a:defRPr>
+            </a:lvl4pPr>
+            <a:lvl5pPr marL="2057400" indent="-228600">
+              <a:defRPr sz="2300">
+                <a:solidFill>
+                  <a:schemeClr val="tx1"/>
+                </a:solidFill>
+                <a:latin typeface="Arial" panose="020B0604020202020204" pitchFamily="34" charset="0"/>
+                <a:ea typeface="MS PGothic" panose="020B0600070205080204" pitchFamily="34" charset="-128"/>
+              </a:defRPr>
+            </a:lvl5pPr>
+            <a:lvl6pPr marL="2514600" indent="-228600" eaLnBrk="0" fontAlgn="base" hangingPunct="0">
+              <a:spcBef>
+                <a:spcPct val="0"/>
+              </a:spcBef>
+              <a:spcAft>
+                <a:spcPct val="0"/>
+              </a:spcAft>
+              <a:defRPr sz="2300">
+                <a:solidFill>
+                  <a:schemeClr val="tx1"/>
+                </a:solidFill>
+                <a:latin typeface="Arial" panose="020B0604020202020204" pitchFamily="34" charset="0"/>
+                <a:ea typeface="MS PGothic" panose="020B0600070205080204" pitchFamily="34" charset="-128"/>
+              </a:defRPr>
+            </a:lvl6pPr>
+            <a:lvl7pPr marL="2971800" indent="-228600" eaLnBrk="0" fontAlgn="base" hangingPunct="0">
+              <a:spcBef>
+                <a:spcPct val="0"/>
+              </a:spcBef>
+              <a:spcAft>
+                <a:spcPct val="0"/>
+              </a:spcAft>
+              <a:defRPr sz="2300">
+                <a:solidFill>
+                  <a:schemeClr val="tx1"/>
+                </a:solidFill>
+                <a:latin typeface="Arial" panose="020B0604020202020204" pitchFamily="34" charset="0"/>
+                <a:ea typeface="MS PGothic" panose="020B0600070205080204" pitchFamily="34" charset="-128"/>
+              </a:defRPr>
+            </a:lvl7pPr>
+            <a:lvl8pPr marL="3429000" indent="-228600" eaLnBrk="0" fontAlgn="base" hangingPunct="0">
+              <a:spcBef>
+                <a:spcPct val="0"/>
+              </a:spcBef>
+              <a:spcAft>
+                <a:spcPct val="0"/>
+              </a:spcAft>
+              <a:defRPr sz="2300">
+                <a:solidFill>
+                  <a:schemeClr val="tx1"/>
+                </a:solidFill>
+                <a:latin typeface="Arial" panose="020B0604020202020204" pitchFamily="34" charset="0"/>
+                <a:ea typeface="MS PGothic" panose="020B0600070205080204" pitchFamily="34" charset="-128"/>
+              </a:defRPr>
+            </a:lvl8pPr>
+            <a:lvl9pPr marL="3886200" indent="-228600" eaLnBrk="0" fontAlgn="base" hangingPunct="0">
+              <a:spcBef>
+                <a:spcPct val="0"/>
+              </a:spcBef>
+              <a:spcAft>
+                <a:spcPct val="0"/>
+              </a:spcAft>
+              <a:defRPr sz="2300">
+                <a:solidFill>
+                  <a:schemeClr val="tx1"/>
+                </a:solidFill>
+                <a:latin typeface="Arial" panose="020B0604020202020204" pitchFamily="34" charset="0"/>
+                <a:ea typeface="MS PGothic" panose="020B0600070205080204" pitchFamily="34" charset="-128"/>
+              </a:defRPr>
+            </a:lvl9pPr>
+          </a:lstStyle>
+          <a:p>
+            <a:endParaRPr lang="en-US" altLang="en-US" sz="611" b="1"/>
+          </a:p>
+        </p:txBody>
+      </p:sp>
+      <p:sp>
+        <p:nvSpPr>
+          <p:cNvPr id="14366" name="Rectangle 106">
+            <a:extLst>
+              <a:ext uri="{FF2B5EF4-FFF2-40B4-BE49-F238E27FC236}">
+                <a16:creationId xmlns:a16="http://schemas.microsoft.com/office/drawing/2014/main" id="{6DD271D0-BF4D-8D6B-552A-70EF6ECC6A10}"/>
+              </a:ext>
+            </a:extLst>
+          </p:cNvPr>
+          <p:cNvSpPr>
+            <a:spLocks noChangeArrowheads="1"/>
+          </p:cNvSpPr>
+          <p:nvPr/>
+        </p:nvSpPr>
+        <p:spPr bwMode="auto">
+          <a:xfrm>
+            <a:off x="2895829" y="1119521"/>
+            <a:ext cx="2197462" cy="1131079"/>
+          </a:xfrm>
+          <a:prstGeom prst="rect">
+            <a:avLst/>
+          </a:prstGeom>
+          <a:noFill/>
+          <a:ln>
+            <a:noFill/>
+          </a:ln>
+        </p:spPr>
+        <p:txBody>
+          <a:bodyPr wrap="square">
+            <a:spAutoFit/>
+          </a:bodyPr>
           <a:lstStyle/>
           <a:p>
-            <a:r>
-              <a:rPr lang="en-IE" dirty="0"/>
-              <a:t>TITLE</a:t>
-            </a:r>
+            <a:pPr algn="just">
+              <a:lnSpc>
+                <a:spcPts val="850"/>
+              </a:lnSpc>
+              <a:spcBef>
+                <a:spcPts val="306"/>
+              </a:spcBef>
+              <a:defRPr/>
+            </a:pPr>
+            <a:r>
+              <a:rPr lang="en-GB" altLang="en-US" sz="900" dirty="0">
+                <a:latin typeface="Helvetica" panose="020B0604020202020204" pitchFamily="34" charset="0"/>
+              </a:rPr>
+              <a:t>-  IEA data filtered to Ireland, BEV cars, EV sales parameter</a:t>
+            </a:r>
+          </a:p>
+          <a:p>
+            <a:pPr algn="just">
+              <a:lnSpc>
+                <a:spcPts val="850"/>
+              </a:lnSpc>
+              <a:spcBef>
+                <a:spcPts val="306"/>
+              </a:spcBef>
+              <a:defRPr/>
+            </a:pPr>
+            <a:r>
+              <a:rPr lang="en-GB" altLang="en-US" sz="900" dirty="0">
+                <a:latin typeface="Helvetica" panose="020B0604020202020204" pitchFamily="34" charset="0"/>
+              </a:rPr>
+              <a:t>- Monthly fuel prices aggregated to yearly averages</a:t>
+            </a:r>
+          </a:p>
+          <a:p>
+            <a:pPr algn="just">
+              <a:lnSpc>
+                <a:spcPts val="850"/>
+              </a:lnSpc>
+              <a:spcBef>
+                <a:spcPts val="306"/>
+              </a:spcBef>
+              <a:defRPr/>
+            </a:pPr>
+            <a:r>
+              <a:rPr lang="en-GB" altLang="en-US" sz="900" dirty="0">
+                <a:latin typeface="Helvetica" panose="020B0604020202020204" pitchFamily="34" charset="0"/>
+              </a:rPr>
+              <a:t>- Three features selected: </a:t>
+            </a:r>
+            <a:r>
+              <a:rPr lang="en-GB" altLang="en-US" sz="900" dirty="0" err="1">
+                <a:latin typeface="Helvetica" panose="020B0604020202020204" pitchFamily="34" charset="0"/>
+              </a:rPr>
+              <a:t>fuel_price</a:t>
+            </a:r>
+            <a:r>
+              <a:rPr lang="en-GB" altLang="en-US" sz="900" dirty="0">
+                <a:latin typeface="Helvetica" panose="020B0604020202020204" pitchFamily="34" charset="0"/>
+              </a:rPr>
+              <a:t>, year, grant_value80/20 train/test split + 5-fold cross-validation applied</a:t>
+            </a:r>
+          </a:p>
+          <a:p>
+            <a:pPr algn="just">
+              <a:lnSpc>
+                <a:spcPts val="850"/>
+              </a:lnSpc>
+              <a:spcBef>
+                <a:spcPts val="306"/>
+              </a:spcBef>
+              <a:defRPr/>
+            </a:pPr>
+            <a:r>
+              <a:rPr lang="en-GB" altLang="en-US" sz="900" dirty="0">
+                <a:latin typeface="Helvetica" panose="020B0604020202020204" pitchFamily="34" charset="0"/>
+              </a:rPr>
+              <a:t>- Four models trained and compared:</a:t>
+            </a:r>
+            <a:endParaRPr lang="en-GB" sz="900" dirty="0">
+              <a:latin typeface="Arial" charset="0"/>
+              <a:ea typeface="ＭＳ Ｐゴシック" charset="0"/>
+              <a:cs typeface="Arial" charset="0"/>
+            </a:endParaRPr>
+          </a:p>
+        </p:txBody>
+      </p:sp>
+      <p:grpSp>
+        <p:nvGrpSpPr>
+          <p:cNvPr id="3086" name="Group 107">
+            <a:extLst>
+              <a:ext uri="{FF2B5EF4-FFF2-40B4-BE49-F238E27FC236}">
+                <a16:creationId xmlns:a16="http://schemas.microsoft.com/office/drawing/2014/main" id="{AF84F767-28EB-545B-903F-20D3A6720309}"/>
+              </a:ext>
+            </a:extLst>
+          </p:cNvPr>
+          <p:cNvGrpSpPr>
+            <a:grpSpLocks/>
+          </p:cNvGrpSpPr>
+          <p:nvPr/>
+        </p:nvGrpSpPr>
+        <p:grpSpPr bwMode="auto">
+          <a:xfrm>
+            <a:off x="2978352" y="660214"/>
+            <a:ext cx="2188832" cy="437299"/>
+            <a:chOff x="14894284" y="5068979"/>
+            <a:chExt cx="12887106" cy="2574221"/>
+          </a:xfrm>
+        </p:grpSpPr>
+        <p:sp>
+          <p:nvSpPr>
+            <p:cNvPr id="3101" name="Rectangle 249">
+              <a:extLst>
+                <a:ext uri="{FF2B5EF4-FFF2-40B4-BE49-F238E27FC236}">
+                  <a16:creationId xmlns:a16="http://schemas.microsoft.com/office/drawing/2014/main" id="{2346AE4B-E5C5-3319-201F-3BA5F63DE185}"/>
+                </a:ext>
+              </a:extLst>
+            </p:cNvPr>
+            <p:cNvSpPr>
+              <a:spLocks noChangeArrowheads="1"/>
+            </p:cNvSpPr>
+            <p:nvPr/>
+          </p:nvSpPr>
+          <p:spPr bwMode="auto">
+            <a:xfrm>
+              <a:off x="14894284" y="5068979"/>
+              <a:ext cx="12887106" cy="2574221"/>
+            </a:xfrm>
+            <a:prstGeom prst="rect">
+              <a:avLst/>
+            </a:prstGeom>
+            <a:noFill/>
+            <a:ln>
+              <a:noFill/>
+            </a:ln>
+            <a:extLst>
+              <a:ext uri="{909E8E84-426E-40DD-AFC4-6F175D3DCCD1}">
+                <a14:hiddenFill xmlns:a14="http://schemas.microsoft.com/office/drawing/2010/main">
+                  <a:solidFill>
+                    <a:srgbClr val="FFFFFF"/>
+                  </a:solidFill>
+                </a14:hiddenFill>
+              </a:ext>
+              <a:ext uri="{91240B29-F687-4F45-9708-019B960494DF}">
+                <a14:hiddenLine xmlns:a14="http://schemas.microsoft.com/office/drawing/2010/main" w="9525">
+                  <a:solidFill>
+                    <a:srgbClr val="000000"/>
+                  </a:solidFill>
+                  <a:miter lim="800000"/>
+                  <a:headEnd/>
+                  <a:tailEnd/>
+                </a14:hiddenLine>
+              </a:ext>
+            </a:extLst>
+          </p:spPr>
+          <p:txBody>
+            <a:bodyPr>
+              <a:spAutoFit/>
+            </a:bodyPr>
+            <a:lstStyle>
+              <a:lvl1pPr>
+                <a:defRPr sz="2300">
+                  <a:solidFill>
+                    <a:schemeClr val="tx1"/>
+                  </a:solidFill>
+                  <a:latin typeface="Arial" panose="020B0604020202020204" pitchFamily="34" charset="0"/>
+                  <a:ea typeface="MS PGothic" panose="020B0600070205080204" pitchFamily="34" charset="-128"/>
+                </a:defRPr>
+              </a:lvl1pPr>
+              <a:lvl2pPr marL="742950" indent="-285750">
+                <a:defRPr sz="2300">
+                  <a:solidFill>
+                    <a:schemeClr val="tx1"/>
+                  </a:solidFill>
+                  <a:latin typeface="Arial" panose="020B0604020202020204" pitchFamily="34" charset="0"/>
+                  <a:ea typeface="MS PGothic" panose="020B0600070205080204" pitchFamily="34" charset="-128"/>
+                </a:defRPr>
+              </a:lvl2pPr>
+              <a:lvl3pPr marL="1143000" indent="-228600">
+                <a:defRPr sz="2300">
+                  <a:solidFill>
+                    <a:schemeClr val="tx1"/>
+                  </a:solidFill>
+                  <a:latin typeface="Arial" panose="020B0604020202020204" pitchFamily="34" charset="0"/>
+                  <a:ea typeface="MS PGothic" panose="020B0600070205080204" pitchFamily="34" charset="-128"/>
+                </a:defRPr>
+              </a:lvl3pPr>
+              <a:lvl4pPr marL="1600200" indent="-228600">
+                <a:defRPr sz="2300">
+                  <a:solidFill>
+                    <a:schemeClr val="tx1"/>
+                  </a:solidFill>
+                  <a:latin typeface="Arial" panose="020B0604020202020204" pitchFamily="34" charset="0"/>
+                  <a:ea typeface="MS PGothic" panose="020B0600070205080204" pitchFamily="34" charset="-128"/>
+                </a:defRPr>
+              </a:lvl4pPr>
+              <a:lvl5pPr marL="2057400" indent="-228600">
+                <a:defRPr sz="2300">
+                  <a:solidFill>
+                    <a:schemeClr val="tx1"/>
+                  </a:solidFill>
+                  <a:latin typeface="Arial" panose="020B0604020202020204" pitchFamily="34" charset="0"/>
+                  <a:ea typeface="MS PGothic" panose="020B0600070205080204" pitchFamily="34" charset="-128"/>
+                </a:defRPr>
+              </a:lvl5pPr>
+              <a:lvl6pPr marL="2514600" indent="-228600" eaLnBrk="0" fontAlgn="base" hangingPunct="0">
+                <a:spcBef>
+                  <a:spcPct val="0"/>
+                </a:spcBef>
+                <a:spcAft>
+                  <a:spcPct val="0"/>
+                </a:spcAft>
+                <a:defRPr sz="2300">
+                  <a:solidFill>
+                    <a:schemeClr val="tx1"/>
+                  </a:solidFill>
+                  <a:latin typeface="Arial" panose="020B0604020202020204" pitchFamily="34" charset="0"/>
+                  <a:ea typeface="MS PGothic" panose="020B0600070205080204" pitchFamily="34" charset="-128"/>
+                </a:defRPr>
+              </a:lvl6pPr>
+              <a:lvl7pPr marL="2971800" indent="-228600" eaLnBrk="0" fontAlgn="base" hangingPunct="0">
+                <a:spcBef>
+                  <a:spcPct val="0"/>
+                </a:spcBef>
+                <a:spcAft>
+                  <a:spcPct val="0"/>
+                </a:spcAft>
+                <a:defRPr sz="2300">
+                  <a:solidFill>
+                    <a:schemeClr val="tx1"/>
+                  </a:solidFill>
+                  <a:latin typeface="Arial" panose="020B0604020202020204" pitchFamily="34" charset="0"/>
+                  <a:ea typeface="MS PGothic" panose="020B0600070205080204" pitchFamily="34" charset="-128"/>
+                </a:defRPr>
+              </a:lvl7pPr>
+              <a:lvl8pPr marL="3429000" indent="-228600" eaLnBrk="0" fontAlgn="base" hangingPunct="0">
+                <a:spcBef>
+                  <a:spcPct val="0"/>
+                </a:spcBef>
+                <a:spcAft>
+                  <a:spcPct val="0"/>
+                </a:spcAft>
+                <a:defRPr sz="2300">
+                  <a:solidFill>
+                    <a:schemeClr val="tx1"/>
+                  </a:solidFill>
+                  <a:latin typeface="Arial" panose="020B0604020202020204" pitchFamily="34" charset="0"/>
+                  <a:ea typeface="MS PGothic" panose="020B0600070205080204" pitchFamily="34" charset="-128"/>
+                </a:defRPr>
+              </a:lvl8pPr>
+              <a:lvl9pPr marL="3886200" indent="-228600" eaLnBrk="0" fontAlgn="base" hangingPunct="0">
+                <a:spcBef>
+                  <a:spcPct val="0"/>
+                </a:spcBef>
+                <a:spcAft>
+                  <a:spcPct val="0"/>
+                </a:spcAft>
+                <a:defRPr sz="2300">
+                  <a:solidFill>
+                    <a:schemeClr val="tx1"/>
+                  </a:solidFill>
+                  <a:latin typeface="Arial" panose="020B0604020202020204" pitchFamily="34" charset="0"/>
+                  <a:ea typeface="MS PGothic" panose="020B0600070205080204" pitchFamily="34" charset="-128"/>
+                </a:defRPr>
+              </a:lvl9pPr>
+            </a:lstStyle>
+            <a:p>
+              <a:r>
+                <a:rPr lang="en-GB" altLang="en-US" sz="1121" b="1" dirty="0">
+                  <a:solidFill>
+                    <a:srgbClr val="006684"/>
+                  </a:solidFill>
+                  <a:cs typeface="Arial" panose="020B0604020202020204" pitchFamily="34" charset="0"/>
+                </a:rPr>
+                <a:t> Data Preparation &amp; Modelling</a:t>
+              </a:r>
+              <a:endParaRPr lang="en-US" altLang="en-US" sz="1121" dirty="0">
+                <a:solidFill>
+                  <a:srgbClr val="006684"/>
+                </a:solidFill>
+                <a:cs typeface="Arial" panose="020B0604020202020204" pitchFamily="34" charset="0"/>
+              </a:endParaRPr>
+            </a:p>
+          </p:txBody>
+        </p:sp>
+        <p:cxnSp>
+          <p:nvCxnSpPr>
+            <p:cNvPr id="3102" name="Straight Connector 6">
+              <a:extLst>
+                <a:ext uri="{FF2B5EF4-FFF2-40B4-BE49-F238E27FC236}">
+                  <a16:creationId xmlns:a16="http://schemas.microsoft.com/office/drawing/2014/main" id="{CCF1A68C-718D-8756-14B5-0FADCCC771AA}"/>
+                </a:ext>
+              </a:extLst>
+            </p:cNvPr>
+            <p:cNvCxnSpPr>
+              <a:cxnSpLocks noChangeShapeType="1"/>
+            </p:cNvCxnSpPr>
+            <p:nvPr/>
+          </p:nvCxnSpPr>
+          <p:spPr bwMode="auto">
+            <a:xfrm flipV="1">
+              <a:off x="15019206" y="5195636"/>
+              <a:ext cx="12745514" cy="1"/>
+            </a:xfrm>
+            <a:prstGeom prst="line">
+              <a:avLst/>
+            </a:prstGeom>
+            <a:noFill/>
+            <a:ln w="12700">
+              <a:solidFill>
+                <a:srgbClr val="006684"/>
+              </a:solidFill>
+              <a:round/>
+              <a:headEnd/>
+              <a:tailEnd/>
+            </a:ln>
+            <a:extLst>
+              <a:ext uri="{909E8E84-426E-40DD-AFC4-6F175D3DCCD1}">
+                <a14:hiddenFill xmlns:a14="http://schemas.microsoft.com/office/drawing/2010/main">
+                  <a:noFill/>
+                </a14:hiddenFill>
+              </a:ext>
+            </a:extLst>
+          </p:spPr>
+        </p:cxnSp>
+      </p:grpSp>
+      <p:sp>
+        <p:nvSpPr>
+          <p:cNvPr id="3090" name="Rectangle 6">
+            <a:extLst>
+              <a:ext uri="{FF2B5EF4-FFF2-40B4-BE49-F238E27FC236}">
+                <a16:creationId xmlns:a16="http://schemas.microsoft.com/office/drawing/2014/main" id="{BDD76730-9616-8535-7915-51B51894D860}"/>
+              </a:ext>
+            </a:extLst>
+          </p:cNvPr>
+          <p:cNvSpPr>
+            <a:spLocks noChangeArrowheads="1"/>
+          </p:cNvSpPr>
+          <p:nvPr/>
+        </p:nvSpPr>
+        <p:spPr bwMode="auto">
+          <a:xfrm>
+            <a:off x="-2" y="-6614"/>
+            <a:ext cx="9144001" cy="545523"/>
+          </a:xfrm>
+          <a:prstGeom prst="rect">
+            <a:avLst/>
+          </a:prstGeom>
+          <a:solidFill>
+            <a:srgbClr val="006684"/>
+          </a:solidFill>
+          <a:ln>
+            <a:noFill/>
+          </a:ln>
+          <a:extLst>
+            <a:ext uri="{91240B29-F687-4F45-9708-019B960494DF}">
+              <a14:hiddenLine xmlns:a14="http://schemas.microsoft.com/office/drawing/2010/main" w="9525">
+                <a:solidFill>
+                  <a:srgbClr val="000000"/>
+                </a:solidFill>
+                <a:miter lim="800000"/>
+                <a:headEnd/>
+                <a:tailEnd/>
+              </a14:hiddenLine>
+            </a:ext>
+          </a:extLst>
+        </p:spPr>
+        <p:txBody>
+          <a:bodyPr anchor="ctr"/>
+          <a:lstStyle>
+            <a:lvl1pPr>
+              <a:defRPr sz="2300">
+                <a:solidFill>
+                  <a:schemeClr val="tx1"/>
+                </a:solidFill>
+                <a:latin typeface="Arial" panose="020B0604020202020204" pitchFamily="34" charset="0"/>
+                <a:ea typeface="MS PGothic" panose="020B0600070205080204" pitchFamily="34" charset="-128"/>
+              </a:defRPr>
+            </a:lvl1pPr>
+            <a:lvl2pPr marL="742950" indent="-285750">
+              <a:defRPr sz="2300">
+                <a:solidFill>
+                  <a:schemeClr val="tx1"/>
+                </a:solidFill>
+                <a:latin typeface="Arial" panose="020B0604020202020204" pitchFamily="34" charset="0"/>
+                <a:ea typeface="MS PGothic" panose="020B0600070205080204" pitchFamily="34" charset="-128"/>
+              </a:defRPr>
+            </a:lvl2pPr>
+            <a:lvl3pPr marL="1143000" indent="-228600">
+              <a:defRPr sz="2300">
+                <a:solidFill>
+                  <a:schemeClr val="tx1"/>
+                </a:solidFill>
+                <a:latin typeface="Arial" panose="020B0604020202020204" pitchFamily="34" charset="0"/>
+                <a:ea typeface="MS PGothic" panose="020B0600070205080204" pitchFamily="34" charset="-128"/>
+              </a:defRPr>
+            </a:lvl3pPr>
+            <a:lvl4pPr marL="1600200" indent="-228600">
+              <a:defRPr sz="2300">
+                <a:solidFill>
+                  <a:schemeClr val="tx1"/>
+                </a:solidFill>
+                <a:latin typeface="Arial" panose="020B0604020202020204" pitchFamily="34" charset="0"/>
+                <a:ea typeface="MS PGothic" panose="020B0600070205080204" pitchFamily="34" charset="-128"/>
+              </a:defRPr>
+            </a:lvl4pPr>
+            <a:lvl5pPr marL="2057400" indent="-228600">
+              <a:defRPr sz="2300">
+                <a:solidFill>
+                  <a:schemeClr val="tx1"/>
+                </a:solidFill>
+                <a:latin typeface="Arial" panose="020B0604020202020204" pitchFamily="34" charset="0"/>
+                <a:ea typeface="MS PGothic" panose="020B0600070205080204" pitchFamily="34" charset="-128"/>
+              </a:defRPr>
+            </a:lvl5pPr>
+            <a:lvl6pPr marL="2514600" indent="-228600" eaLnBrk="0" fontAlgn="base" hangingPunct="0">
+              <a:spcBef>
+                <a:spcPct val="0"/>
+              </a:spcBef>
+              <a:spcAft>
+                <a:spcPct val="0"/>
+              </a:spcAft>
+              <a:defRPr sz="2300">
+                <a:solidFill>
+                  <a:schemeClr val="tx1"/>
+                </a:solidFill>
+                <a:latin typeface="Arial" panose="020B0604020202020204" pitchFamily="34" charset="0"/>
+                <a:ea typeface="MS PGothic" panose="020B0600070205080204" pitchFamily="34" charset="-128"/>
+              </a:defRPr>
+            </a:lvl6pPr>
+            <a:lvl7pPr marL="2971800" indent="-228600" eaLnBrk="0" fontAlgn="base" hangingPunct="0">
+              <a:spcBef>
+                <a:spcPct val="0"/>
+              </a:spcBef>
+              <a:spcAft>
+                <a:spcPct val="0"/>
+              </a:spcAft>
+              <a:defRPr sz="2300">
+                <a:solidFill>
+                  <a:schemeClr val="tx1"/>
+                </a:solidFill>
+                <a:latin typeface="Arial" panose="020B0604020202020204" pitchFamily="34" charset="0"/>
+                <a:ea typeface="MS PGothic" panose="020B0600070205080204" pitchFamily="34" charset="-128"/>
+              </a:defRPr>
+            </a:lvl7pPr>
+            <a:lvl8pPr marL="3429000" indent="-228600" eaLnBrk="0" fontAlgn="base" hangingPunct="0">
+              <a:spcBef>
+                <a:spcPct val="0"/>
+              </a:spcBef>
+              <a:spcAft>
+                <a:spcPct val="0"/>
+              </a:spcAft>
+              <a:defRPr sz="2300">
+                <a:solidFill>
+                  <a:schemeClr val="tx1"/>
+                </a:solidFill>
+                <a:latin typeface="Arial" panose="020B0604020202020204" pitchFamily="34" charset="0"/>
+                <a:ea typeface="MS PGothic" panose="020B0600070205080204" pitchFamily="34" charset="-128"/>
+              </a:defRPr>
+            </a:lvl8pPr>
+            <a:lvl9pPr marL="3886200" indent="-228600" eaLnBrk="0" fontAlgn="base" hangingPunct="0">
+              <a:spcBef>
+                <a:spcPct val="0"/>
+              </a:spcBef>
+              <a:spcAft>
+                <a:spcPct val="0"/>
+              </a:spcAft>
+              <a:defRPr sz="2300">
+                <a:solidFill>
+                  <a:schemeClr val="tx1"/>
+                </a:solidFill>
+                <a:latin typeface="Arial" panose="020B0604020202020204" pitchFamily="34" charset="0"/>
+                <a:ea typeface="MS PGothic" panose="020B0600070205080204" pitchFamily="34" charset="-128"/>
+              </a:defRPr>
+            </a:lvl9pPr>
+          </a:lstStyle>
+          <a:p>
+            <a:pPr algn="ctr"/>
+            <a:endParaRPr lang="en-US" altLang="en-US" sz="1121" b="1">
+              <a:solidFill>
+                <a:schemeClr val="bg1"/>
+              </a:solidFill>
+              <a:cs typeface="Arial" panose="020B0604020202020204" pitchFamily="34" charset="0"/>
+            </a:endParaRPr>
+          </a:p>
+        </p:txBody>
+      </p:sp>
+      <p:sp>
+        <p:nvSpPr>
+          <p:cNvPr id="3091" name="TextBox 26">
+            <a:extLst>
+              <a:ext uri="{FF2B5EF4-FFF2-40B4-BE49-F238E27FC236}">
+                <a16:creationId xmlns:a16="http://schemas.microsoft.com/office/drawing/2014/main" id="{0979E151-000E-D7E8-2997-A2F304DAA768}"/>
+              </a:ext>
+            </a:extLst>
+          </p:cNvPr>
+          <p:cNvSpPr txBox="1">
+            <a:spLocks noChangeArrowheads="1"/>
+          </p:cNvSpPr>
+          <p:nvPr/>
+        </p:nvSpPr>
+        <p:spPr bwMode="auto">
+          <a:xfrm>
+            <a:off x="562257" y="92102"/>
+            <a:ext cx="5549398" cy="259045"/>
+          </a:xfrm>
+          <a:prstGeom prst="rect">
+            <a:avLst/>
+          </a:prstGeom>
+          <a:noFill/>
+          <a:ln>
+            <a:noFill/>
+          </a:ln>
+          <a:extLst>
+            <a:ext uri="{909E8E84-426E-40DD-AFC4-6F175D3DCCD1}">
+              <a14:hiddenFill xmlns:a14="http://schemas.microsoft.com/office/drawing/2010/main">
+                <a:solidFill>
+                  <a:srgbClr val="FFFFFF"/>
+                </a:solidFill>
+              </a14:hiddenFill>
+            </a:ext>
+            <a:ext uri="{91240B29-F687-4F45-9708-019B960494DF}">
+              <a14:hiddenLine xmlns:a14="http://schemas.microsoft.com/office/drawing/2010/main" w="9525">
+                <a:solidFill>
+                  <a:srgbClr val="000000"/>
+                </a:solidFill>
+                <a:miter lim="800000"/>
+                <a:headEnd/>
+                <a:tailEnd/>
+              </a14:hiddenLine>
+            </a:ext>
+          </a:extLst>
+        </p:spPr>
+        <p:txBody>
+          <a:bodyPr wrap="square">
+            <a:spAutoFit/>
+          </a:bodyPr>
+          <a:lstStyle>
+            <a:lvl1pPr>
+              <a:defRPr sz="2300">
+                <a:solidFill>
+                  <a:schemeClr val="tx1"/>
+                </a:solidFill>
+                <a:latin typeface="Arial" panose="020B0604020202020204" pitchFamily="34" charset="0"/>
+                <a:ea typeface="MS PGothic" panose="020B0600070205080204" pitchFamily="34" charset="-128"/>
+              </a:defRPr>
+            </a:lvl1pPr>
+            <a:lvl2pPr marL="742950" indent="-285750">
+              <a:defRPr sz="2300">
+                <a:solidFill>
+                  <a:schemeClr val="tx1"/>
+                </a:solidFill>
+                <a:latin typeface="Arial" panose="020B0604020202020204" pitchFamily="34" charset="0"/>
+                <a:ea typeface="MS PGothic" panose="020B0600070205080204" pitchFamily="34" charset="-128"/>
+              </a:defRPr>
+            </a:lvl2pPr>
+            <a:lvl3pPr marL="1143000" indent="-228600">
+              <a:defRPr sz="2300">
+                <a:solidFill>
+                  <a:schemeClr val="tx1"/>
+                </a:solidFill>
+                <a:latin typeface="Arial" panose="020B0604020202020204" pitchFamily="34" charset="0"/>
+                <a:ea typeface="MS PGothic" panose="020B0600070205080204" pitchFamily="34" charset="-128"/>
+              </a:defRPr>
+            </a:lvl3pPr>
+            <a:lvl4pPr marL="1600200" indent="-228600">
+              <a:defRPr sz="2300">
+                <a:solidFill>
+                  <a:schemeClr val="tx1"/>
+                </a:solidFill>
+                <a:latin typeface="Arial" panose="020B0604020202020204" pitchFamily="34" charset="0"/>
+                <a:ea typeface="MS PGothic" panose="020B0600070205080204" pitchFamily="34" charset="-128"/>
+              </a:defRPr>
+            </a:lvl4pPr>
+            <a:lvl5pPr marL="2057400" indent="-228600">
+              <a:defRPr sz="2300">
+                <a:solidFill>
+                  <a:schemeClr val="tx1"/>
+                </a:solidFill>
+                <a:latin typeface="Arial" panose="020B0604020202020204" pitchFamily="34" charset="0"/>
+                <a:ea typeface="MS PGothic" panose="020B0600070205080204" pitchFamily="34" charset="-128"/>
+              </a:defRPr>
+            </a:lvl5pPr>
+            <a:lvl6pPr marL="2514600" indent="-228600" eaLnBrk="0" fontAlgn="base" hangingPunct="0">
+              <a:spcBef>
+                <a:spcPct val="0"/>
+              </a:spcBef>
+              <a:spcAft>
+                <a:spcPct val="0"/>
+              </a:spcAft>
+              <a:defRPr sz="2300">
+                <a:solidFill>
+                  <a:schemeClr val="tx1"/>
+                </a:solidFill>
+                <a:latin typeface="Arial" panose="020B0604020202020204" pitchFamily="34" charset="0"/>
+                <a:ea typeface="MS PGothic" panose="020B0600070205080204" pitchFamily="34" charset="-128"/>
+              </a:defRPr>
+            </a:lvl6pPr>
+            <a:lvl7pPr marL="2971800" indent="-228600" eaLnBrk="0" fontAlgn="base" hangingPunct="0">
+              <a:spcBef>
+                <a:spcPct val="0"/>
+              </a:spcBef>
+              <a:spcAft>
+                <a:spcPct val="0"/>
+              </a:spcAft>
+              <a:defRPr sz="2300">
+                <a:solidFill>
+                  <a:schemeClr val="tx1"/>
+                </a:solidFill>
+                <a:latin typeface="Arial" panose="020B0604020202020204" pitchFamily="34" charset="0"/>
+                <a:ea typeface="MS PGothic" panose="020B0600070205080204" pitchFamily="34" charset="-128"/>
+              </a:defRPr>
+            </a:lvl7pPr>
+            <a:lvl8pPr marL="3429000" indent="-228600" eaLnBrk="0" fontAlgn="base" hangingPunct="0">
+              <a:spcBef>
+                <a:spcPct val="0"/>
+              </a:spcBef>
+              <a:spcAft>
+                <a:spcPct val="0"/>
+              </a:spcAft>
+              <a:defRPr sz="2300">
+                <a:solidFill>
+                  <a:schemeClr val="tx1"/>
+                </a:solidFill>
+                <a:latin typeface="Arial" panose="020B0604020202020204" pitchFamily="34" charset="0"/>
+                <a:ea typeface="MS PGothic" panose="020B0600070205080204" pitchFamily="34" charset="-128"/>
+              </a:defRPr>
+            </a:lvl8pPr>
+            <a:lvl9pPr marL="3886200" indent="-228600" eaLnBrk="0" fontAlgn="base" hangingPunct="0">
+              <a:spcBef>
+                <a:spcPct val="0"/>
+              </a:spcBef>
+              <a:spcAft>
+                <a:spcPct val="0"/>
+              </a:spcAft>
+              <a:defRPr sz="2300">
+                <a:solidFill>
+                  <a:schemeClr val="tx1"/>
+                </a:solidFill>
+                <a:latin typeface="Arial" panose="020B0604020202020204" pitchFamily="34" charset="0"/>
+                <a:ea typeface="MS PGothic" panose="020B0600070205080204" pitchFamily="34" charset="-128"/>
+              </a:defRPr>
+            </a:lvl9pPr>
+          </a:lstStyle>
+          <a:p>
+            <a:pPr algn="ctr">
+              <a:lnSpc>
+                <a:spcPts val="1291"/>
+              </a:lnSpc>
+            </a:pPr>
+            <a:r>
+              <a:rPr lang="en-GB" altLang="en-US" sz="1359" b="1" dirty="0">
+                <a:solidFill>
+                  <a:schemeClr val="bg1"/>
+                </a:solidFill>
+                <a:cs typeface="Arial" panose="020B0604020202020204" pitchFamily="34" charset="0"/>
+              </a:rPr>
+              <a:t>Predicting Electric Vehicle Adoption in Ireland</a:t>
+            </a:r>
+          </a:p>
+        </p:txBody>
+      </p:sp>
+      <p:sp>
+        <p:nvSpPr>
+          <p:cNvPr id="3092" name="Rectangle 6">
+            <a:extLst>
+              <a:ext uri="{FF2B5EF4-FFF2-40B4-BE49-F238E27FC236}">
+                <a16:creationId xmlns:a16="http://schemas.microsoft.com/office/drawing/2014/main" id="{DE26EA11-D857-CFAD-CD9B-4979E7F07C97}"/>
+              </a:ext>
+            </a:extLst>
+          </p:cNvPr>
+          <p:cNvSpPr>
+            <a:spLocks noChangeArrowheads="1"/>
+          </p:cNvSpPr>
+          <p:nvPr/>
+        </p:nvSpPr>
+        <p:spPr bwMode="auto">
+          <a:xfrm>
+            <a:off x="1254375" y="340796"/>
+            <a:ext cx="7528298" cy="169855"/>
+          </a:xfrm>
+          <a:prstGeom prst="rect">
+            <a:avLst/>
+          </a:prstGeom>
+          <a:noFill/>
+          <a:ln>
+            <a:noFill/>
+          </a:ln>
+          <a:extLst>
+            <a:ext uri="{909E8E84-426E-40DD-AFC4-6F175D3DCCD1}">
+              <a14:hiddenFill xmlns:a14="http://schemas.microsoft.com/office/drawing/2010/main">
+                <a:solidFill>
+                  <a:srgbClr val="FFFFFF"/>
+                </a:solidFill>
+              </a14:hiddenFill>
+            </a:ext>
+            <a:ext uri="{91240B29-F687-4F45-9708-019B960494DF}">
+              <a14:hiddenLine xmlns:a14="http://schemas.microsoft.com/office/drawing/2010/main" w="9525">
+                <a:solidFill>
+                  <a:srgbClr val="000000"/>
+                </a:solidFill>
+                <a:miter lim="800000"/>
+                <a:headEnd/>
+                <a:tailEnd/>
+              </a14:hiddenLine>
+            </a:ext>
+          </a:extLst>
+        </p:spPr>
+        <p:txBody>
+          <a:bodyPr wrap="square">
+            <a:spAutoFit/>
+          </a:bodyPr>
+          <a:lstStyle>
+            <a:lvl1pPr>
+              <a:defRPr sz="2300">
+                <a:solidFill>
+                  <a:schemeClr val="tx1"/>
+                </a:solidFill>
+                <a:latin typeface="Arial" panose="020B0604020202020204" pitchFamily="34" charset="0"/>
+                <a:ea typeface="MS PGothic" panose="020B0600070205080204" pitchFamily="34" charset="-128"/>
+              </a:defRPr>
+            </a:lvl1pPr>
+            <a:lvl2pPr marL="742950" indent="-285750">
+              <a:defRPr sz="2300">
+                <a:solidFill>
+                  <a:schemeClr val="tx1"/>
+                </a:solidFill>
+                <a:latin typeface="Arial" panose="020B0604020202020204" pitchFamily="34" charset="0"/>
+                <a:ea typeface="MS PGothic" panose="020B0600070205080204" pitchFamily="34" charset="-128"/>
+              </a:defRPr>
+            </a:lvl2pPr>
+            <a:lvl3pPr marL="1143000" indent="-228600">
+              <a:defRPr sz="2300">
+                <a:solidFill>
+                  <a:schemeClr val="tx1"/>
+                </a:solidFill>
+                <a:latin typeface="Arial" panose="020B0604020202020204" pitchFamily="34" charset="0"/>
+                <a:ea typeface="MS PGothic" panose="020B0600070205080204" pitchFamily="34" charset="-128"/>
+              </a:defRPr>
+            </a:lvl3pPr>
+            <a:lvl4pPr marL="1600200" indent="-228600">
+              <a:defRPr sz="2300">
+                <a:solidFill>
+                  <a:schemeClr val="tx1"/>
+                </a:solidFill>
+                <a:latin typeface="Arial" panose="020B0604020202020204" pitchFamily="34" charset="0"/>
+                <a:ea typeface="MS PGothic" panose="020B0600070205080204" pitchFamily="34" charset="-128"/>
+              </a:defRPr>
+            </a:lvl4pPr>
+            <a:lvl5pPr marL="2057400" indent="-228600">
+              <a:defRPr sz="2300">
+                <a:solidFill>
+                  <a:schemeClr val="tx1"/>
+                </a:solidFill>
+                <a:latin typeface="Arial" panose="020B0604020202020204" pitchFamily="34" charset="0"/>
+                <a:ea typeface="MS PGothic" panose="020B0600070205080204" pitchFamily="34" charset="-128"/>
+              </a:defRPr>
+            </a:lvl5pPr>
+            <a:lvl6pPr marL="2514600" indent="-228600" eaLnBrk="0" fontAlgn="base" hangingPunct="0">
+              <a:spcBef>
+                <a:spcPct val="0"/>
+              </a:spcBef>
+              <a:spcAft>
+                <a:spcPct val="0"/>
+              </a:spcAft>
+              <a:defRPr sz="2300">
+                <a:solidFill>
+                  <a:schemeClr val="tx1"/>
+                </a:solidFill>
+                <a:latin typeface="Arial" panose="020B0604020202020204" pitchFamily="34" charset="0"/>
+                <a:ea typeface="MS PGothic" panose="020B0600070205080204" pitchFamily="34" charset="-128"/>
+              </a:defRPr>
+            </a:lvl6pPr>
+            <a:lvl7pPr marL="2971800" indent="-228600" eaLnBrk="0" fontAlgn="base" hangingPunct="0">
+              <a:spcBef>
+                <a:spcPct val="0"/>
+              </a:spcBef>
+              <a:spcAft>
+                <a:spcPct val="0"/>
+              </a:spcAft>
+              <a:defRPr sz="2300">
+                <a:solidFill>
+                  <a:schemeClr val="tx1"/>
+                </a:solidFill>
+                <a:latin typeface="Arial" panose="020B0604020202020204" pitchFamily="34" charset="0"/>
+                <a:ea typeface="MS PGothic" panose="020B0600070205080204" pitchFamily="34" charset="-128"/>
+              </a:defRPr>
+            </a:lvl7pPr>
+            <a:lvl8pPr marL="3429000" indent="-228600" eaLnBrk="0" fontAlgn="base" hangingPunct="0">
+              <a:spcBef>
+                <a:spcPct val="0"/>
+              </a:spcBef>
+              <a:spcAft>
+                <a:spcPct val="0"/>
+              </a:spcAft>
+              <a:defRPr sz="2300">
+                <a:solidFill>
+                  <a:schemeClr val="tx1"/>
+                </a:solidFill>
+                <a:latin typeface="Arial" panose="020B0604020202020204" pitchFamily="34" charset="0"/>
+                <a:ea typeface="MS PGothic" panose="020B0600070205080204" pitchFamily="34" charset="-128"/>
+              </a:defRPr>
+            </a:lvl8pPr>
+            <a:lvl9pPr marL="3886200" indent="-228600" eaLnBrk="0" fontAlgn="base" hangingPunct="0">
+              <a:spcBef>
+                <a:spcPct val="0"/>
+              </a:spcBef>
+              <a:spcAft>
+                <a:spcPct val="0"/>
+              </a:spcAft>
+              <a:defRPr sz="2300">
+                <a:solidFill>
+                  <a:schemeClr val="tx1"/>
+                </a:solidFill>
+                <a:latin typeface="Arial" panose="020B0604020202020204" pitchFamily="34" charset="0"/>
+                <a:ea typeface="MS PGothic" panose="020B0600070205080204" pitchFamily="34" charset="-128"/>
+              </a:defRPr>
+            </a:lvl9pPr>
+          </a:lstStyle>
+          <a:p>
+            <a:pPr>
+              <a:lnSpc>
+                <a:spcPts val="578"/>
+              </a:lnSpc>
+            </a:pPr>
+            <a:r>
+              <a:rPr lang="en-GB" altLang="en-US" sz="680" b="1" dirty="0">
+                <a:solidFill>
+                  <a:schemeClr val="bg1"/>
+                </a:solidFill>
+                <a:cs typeface="Arial" panose="020B0604020202020204" pitchFamily="34" charset="0"/>
+              </a:rPr>
+              <a:t>Guilherme Munhoz | Student Number 2022448 | Capstone Project</a:t>
+            </a:r>
+          </a:p>
+        </p:txBody>
+      </p:sp>
+      <p:pic>
+        <p:nvPicPr>
+          <p:cNvPr id="3093" name="Picture 3" descr="A blue and black text&#10;&#10;Description automatically generated">
+            <a:extLst>
+              <a:ext uri="{FF2B5EF4-FFF2-40B4-BE49-F238E27FC236}">
+                <a16:creationId xmlns:a16="http://schemas.microsoft.com/office/drawing/2014/main" id="{21E8948B-5D6D-C7E7-7F4E-B5FD75624ED2}"/>
+              </a:ext>
+            </a:extLst>
+          </p:cNvPr>
+          <p:cNvPicPr>
+            <a:picLocks noChangeAspect="1" noChangeArrowheads="1"/>
+          </p:cNvPicPr>
+          <p:nvPr/>
+        </p:nvPicPr>
+        <p:blipFill>
+          <a:blip r:embed="rId3">
+            <a:extLst>
+              <a:ext uri="{28A0092B-C50C-407E-A947-70E740481C1C}">
+                <a14:useLocalDpi xmlns:a14="http://schemas.microsoft.com/office/drawing/2010/main" val="0"/>
+              </a:ext>
+            </a:extLst>
+          </a:blip>
+          <a:srcRect/>
+          <a:stretch>
+            <a:fillRect/>
+          </a:stretch>
+        </p:blipFill>
+        <p:spPr bwMode="auto">
+          <a:xfrm>
+            <a:off x="7663190" y="114193"/>
+            <a:ext cx="1279121" cy="303908"/>
+          </a:xfrm>
+          <a:prstGeom prst="rect">
+            <a:avLst/>
+          </a:prstGeom>
+          <a:noFill/>
+          <a:ln>
+            <a:noFill/>
+          </a:ln>
+          <a:extLst>
+            <a:ext uri="{909E8E84-426E-40DD-AFC4-6F175D3DCCD1}">
+              <a14:hiddenFill xmlns:a14="http://schemas.microsoft.com/office/drawing/2010/main">
+                <a:solidFill>
+                  <a:srgbClr val="FFFFFF"/>
+                </a:solidFill>
+              </a14:hiddenFill>
+            </a:ext>
+            <a:ext uri="{91240B29-F687-4F45-9708-019B960494DF}">
+              <a14:hiddenLine xmlns:a14="http://schemas.microsoft.com/office/drawing/2010/main" w="9525">
+                <a:solidFill>
+                  <a:srgbClr val="000000"/>
+                </a:solidFill>
+                <a:miter lim="800000"/>
+                <a:headEnd/>
+                <a:tailEnd/>
+              </a14:hiddenLine>
+            </a:ext>
+          </a:extLst>
+        </p:spPr>
+      </p:pic>
+      <p:grpSp>
+        <p:nvGrpSpPr>
+          <p:cNvPr id="3094" name="Group 107">
+            <a:extLst>
+              <a:ext uri="{FF2B5EF4-FFF2-40B4-BE49-F238E27FC236}">
+                <a16:creationId xmlns:a16="http://schemas.microsoft.com/office/drawing/2014/main" id="{0FE8EFD7-E252-2440-3534-41DB5963789A}"/>
+              </a:ext>
+            </a:extLst>
+          </p:cNvPr>
+          <p:cNvGrpSpPr>
+            <a:grpSpLocks/>
+          </p:cNvGrpSpPr>
+          <p:nvPr/>
+        </p:nvGrpSpPr>
+        <p:grpSpPr bwMode="auto">
+          <a:xfrm>
+            <a:off x="5905217" y="700160"/>
+            <a:ext cx="2590340" cy="273076"/>
+            <a:chOff x="14666028" y="5294535"/>
+            <a:chExt cx="15249167" cy="1607055"/>
+          </a:xfrm>
+        </p:grpSpPr>
+        <p:sp>
+          <p:nvSpPr>
+            <p:cNvPr id="3099" name="Rectangle 249">
+              <a:extLst>
+                <a:ext uri="{FF2B5EF4-FFF2-40B4-BE49-F238E27FC236}">
+                  <a16:creationId xmlns:a16="http://schemas.microsoft.com/office/drawing/2014/main" id="{D094BF40-6C48-EC49-54D5-C84197F01A5D}"/>
+                </a:ext>
+              </a:extLst>
+            </p:cNvPr>
+            <p:cNvSpPr>
+              <a:spLocks noChangeArrowheads="1"/>
+            </p:cNvSpPr>
+            <p:nvPr/>
+          </p:nvSpPr>
+          <p:spPr bwMode="auto">
+            <a:xfrm>
+              <a:off x="14745307" y="5343145"/>
+              <a:ext cx="15169888" cy="1558445"/>
+            </a:xfrm>
+            <a:prstGeom prst="rect">
+              <a:avLst/>
+            </a:prstGeom>
+            <a:noFill/>
+            <a:ln>
+              <a:noFill/>
+            </a:ln>
+            <a:extLst>
+              <a:ext uri="{909E8E84-426E-40DD-AFC4-6F175D3DCCD1}">
+                <a14:hiddenFill xmlns:a14="http://schemas.microsoft.com/office/drawing/2010/main">
+                  <a:solidFill>
+                    <a:srgbClr val="FFFFFF"/>
+                  </a:solidFill>
+                </a14:hiddenFill>
+              </a:ext>
+              <a:ext uri="{91240B29-F687-4F45-9708-019B960494DF}">
+                <a14:hiddenLine xmlns:a14="http://schemas.microsoft.com/office/drawing/2010/main" w="9525">
+                  <a:solidFill>
+                    <a:srgbClr val="000000"/>
+                  </a:solidFill>
+                  <a:miter lim="800000"/>
+                  <a:headEnd/>
+                  <a:tailEnd/>
+                </a14:hiddenLine>
+              </a:ext>
+            </a:extLst>
+          </p:spPr>
+          <p:txBody>
+            <a:bodyPr>
+              <a:spAutoFit/>
+            </a:bodyPr>
+            <a:lstStyle>
+              <a:lvl1pPr>
+                <a:defRPr sz="2300">
+                  <a:solidFill>
+                    <a:schemeClr val="tx1"/>
+                  </a:solidFill>
+                  <a:latin typeface="Arial" panose="020B0604020202020204" pitchFamily="34" charset="0"/>
+                  <a:ea typeface="MS PGothic" panose="020B0600070205080204" pitchFamily="34" charset="-128"/>
+                </a:defRPr>
+              </a:lvl1pPr>
+              <a:lvl2pPr marL="742950" indent="-285750">
+                <a:defRPr sz="2300">
+                  <a:solidFill>
+                    <a:schemeClr val="tx1"/>
+                  </a:solidFill>
+                  <a:latin typeface="Arial" panose="020B0604020202020204" pitchFamily="34" charset="0"/>
+                  <a:ea typeface="MS PGothic" panose="020B0600070205080204" pitchFamily="34" charset="-128"/>
+                </a:defRPr>
+              </a:lvl2pPr>
+              <a:lvl3pPr marL="1143000" indent="-228600">
+                <a:defRPr sz="2300">
+                  <a:solidFill>
+                    <a:schemeClr val="tx1"/>
+                  </a:solidFill>
+                  <a:latin typeface="Arial" panose="020B0604020202020204" pitchFamily="34" charset="0"/>
+                  <a:ea typeface="MS PGothic" panose="020B0600070205080204" pitchFamily="34" charset="-128"/>
+                </a:defRPr>
+              </a:lvl3pPr>
+              <a:lvl4pPr marL="1600200" indent="-228600">
+                <a:defRPr sz="2300">
+                  <a:solidFill>
+                    <a:schemeClr val="tx1"/>
+                  </a:solidFill>
+                  <a:latin typeface="Arial" panose="020B0604020202020204" pitchFamily="34" charset="0"/>
+                  <a:ea typeface="MS PGothic" panose="020B0600070205080204" pitchFamily="34" charset="-128"/>
+                </a:defRPr>
+              </a:lvl4pPr>
+              <a:lvl5pPr marL="2057400" indent="-228600">
+                <a:defRPr sz="2300">
+                  <a:solidFill>
+                    <a:schemeClr val="tx1"/>
+                  </a:solidFill>
+                  <a:latin typeface="Arial" panose="020B0604020202020204" pitchFamily="34" charset="0"/>
+                  <a:ea typeface="MS PGothic" panose="020B0600070205080204" pitchFamily="34" charset="-128"/>
+                </a:defRPr>
+              </a:lvl5pPr>
+              <a:lvl6pPr marL="2514600" indent="-228600" eaLnBrk="0" fontAlgn="base" hangingPunct="0">
+                <a:spcBef>
+                  <a:spcPct val="0"/>
+                </a:spcBef>
+                <a:spcAft>
+                  <a:spcPct val="0"/>
+                </a:spcAft>
+                <a:defRPr sz="2300">
+                  <a:solidFill>
+                    <a:schemeClr val="tx1"/>
+                  </a:solidFill>
+                  <a:latin typeface="Arial" panose="020B0604020202020204" pitchFamily="34" charset="0"/>
+                  <a:ea typeface="MS PGothic" panose="020B0600070205080204" pitchFamily="34" charset="-128"/>
+                </a:defRPr>
+              </a:lvl6pPr>
+              <a:lvl7pPr marL="2971800" indent="-228600" eaLnBrk="0" fontAlgn="base" hangingPunct="0">
+                <a:spcBef>
+                  <a:spcPct val="0"/>
+                </a:spcBef>
+                <a:spcAft>
+                  <a:spcPct val="0"/>
+                </a:spcAft>
+                <a:defRPr sz="2300">
+                  <a:solidFill>
+                    <a:schemeClr val="tx1"/>
+                  </a:solidFill>
+                  <a:latin typeface="Arial" panose="020B0604020202020204" pitchFamily="34" charset="0"/>
+                  <a:ea typeface="MS PGothic" panose="020B0600070205080204" pitchFamily="34" charset="-128"/>
+                </a:defRPr>
+              </a:lvl7pPr>
+              <a:lvl8pPr marL="3429000" indent="-228600" eaLnBrk="0" fontAlgn="base" hangingPunct="0">
+                <a:spcBef>
+                  <a:spcPct val="0"/>
+                </a:spcBef>
+                <a:spcAft>
+                  <a:spcPct val="0"/>
+                </a:spcAft>
+                <a:defRPr sz="2300">
+                  <a:solidFill>
+                    <a:schemeClr val="tx1"/>
+                  </a:solidFill>
+                  <a:latin typeface="Arial" panose="020B0604020202020204" pitchFamily="34" charset="0"/>
+                  <a:ea typeface="MS PGothic" panose="020B0600070205080204" pitchFamily="34" charset="-128"/>
+                </a:defRPr>
+              </a:lvl8pPr>
+              <a:lvl9pPr marL="3886200" indent="-228600" eaLnBrk="0" fontAlgn="base" hangingPunct="0">
+                <a:spcBef>
+                  <a:spcPct val="0"/>
+                </a:spcBef>
+                <a:spcAft>
+                  <a:spcPct val="0"/>
+                </a:spcAft>
+                <a:defRPr sz="2300">
+                  <a:solidFill>
+                    <a:schemeClr val="tx1"/>
+                  </a:solidFill>
+                  <a:latin typeface="Arial" panose="020B0604020202020204" pitchFamily="34" charset="0"/>
+                  <a:ea typeface="MS PGothic" panose="020B0600070205080204" pitchFamily="34" charset="-128"/>
+                </a:defRPr>
+              </a:lvl9pPr>
+            </a:lstStyle>
+            <a:p>
+              <a:endParaRPr lang="en-US" altLang="en-US" sz="1121" dirty="0">
+                <a:solidFill>
+                  <a:srgbClr val="006684"/>
+                </a:solidFill>
+                <a:cs typeface="Arial" panose="020B0604020202020204" pitchFamily="34" charset="0"/>
+              </a:endParaRPr>
+            </a:p>
+          </p:txBody>
+        </p:sp>
+        <p:cxnSp>
+          <p:nvCxnSpPr>
+            <p:cNvPr id="3100" name="Straight Connector 6">
+              <a:extLst>
+                <a:ext uri="{FF2B5EF4-FFF2-40B4-BE49-F238E27FC236}">
+                  <a16:creationId xmlns:a16="http://schemas.microsoft.com/office/drawing/2014/main" id="{6DFC0471-0773-D960-A906-590504129C68}"/>
+                </a:ext>
+              </a:extLst>
+            </p:cNvPr>
+            <p:cNvCxnSpPr>
+              <a:cxnSpLocks noChangeShapeType="1"/>
+            </p:cNvCxnSpPr>
+            <p:nvPr/>
+          </p:nvCxnSpPr>
+          <p:spPr bwMode="auto">
+            <a:xfrm flipV="1">
+              <a:off x="14666028" y="5294535"/>
+              <a:ext cx="12745514" cy="1"/>
+            </a:xfrm>
+            <a:prstGeom prst="line">
+              <a:avLst/>
+            </a:prstGeom>
+            <a:noFill/>
+            <a:ln w="12700">
+              <a:solidFill>
+                <a:srgbClr val="006684"/>
+              </a:solidFill>
+              <a:round/>
+              <a:headEnd/>
+              <a:tailEnd/>
+            </a:ln>
+            <a:extLst>
+              <a:ext uri="{909E8E84-426E-40DD-AFC4-6F175D3DCCD1}">
+                <a14:hiddenFill xmlns:a14="http://schemas.microsoft.com/office/drawing/2010/main">
+                  <a:noFill/>
+                </a14:hiddenFill>
+              </a:ext>
+            </a:extLst>
+          </p:spPr>
+        </p:cxnSp>
+      </p:grpSp>
+      <p:sp>
+        <p:nvSpPr>
+          <p:cNvPr id="14" name="Rectangle 24">
+            <a:extLst>
+              <a:ext uri="{FF2B5EF4-FFF2-40B4-BE49-F238E27FC236}">
+                <a16:creationId xmlns:a16="http://schemas.microsoft.com/office/drawing/2014/main" id="{4C99BCFB-57DE-5D49-980B-1FEC3B96CE1C}"/>
+              </a:ext>
+            </a:extLst>
+          </p:cNvPr>
+          <p:cNvSpPr>
+            <a:spLocks noChangeArrowheads="1"/>
+          </p:cNvSpPr>
+          <p:nvPr/>
+        </p:nvSpPr>
+        <p:spPr bwMode="auto">
+          <a:xfrm>
+            <a:off x="2887199" y="3636873"/>
+            <a:ext cx="2197462" cy="2323713"/>
+          </a:xfrm>
+          <a:prstGeom prst="rect">
+            <a:avLst/>
+          </a:prstGeom>
+          <a:noFill/>
+          <a:ln>
+            <a:noFill/>
+          </a:ln>
+        </p:spPr>
+        <p:txBody>
+          <a:bodyPr>
+            <a:spAutoFit/>
+          </a:bodyPr>
+          <a:lstStyle>
+            <a:lvl1pPr defTabSz="915988">
+              <a:defRPr sz="2300">
+                <a:solidFill>
+                  <a:schemeClr val="tx1"/>
+                </a:solidFill>
+                <a:latin typeface="Arial" panose="020B0604020202020204" pitchFamily="34" charset="0"/>
+                <a:ea typeface="MS PGothic" panose="020B0600070205080204" pitchFamily="34" charset="-128"/>
+              </a:defRPr>
+            </a:lvl1pPr>
+            <a:lvl2pPr marL="742950" indent="-285750" defTabSz="915988">
+              <a:defRPr sz="2300">
+                <a:solidFill>
+                  <a:schemeClr val="tx1"/>
+                </a:solidFill>
+                <a:latin typeface="Arial" panose="020B0604020202020204" pitchFamily="34" charset="0"/>
+                <a:ea typeface="MS PGothic" panose="020B0600070205080204" pitchFamily="34" charset="-128"/>
+              </a:defRPr>
+            </a:lvl2pPr>
+            <a:lvl3pPr marL="1143000" indent="-228600" defTabSz="915988">
+              <a:defRPr sz="2300">
+                <a:solidFill>
+                  <a:schemeClr val="tx1"/>
+                </a:solidFill>
+                <a:latin typeface="Arial" panose="020B0604020202020204" pitchFamily="34" charset="0"/>
+                <a:ea typeface="MS PGothic" panose="020B0600070205080204" pitchFamily="34" charset="-128"/>
+              </a:defRPr>
+            </a:lvl3pPr>
+            <a:lvl4pPr marL="1600200" indent="-228600" defTabSz="915988">
+              <a:defRPr sz="2300">
+                <a:solidFill>
+                  <a:schemeClr val="tx1"/>
+                </a:solidFill>
+                <a:latin typeface="Arial" panose="020B0604020202020204" pitchFamily="34" charset="0"/>
+                <a:ea typeface="MS PGothic" panose="020B0600070205080204" pitchFamily="34" charset="-128"/>
+              </a:defRPr>
+            </a:lvl4pPr>
+            <a:lvl5pPr marL="2057400" indent="-228600" defTabSz="915988">
+              <a:defRPr sz="2300">
+                <a:solidFill>
+                  <a:schemeClr val="tx1"/>
+                </a:solidFill>
+                <a:latin typeface="Arial" panose="020B0604020202020204" pitchFamily="34" charset="0"/>
+                <a:ea typeface="MS PGothic" panose="020B0600070205080204" pitchFamily="34" charset="-128"/>
+              </a:defRPr>
+            </a:lvl5pPr>
+            <a:lvl6pPr marL="2514600" indent="-228600" defTabSz="915988" eaLnBrk="0" fontAlgn="base" hangingPunct="0">
+              <a:spcBef>
+                <a:spcPct val="0"/>
+              </a:spcBef>
+              <a:spcAft>
+                <a:spcPct val="0"/>
+              </a:spcAft>
+              <a:defRPr sz="2300">
+                <a:solidFill>
+                  <a:schemeClr val="tx1"/>
+                </a:solidFill>
+                <a:latin typeface="Arial" panose="020B0604020202020204" pitchFamily="34" charset="0"/>
+                <a:ea typeface="MS PGothic" panose="020B0600070205080204" pitchFamily="34" charset="-128"/>
+              </a:defRPr>
+            </a:lvl6pPr>
+            <a:lvl7pPr marL="2971800" indent="-228600" defTabSz="915988" eaLnBrk="0" fontAlgn="base" hangingPunct="0">
+              <a:spcBef>
+                <a:spcPct val="0"/>
+              </a:spcBef>
+              <a:spcAft>
+                <a:spcPct val="0"/>
+              </a:spcAft>
+              <a:defRPr sz="2300">
+                <a:solidFill>
+                  <a:schemeClr val="tx1"/>
+                </a:solidFill>
+                <a:latin typeface="Arial" panose="020B0604020202020204" pitchFamily="34" charset="0"/>
+                <a:ea typeface="MS PGothic" panose="020B0600070205080204" pitchFamily="34" charset="-128"/>
+              </a:defRPr>
+            </a:lvl7pPr>
+            <a:lvl8pPr marL="3429000" indent="-228600" defTabSz="915988" eaLnBrk="0" fontAlgn="base" hangingPunct="0">
+              <a:spcBef>
+                <a:spcPct val="0"/>
+              </a:spcBef>
+              <a:spcAft>
+                <a:spcPct val="0"/>
+              </a:spcAft>
+              <a:defRPr sz="2300">
+                <a:solidFill>
+                  <a:schemeClr val="tx1"/>
+                </a:solidFill>
+                <a:latin typeface="Arial" panose="020B0604020202020204" pitchFamily="34" charset="0"/>
+                <a:ea typeface="MS PGothic" panose="020B0600070205080204" pitchFamily="34" charset="-128"/>
+              </a:defRPr>
+            </a:lvl8pPr>
+            <a:lvl9pPr marL="3886200" indent="-228600" defTabSz="915988" eaLnBrk="0" fontAlgn="base" hangingPunct="0">
+              <a:spcBef>
+                <a:spcPct val="0"/>
+              </a:spcBef>
+              <a:spcAft>
+                <a:spcPct val="0"/>
+              </a:spcAft>
+              <a:defRPr sz="2300">
+                <a:solidFill>
+                  <a:schemeClr val="tx1"/>
+                </a:solidFill>
+                <a:latin typeface="Arial" panose="020B0604020202020204" pitchFamily="34" charset="0"/>
+                <a:ea typeface="MS PGothic" panose="020B0600070205080204" pitchFamily="34" charset="-128"/>
+              </a:defRPr>
+            </a:lvl9pPr>
+          </a:lstStyle>
+          <a:p>
+            <a:pPr algn="just">
+              <a:lnSpc>
+                <a:spcPts val="850"/>
+              </a:lnSpc>
+              <a:spcBef>
+                <a:spcPts val="306"/>
+              </a:spcBef>
+              <a:defRPr/>
+            </a:pPr>
+            <a:r>
+              <a:rPr lang="en-GB" altLang="en-US" sz="900" dirty="0">
+                <a:latin typeface="Helvetica" panose="020B0604020202020204" pitchFamily="34" charset="0"/>
+              </a:rPr>
+              <a:t>- Final model selected: Model 3 — Multiple Linear Regression</a:t>
+            </a:r>
+          </a:p>
+          <a:p>
+            <a:pPr algn="just">
+              <a:lnSpc>
+                <a:spcPts val="850"/>
+              </a:lnSpc>
+              <a:spcBef>
+                <a:spcPts val="306"/>
+              </a:spcBef>
+              <a:defRPr/>
+            </a:pPr>
+            <a:r>
+              <a:rPr lang="en-GB" altLang="en-US" sz="900" dirty="0">
+                <a:latin typeface="Helvetica" panose="020B0604020202020204" pitchFamily="34" charset="0"/>
+              </a:rPr>
+              <a:t>- Chosen for interpretability over marginal accuracy gain vs Random Forest</a:t>
+            </a:r>
+          </a:p>
+          <a:p>
+            <a:pPr algn="just">
+              <a:lnSpc>
+                <a:spcPts val="850"/>
+              </a:lnSpc>
+              <a:spcBef>
+                <a:spcPts val="306"/>
+              </a:spcBef>
+              <a:defRPr/>
+            </a:pPr>
+            <a:r>
+              <a:rPr lang="en-GB" altLang="en-US" sz="900" dirty="0">
+                <a:latin typeface="Helvetica" panose="020B0604020202020204" pitchFamily="34" charset="0"/>
+              </a:rPr>
+              <a:t>- R² = 0.67, MSE = 30,209,100</a:t>
+            </a:r>
+          </a:p>
+          <a:p>
+            <a:pPr algn="just">
+              <a:lnSpc>
+                <a:spcPts val="850"/>
+              </a:lnSpc>
+              <a:spcBef>
+                <a:spcPts val="306"/>
+              </a:spcBef>
+              <a:defRPr/>
+            </a:pPr>
+            <a:r>
+              <a:rPr lang="en-GB" altLang="en-US" sz="900" dirty="0">
+                <a:latin typeface="Helvetica" panose="020B0604020202020204" pitchFamily="34" charset="0"/>
+              </a:rPr>
+              <a:t>- K-fold MAE: Linear Regression ~2,794 | Random Forest ~2,311</a:t>
+            </a:r>
+          </a:p>
+          <a:p>
+            <a:pPr algn="just">
+              <a:lnSpc>
+                <a:spcPts val="850"/>
+              </a:lnSpc>
+              <a:spcBef>
+                <a:spcPts val="306"/>
+              </a:spcBef>
+              <a:defRPr/>
+            </a:pPr>
+            <a:r>
+              <a:rPr lang="en-GB" altLang="en-US" sz="900" dirty="0">
+                <a:latin typeface="Helvetica" panose="020B0604020202020204" pitchFamily="34" charset="0"/>
+              </a:rPr>
+              <a:t>- Negative R² in cross-validation reflects dataset size limitation</a:t>
+            </a:r>
+          </a:p>
+          <a:p>
+            <a:pPr algn="just">
+              <a:lnSpc>
+                <a:spcPts val="850"/>
+              </a:lnSpc>
+              <a:spcBef>
+                <a:spcPts val="306"/>
+              </a:spcBef>
+              <a:defRPr/>
+            </a:pPr>
+            <a:r>
+              <a:rPr lang="en-GB" altLang="en-US" sz="900" dirty="0">
+                <a:latin typeface="Helvetica" panose="020B0604020202020204" pitchFamily="34" charset="0"/>
+              </a:rPr>
+              <a:t>- Grant paradox: grants decreased while EV sales rose — correlation, not causation</a:t>
+            </a:r>
+          </a:p>
+          <a:p>
+            <a:pPr algn="just">
+              <a:lnSpc>
+                <a:spcPts val="850"/>
+              </a:lnSpc>
+              <a:spcBef>
+                <a:spcPts val="306"/>
+              </a:spcBef>
+              <a:defRPr/>
+            </a:pPr>
+            <a:r>
+              <a:rPr lang="en-GB" altLang="en-US" sz="900" dirty="0">
+                <a:latin typeface="Helvetica" panose="020B0604020202020204" pitchFamily="34" charset="0"/>
+              </a:rPr>
+              <a:t>- Small dataset (10 rows) limits statistical reliability</a:t>
+            </a:r>
+          </a:p>
+          <a:p>
+            <a:pPr algn="just">
+              <a:lnSpc>
+                <a:spcPts val="850"/>
+              </a:lnSpc>
+              <a:spcBef>
+                <a:spcPts val="306"/>
+              </a:spcBef>
+              <a:defRPr/>
+            </a:pPr>
+            <a:r>
+              <a:rPr lang="en-GB" altLang="en-US" sz="900" dirty="0">
+                <a:latin typeface="Helvetica" panose="020B0604020202020204" pitchFamily="34" charset="0"/>
+              </a:rPr>
+              <a:t>- Model captures correlation, not direct causation</a:t>
+            </a:r>
+          </a:p>
+        </p:txBody>
+      </p:sp>
+      <p:sp>
+        <p:nvSpPr>
+          <p:cNvPr id="16" name="Rectangle 24">
+            <a:extLst>
+              <a:ext uri="{FF2B5EF4-FFF2-40B4-BE49-F238E27FC236}">
+                <a16:creationId xmlns:a16="http://schemas.microsoft.com/office/drawing/2014/main" id="{13CBBBBC-D094-D623-0913-8E332EA23D5D}"/>
+              </a:ext>
+            </a:extLst>
+          </p:cNvPr>
+          <p:cNvSpPr>
+            <a:spLocks noChangeArrowheads="1"/>
+          </p:cNvSpPr>
+          <p:nvPr/>
+        </p:nvSpPr>
+        <p:spPr bwMode="auto">
+          <a:xfrm>
+            <a:off x="5737904" y="975808"/>
+            <a:ext cx="2267034" cy="1938992"/>
+          </a:xfrm>
+          <a:prstGeom prst="rect">
+            <a:avLst/>
+          </a:prstGeom>
+          <a:noFill/>
+          <a:ln>
+            <a:noFill/>
+          </a:ln>
+        </p:spPr>
+        <p:txBody>
+          <a:bodyPr>
+            <a:spAutoFit/>
+          </a:bodyPr>
+          <a:lstStyle>
+            <a:lvl1pPr defTabSz="915988">
+              <a:defRPr sz="2300">
+                <a:solidFill>
+                  <a:schemeClr val="tx1"/>
+                </a:solidFill>
+                <a:latin typeface="Arial" panose="020B0604020202020204" pitchFamily="34" charset="0"/>
+                <a:ea typeface="MS PGothic" panose="020B0600070205080204" pitchFamily="34" charset="-128"/>
+              </a:defRPr>
+            </a:lvl1pPr>
+            <a:lvl2pPr marL="742950" indent="-285750" defTabSz="915988">
+              <a:defRPr sz="2300">
+                <a:solidFill>
+                  <a:schemeClr val="tx1"/>
+                </a:solidFill>
+                <a:latin typeface="Arial" panose="020B0604020202020204" pitchFamily="34" charset="0"/>
+                <a:ea typeface="MS PGothic" panose="020B0600070205080204" pitchFamily="34" charset="-128"/>
+              </a:defRPr>
+            </a:lvl2pPr>
+            <a:lvl3pPr marL="1143000" indent="-228600" defTabSz="915988">
+              <a:defRPr sz="2300">
+                <a:solidFill>
+                  <a:schemeClr val="tx1"/>
+                </a:solidFill>
+                <a:latin typeface="Arial" panose="020B0604020202020204" pitchFamily="34" charset="0"/>
+                <a:ea typeface="MS PGothic" panose="020B0600070205080204" pitchFamily="34" charset="-128"/>
+              </a:defRPr>
+            </a:lvl3pPr>
+            <a:lvl4pPr marL="1600200" indent="-228600" defTabSz="915988">
+              <a:defRPr sz="2300">
+                <a:solidFill>
+                  <a:schemeClr val="tx1"/>
+                </a:solidFill>
+                <a:latin typeface="Arial" panose="020B0604020202020204" pitchFamily="34" charset="0"/>
+                <a:ea typeface="MS PGothic" panose="020B0600070205080204" pitchFamily="34" charset="-128"/>
+              </a:defRPr>
+            </a:lvl4pPr>
+            <a:lvl5pPr marL="2057400" indent="-228600" defTabSz="915988">
+              <a:defRPr sz="2300">
+                <a:solidFill>
+                  <a:schemeClr val="tx1"/>
+                </a:solidFill>
+                <a:latin typeface="Arial" panose="020B0604020202020204" pitchFamily="34" charset="0"/>
+                <a:ea typeface="MS PGothic" panose="020B0600070205080204" pitchFamily="34" charset="-128"/>
+              </a:defRPr>
+            </a:lvl5pPr>
+            <a:lvl6pPr marL="2514600" indent="-228600" defTabSz="915988" eaLnBrk="0" fontAlgn="base" hangingPunct="0">
+              <a:spcBef>
+                <a:spcPct val="0"/>
+              </a:spcBef>
+              <a:spcAft>
+                <a:spcPct val="0"/>
+              </a:spcAft>
+              <a:defRPr sz="2300">
+                <a:solidFill>
+                  <a:schemeClr val="tx1"/>
+                </a:solidFill>
+                <a:latin typeface="Arial" panose="020B0604020202020204" pitchFamily="34" charset="0"/>
+                <a:ea typeface="MS PGothic" panose="020B0600070205080204" pitchFamily="34" charset="-128"/>
+              </a:defRPr>
+            </a:lvl6pPr>
+            <a:lvl7pPr marL="2971800" indent="-228600" defTabSz="915988" eaLnBrk="0" fontAlgn="base" hangingPunct="0">
+              <a:spcBef>
+                <a:spcPct val="0"/>
+              </a:spcBef>
+              <a:spcAft>
+                <a:spcPct val="0"/>
+              </a:spcAft>
+              <a:defRPr sz="2300">
+                <a:solidFill>
+                  <a:schemeClr val="tx1"/>
+                </a:solidFill>
+                <a:latin typeface="Arial" panose="020B0604020202020204" pitchFamily="34" charset="0"/>
+                <a:ea typeface="MS PGothic" panose="020B0600070205080204" pitchFamily="34" charset="-128"/>
+              </a:defRPr>
+            </a:lvl7pPr>
+            <a:lvl8pPr marL="3429000" indent="-228600" defTabSz="915988" eaLnBrk="0" fontAlgn="base" hangingPunct="0">
+              <a:spcBef>
+                <a:spcPct val="0"/>
+              </a:spcBef>
+              <a:spcAft>
+                <a:spcPct val="0"/>
+              </a:spcAft>
+              <a:defRPr sz="2300">
+                <a:solidFill>
+                  <a:schemeClr val="tx1"/>
+                </a:solidFill>
+                <a:latin typeface="Arial" panose="020B0604020202020204" pitchFamily="34" charset="0"/>
+                <a:ea typeface="MS PGothic" panose="020B0600070205080204" pitchFamily="34" charset="-128"/>
+              </a:defRPr>
+            </a:lvl8pPr>
+            <a:lvl9pPr marL="3886200" indent="-228600" defTabSz="915988" eaLnBrk="0" fontAlgn="base" hangingPunct="0">
+              <a:spcBef>
+                <a:spcPct val="0"/>
+              </a:spcBef>
+              <a:spcAft>
+                <a:spcPct val="0"/>
+              </a:spcAft>
+              <a:defRPr sz="2300">
+                <a:solidFill>
+                  <a:schemeClr val="tx1"/>
+                </a:solidFill>
+                <a:latin typeface="Arial" panose="020B0604020202020204" pitchFamily="34" charset="0"/>
+                <a:ea typeface="MS PGothic" panose="020B0600070205080204" pitchFamily="34" charset="-128"/>
+              </a:defRPr>
+            </a:lvl9pPr>
+          </a:lstStyle>
+          <a:p>
+            <a:pPr algn="just">
+              <a:lnSpc>
+                <a:spcPts val="850"/>
+              </a:lnSpc>
+              <a:spcBef>
+                <a:spcPts val="306"/>
+              </a:spcBef>
+              <a:defRPr/>
+            </a:pPr>
+            <a:r>
+              <a:rPr lang="en-GB" altLang="en-US" sz="900" dirty="0">
+                <a:latin typeface="Helvetica" panose="020B0604020202020204" pitchFamily="34" charset="0"/>
+              </a:rPr>
+              <a:t> - Scenario simulation prototype built in </a:t>
+            </a:r>
+            <a:r>
+              <a:rPr lang="en-GB" altLang="en-US" sz="900" dirty="0" err="1">
+                <a:latin typeface="Helvetica" panose="020B0604020202020204" pitchFamily="34" charset="0"/>
+              </a:rPr>
+              <a:t>Jupyter</a:t>
+            </a:r>
+            <a:r>
+              <a:rPr lang="en-GB" altLang="en-US" sz="900" dirty="0">
+                <a:latin typeface="Helvetica" panose="020B0604020202020204" pitchFamily="34" charset="0"/>
+              </a:rPr>
+              <a:t> Notebook</a:t>
+            </a:r>
+          </a:p>
+          <a:p>
+            <a:pPr algn="just">
+              <a:lnSpc>
+                <a:spcPts val="850"/>
+              </a:lnSpc>
+              <a:spcBef>
+                <a:spcPts val="306"/>
+              </a:spcBef>
+              <a:defRPr/>
+            </a:pPr>
+            <a:r>
+              <a:rPr lang="en-GB" altLang="en-US" sz="900" dirty="0">
+                <a:latin typeface="Helvetica" panose="020B0604020202020204" pitchFamily="34" charset="0"/>
+              </a:rPr>
+              <a:t>- User inputs: </a:t>
+            </a:r>
+            <a:r>
+              <a:rPr lang="en-GB" altLang="en-US" sz="900" dirty="0" err="1">
+                <a:latin typeface="Helvetica" panose="020B0604020202020204" pitchFamily="34" charset="0"/>
+              </a:rPr>
+              <a:t>fuel_price</a:t>
+            </a:r>
+            <a:r>
+              <a:rPr lang="en-GB" altLang="en-US" sz="900" dirty="0">
+                <a:latin typeface="Helvetica" panose="020B0604020202020204" pitchFamily="34" charset="0"/>
+              </a:rPr>
+              <a:t>, year, </a:t>
+            </a:r>
+            <a:r>
+              <a:rPr lang="en-GB" altLang="en-US" sz="900" dirty="0" err="1">
+                <a:latin typeface="Helvetica" panose="020B0604020202020204" pitchFamily="34" charset="0"/>
+              </a:rPr>
+              <a:t>grant_value</a:t>
+            </a:r>
+            <a:endParaRPr lang="en-GB" altLang="en-US" sz="900" dirty="0">
+              <a:latin typeface="Helvetica" panose="020B0604020202020204" pitchFamily="34" charset="0"/>
+            </a:endParaRPr>
+          </a:p>
+          <a:p>
+            <a:pPr algn="just">
+              <a:lnSpc>
+                <a:spcPts val="850"/>
+              </a:lnSpc>
+              <a:spcBef>
+                <a:spcPts val="306"/>
+              </a:spcBef>
+              <a:defRPr/>
+            </a:pPr>
+            <a:r>
+              <a:rPr lang="en-GB" altLang="en-US" sz="900" dirty="0">
+                <a:latin typeface="Helvetica" panose="020B0604020202020204" pitchFamily="34" charset="0"/>
+              </a:rPr>
+              <a:t>- Output: predicted annual BEV sales in Ireland</a:t>
+            </a:r>
+          </a:p>
+          <a:p>
+            <a:pPr algn="just">
+              <a:lnSpc>
+                <a:spcPts val="850"/>
+              </a:lnSpc>
+              <a:spcBef>
+                <a:spcPts val="306"/>
+              </a:spcBef>
+              <a:defRPr/>
+            </a:pPr>
+            <a:r>
+              <a:rPr lang="en-GB" altLang="en-US" sz="900" dirty="0">
+                <a:latin typeface="Helvetica" panose="020B0604020202020204" pitchFamily="34" charset="0"/>
+              </a:rPr>
+              <a:t>- Baseline 2025 prediction: ~19,085 EVs (fuel €1.80, grant €3,500)</a:t>
+            </a:r>
+          </a:p>
+          <a:p>
+            <a:pPr algn="just">
+              <a:lnSpc>
+                <a:spcPts val="850"/>
+              </a:lnSpc>
+              <a:spcBef>
+                <a:spcPts val="306"/>
+              </a:spcBef>
+              <a:defRPr/>
+            </a:pPr>
+            <a:r>
+              <a:rPr lang="en-GB" altLang="en-US" sz="900" dirty="0">
+                <a:latin typeface="Helvetica" panose="020B0604020202020204" pitchFamily="34" charset="0"/>
+              </a:rPr>
+              <a:t>- Higher fuel price (€2.00) → predicted ~22,824 </a:t>
+            </a:r>
+            <a:r>
+              <a:rPr lang="en-GB" altLang="en-US" sz="900" dirty="0" err="1">
+                <a:latin typeface="Helvetica" panose="020B0604020202020204" pitchFamily="34" charset="0"/>
+              </a:rPr>
+              <a:t>Evs</a:t>
+            </a:r>
+            <a:endParaRPr lang="en-GB" altLang="en-US" sz="900" dirty="0">
+              <a:latin typeface="Helvetica" panose="020B0604020202020204" pitchFamily="34" charset="0"/>
+            </a:endParaRPr>
+          </a:p>
+          <a:p>
+            <a:pPr algn="just">
+              <a:lnSpc>
+                <a:spcPts val="850"/>
+              </a:lnSpc>
+              <a:spcBef>
+                <a:spcPts val="306"/>
+              </a:spcBef>
+              <a:defRPr/>
+            </a:pPr>
+            <a:r>
+              <a:rPr lang="en-GB" altLang="en-US" sz="900" dirty="0">
+                <a:latin typeface="Helvetica" panose="020B0604020202020204" pitchFamily="34" charset="0"/>
+              </a:rPr>
+              <a:t>- Lower fuel price (€1.60) → predicted ~15,346 </a:t>
+            </a:r>
+            <a:r>
+              <a:rPr lang="en-GB" altLang="en-US" sz="900" dirty="0" err="1">
+                <a:latin typeface="Helvetica" panose="020B0604020202020204" pitchFamily="34" charset="0"/>
+              </a:rPr>
+              <a:t>Evs</a:t>
+            </a:r>
+            <a:endParaRPr lang="en-GB" altLang="en-US" sz="900" dirty="0">
+              <a:latin typeface="Helvetica" panose="020B0604020202020204" pitchFamily="34" charset="0"/>
+            </a:endParaRPr>
+          </a:p>
+          <a:p>
+            <a:pPr algn="just">
+              <a:lnSpc>
+                <a:spcPts val="850"/>
+              </a:lnSpc>
+              <a:spcBef>
+                <a:spcPts val="306"/>
+              </a:spcBef>
+              <a:defRPr/>
+            </a:pPr>
+            <a:r>
+              <a:rPr lang="en-GB" altLang="en-US" sz="900" dirty="0">
+                <a:latin typeface="Helvetica" panose="020B0604020202020204" pitchFamily="34" charset="0"/>
+              </a:rPr>
+              <a:t>- Future potential: </a:t>
+            </a:r>
+            <a:r>
+              <a:rPr lang="en-GB" altLang="en-US" sz="900" dirty="0" err="1">
+                <a:latin typeface="Helvetica" panose="020B0604020202020204" pitchFamily="34" charset="0"/>
+              </a:rPr>
+              <a:t>Streamlit</a:t>
+            </a:r>
+            <a:r>
+              <a:rPr lang="en-GB" altLang="en-US" sz="900" dirty="0">
+                <a:latin typeface="Helvetica" panose="020B0604020202020204" pitchFamily="34" charset="0"/>
+              </a:rPr>
+              <a:t> dashboard, annual data updates, additional features</a:t>
+            </a:r>
+          </a:p>
+        </p:txBody>
+      </p:sp>
+      <p:grpSp>
+        <p:nvGrpSpPr>
+          <p:cNvPr id="4" name="Group 107">
+            <a:extLst>
+              <a:ext uri="{FF2B5EF4-FFF2-40B4-BE49-F238E27FC236}">
+                <a16:creationId xmlns:a16="http://schemas.microsoft.com/office/drawing/2014/main" id="{40905DDF-A1EF-5066-9CD5-6C4564E670E1}"/>
+              </a:ext>
+            </a:extLst>
+          </p:cNvPr>
+          <p:cNvGrpSpPr>
+            <a:grpSpLocks/>
+          </p:cNvGrpSpPr>
+          <p:nvPr/>
+        </p:nvGrpSpPr>
+        <p:grpSpPr bwMode="auto">
+          <a:xfrm>
+            <a:off x="159959" y="714051"/>
+            <a:ext cx="2188832" cy="277962"/>
+            <a:chOff x="14894284" y="5114968"/>
+            <a:chExt cx="12887106" cy="1636253"/>
+          </a:xfrm>
+        </p:grpSpPr>
+        <p:sp>
+          <p:nvSpPr>
+            <p:cNvPr id="5" name="Rectangle 249">
+              <a:extLst>
+                <a:ext uri="{FF2B5EF4-FFF2-40B4-BE49-F238E27FC236}">
+                  <a16:creationId xmlns:a16="http://schemas.microsoft.com/office/drawing/2014/main" id="{E53F519E-637F-CF94-ABBB-E2A43C7FD0DD}"/>
+                </a:ext>
+              </a:extLst>
+            </p:cNvPr>
+            <p:cNvSpPr>
+              <a:spLocks noChangeArrowheads="1"/>
+            </p:cNvSpPr>
+            <p:nvPr/>
+          </p:nvSpPr>
+          <p:spPr bwMode="auto">
+            <a:xfrm>
+              <a:off x="14894284" y="5192353"/>
+              <a:ext cx="12887106" cy="1558868"/>
+            </a:xfrm>
+            <a:prstGeom prst="rect">
+              <a:avLst/>
+            </a:prstGeom>
+            <a:noFill/>
+            <a:ln>
+              <a:noFill/>
+            </a:ln>
+            <a:extLst>
+              <a:ext uri="{909E8E84-426E-40DD-AFC4-6F175D3DCCD1}">
+                <a14:hiddenFill xmlns:a14="http://schemas.microsoft.com/office/drawing/2010/main">
+                  <a:solidFill>
+                    <a:srgbClr val="FFFFFF"/>
+                  </a:solidFill>
+                </a14:hiddenFill>
+              </a:ext>
+              <a:ext uri="{91240B29-F687-4F45-9708-019B960494DF}">
+                <a14:hiddenLine xmlns:a14="http://schemas.microsoft.com/office/drawing/2010/main" w="9525">
+                  <a:solidFill>
+                    <a:srgbClr val="000000"/>
+                  </a:solidFill>
+                  <a:miter lim="800000"/>
+                  <a:headEnd/>
+                  <a:tailEnd/>
+                </a14:hiddenLine>
+              </a:ext>
+            </a:extLst>
+          </p:spPr>
+          <p:txBody>
+            <a:bodyPr>
+              <a:spAutoFit/>
+            </a:bodyPr>
+            <a:lstStyle>
+              <a:lvl1pPr>
+                <a:defRPr sz="2300">
+                  <a:solidFill>
+                    <a:schemeClr val="tx1"/>
+                  </a:solidFill>
+                  <a:latin typeface="Arial" panose="020B0604020202020204" pitchFamily="34" charset="0"/>
+                  <a:ea typeface="MS PGothic" panose="020B0600070205080204" pitchFamily="34" charset="-128"/>
+                </a:defRPr>
+              </a:lvl1pPr>
+              <a:lvl2pPr marL="742950" indent="-285750">
+                <a:defRPr sz="2300">
+                  <a:solidFill>
+                    <a:schemeClr val="tx1"/>
+                  </a:solidFill>
+                  <a:latin typeface="Arial" panose="020B0604020202020204" pitchFamily="34" charset="0"/>
+                  <a:ea typeface="MS PGothic" panose="020B0600070205080204" pitchFamily="34" charset="-128"/>
+                </a:defRPr>
+              </a:lvl2pPr>
+              <a:lvl3pPr marL="1143000" indent="-228600">
+                <a:defRPr sz="2300">
+                  <a:solidFill>
+                    <a:schemeClr val="tx1"/>
+                  </a:solidFill>
+                  <a:latin typeface="Arial" panose="020B0604020202020204" pitchFamily="34" charset="0"/>
+                  <a:ea typeface="MS PGothic" panose="020B0600070205080204" pitchFamily="34" charset="-128"/>
+                </a:defRPr>
+              </a:lvl3pPr>
+              <a:lvl4pPr marL="1600200" indent="-228600">
+                <a:defRPr sz="2300">
+                  <a:solidFill>
+                    <a:schemeClr val="tx1"/>
+                  </a:solidFill>
+                  <a:latin typeface="Arial" panose="020B0604020202020204" pitchFamily="34" charset="0"/>
+                  <a:ea typeface="MS PGothic" panose="020B0600070205080204" pitchFamily="34" charset="-128"/>
+                </a:defRPr>
+              </a:lvl4pPr>
+              <a:lvl5pPr marL="2057400" indent="-228600">
+                <a:defRPr sz="2300">
+                  <a:solidFill>
+                    <a:schemeClr val="tx1"/>
+                  </a:solidFill>
+                  <a:latin typeface="Arial" panose="020B0604020202020204" pitchFamily="34" charset="0"/>
+                  <a:ea typeface="MS PGothic" panose="020B0600070205080204" pitchFamily="34" charset="-128"/>
+                </a:defRPr>
+              </a:lvl5pPr>
+              <a:lvl6pPr marL="2514600" indent="-228600" eaLnBrk="0" fontAlgn="base" hangingPunct="0">
+                <a:spcBef>
+                  <a:spcPct val="0"/>
+                </a:spcBef>
+                <a:spcAft>
+                  <a:spcPct val="0"/>
+                </a:spcAft>
+                <a:defRPr sz="2300">
+                  <a:solidFill>
+                    <a:schemeClr val="tx1"/>
+                  </a:solidFill>
+                  <a:latin typeface="Arial" panose="020B0604020202020204" pitchFamily="34" charset="0"/>
+                  <a:ea typeface="MS PGothic" panose="020B0600070205080204" pitchFamily="34" charset="-128"/>
+                </a:defRPr>
+              </a:lvl6pPr>
+              <a:lvl7pPr marL="2971800" indent="-228600" eaLnBrk="0" fontAlgn="base" hangingPunct="0">
+                <a:spcBef>
+                  <a:spcPct val="0"/>
+                </a:spcBef>
+                <a:spcAft>
+                  <a:spcPct val="0"/>
+                </a:spcAft>
+                <a:defRPr sz="2300">
+                  <a:solidFill>
+                    <a:schemeClr val="tx1"/>
+                  </a:solidFill>
+                  <a:latin typeface="Arial" panose="020B0604020202020204" pitchFamily="34" charset="0"/>
+                  <a:ea typeface="MS PGothic" panose="020B0600070205080204" pitchFamily="34" charset="-128"/>
+                </a:defRPr>
+              </a:lvl7pPr>
+              <a:lvl8pPr marL="3429000" indent="-228600" eaLnBrk="0" fontAlgn="base" hangingPunct="0">
+                <a:spcBef>
+                  <a:spcPct val="0"/>
+                </a:spcBef>
+                <a:spcAft>
+                  <a:spcPct val="0"/>
+                </a:spcAft>
+                <a:defRPr sz="2300">
+                  <a:solidFill>
+                    <a:schemeClr val="tx1"/>
+                  </a:solidFill>
+                  <a:latin typeface="Arial" panose="020B0604020202020204" pitchFamily="34" charset="0"/>
+                  <a:ea typeface="MS PGothic" panose="020B0600070205080204" pitchFamily="34" charset="-128"/>
+                </a:defRPr>
+              </a:lvl8pPr>
+              <a:lvl9pPr marL="3886200" indent="-228600" eaLnBrk="0" fontAlgn="base" hangingPunct="0">
+                <a:spcBef>
+                  <a:spcPct val="0"/>
+                </a:spcBef>
+                <a:spcAft>
+                  <a:spcPct val="0"/>
+                </a:spcAft>
+                <a:defRPr sz="2300">
+                  <a:solidFill>
+                    <a:schemeClr val="tx1"/>
+                  </a:solidFill>
+                  <a:latin typeface="Arial" panose="020B0604020202020204" pitchFamily="34" charset="0"/>
+                  <a:ea typeface="MS PGothic" panose="020B0600070205080204" pitchFamily="34" charset="-128"/>
+                </a:defRPr>
+              </a:lvl9pPr>
+            </a:lstStyle>
+            <a:p>
+              <a:r>
+                <a:rPr lang="en-GB" altLang="en-US" sz="1121" b="1" dirty="0">
+                  <a:solidFill>
+                    <a:srgbClr val="006684"/>
+                  </a:solidFill>
+                  <a:cs typeface="Arial" panose="020B0604020202020204" pitchFamily="34" charset="0"/>
+                </a:rPr>
+                <a:t> Business Understanding</a:t>
+              </a:r>
+              <a:endParaRPr lang="en-US" altLang="en-US" sz="1121" dirty="0">
+                <a:solidFill>
+                  <a:srgbClr val="006684"/>
+                </a:solidFill>
+                <a:cs typeface="Arial" panose="020B0604020202020204" pitchFamily="34" charset="0"/>
+              </a:endParaRPr>
+            </a:p>
+          </p:txBody>
+        </p:sp>
+        <p:cxnSp>
+          <p:nvCxnSpPr>
+            <p:cNvPr id="6" name="Straight Connector 6">
+              <a:extLst>
+                <a:ext uri="{FF2B5EF4-FFF2-40B4-BE49-F238E27FC236}">
+                  <a16:creationId xmlns:a16="http://schemas.microsoft.com/office/drawing/2014/main" id="{645FDF8A-DF11-68E8-B849-8A4A8B12A193}"/>
+                </a:ext>
+              </a:extLst>
+            </p:cNvPr>
+            <p:cNvCxnSpPr>
+              <a:cxnSpLocks noChangeShapeType="1"/>
+            </p:cNvCxnSpPr>
+            <p:nvPr/>
+          </p:nvCxnSpPr>
+          <p:spPr bwMode="auto">
+            <a:xfrm flipV="1">
+              <a:off x="15035876" y="5114968"/>
+              <a:ext cx="12745514" cy="1"/>
+            </a:xfrm>
+            <a:prstGeom prst="line">
+              <a:avLst/>
+            </a:prstGeom>
+            <a:noFill/>
+            <a:ln w="12700">
+              <a:solidFill>
+                <a:srgbClr val="006684"/>
+              </a:solidFill>
+              <a:round/>
+              <a:headEnd/>
+              <a:tailEnd/>
+            </a:ln>
+            <a:extLst>
+              <a:ext uri="{909E8E84-426E-40DD-AFC4-6F175D3DCCD1}">
+                <a14:hiddenFill xmlns:a14="http://schemas.microsoft.com/office/drawing/2010/main">
+                  <a:noFill/>
+                </a14:hiddenFill>
+              </a:ext>
+            </a:extLst>
+          </p:spPr>
+        </p:cxnSp>
+      </p:grpSp>
+      <p:grpSp>
+        <p:nvGrpSpPr>
+          <p:cNvPr id="7" name="Group 107">
+            <a:extLst>
+              <a:ext uri="{FF2B5EF4-FFF2-40B4-BE49-F238E27FC236}">
+                <a16:creationId xmlns:a16="http://schemas.microsoft.com/office/drawing/2014/main" id="{FD3CCAE4-A0DD-6443-8A26-81B373FCDC08}"/>
+              </a:ext>
+            </a:extLst>
+          </p:cNvPr>
+          <p:cNvGrpSpPr>
+            <a:grpSpLocks/>
+          </p:cNvGrpSpPr>
+          <p:nvPr/>
+        </p:nvGrpSpPr>
+        <p:grpSpPr bwMode="auto">
+          <a:xfrm>
+            <a:off x="5905217" y="3065024"/>
+            <a:ext cx="2397534" cy="297871"/>
+            <a:chOff x="15019206" y="5195636"/>
+            <a:chExt cx="12957512" cy="697905"/>
+          </a:xfrm>
+        </p:grpSpPr>
+        <p:sp>
+          <p:nvSpPr>
+            <p:cNvPr id="8" name="Rectangle 249">
+              <a:extLst>
+                <a:ext uri="{FF2B5EF4-FFF2-40B4-BE49-F238E27FC236}">
+                  <a16:creationId xmlns:a16="http://schemas.microsoft.com/office/drawing/2014/main" id="{6E67E608-3FC2-C24E-4E3E-F910E3458CC7}"/>
+                </a:ext>
+              </a:extLst>
+            </p:cNvPr>
+            <p:cNvSpPr>
+              <a:spLocks noChangeArrowheads="1"/>
+            </p:cNvSpPr>
+            <p:nvPr/>
+          </p:nvSpPr>
+          <p:spPr bwMode="auto">
+            <a:xfrm>
+              <a:off x="15089613" y="5273083"/>
+              <a:ext cx="12887105" cy="620458"/>
+            </a:xfrm>
+            <a:prstGeom prst="rect">
+              <a:avLst/>
+            </a:prstGeom>
+            <a:noFill/>
+            <a:ln>
+              <a:noFill/>
+            </a:ln>
+            <a:extLst>
+              <a:ext uri="{909E8E84-426E-40DD-AFC4-6F175D3DCCD1}">
+                <a14:hiddenFill xmlns:a14="http://schemas.microsoft.com/office/drawing/2010/main">
+                  <a:solidFill>
+                    <a:srgbClr val="FFFFFF"/>
+                  </a:solidFill>
+                </a14:hiddenFill>
+              </a:ext>
+              <a:ext uri="{91240B29-F687-4F45-9708-019B960494DF}">
+                <a14:hiddenLine xmlns:a14="http://schemas.microsoft.com/office/drawing/2010/main" w="9525">
+                  <a:solidFill>
+                    <a:srgbClr val="000000"/>
+                  </a:solidFill>
+                  <a:miter lim="800000"/>
+                  <a:headEnd/>
+                  <a:tailEnd/>
+                </a14:hiddenLine>
+              </a:ext>
+            </a:extLst>
+          </p:spPr>
+          <p:txBody>
+            <a:bodyPr>
+              <a:spAutoFit/>
+            </a:bodyPr>
+            <a:lstStyle>
+              <a:lvl1pPr>
+                <a:defRPr sz="2300">
+                  <a:solidFill>
+                    <a:schemeClr val="tx1"/>
+                  </a:solidFill>
+                  <a:latin typeface="Arial" panose="020B0604020202020204" pitchFamily="34" charset="0"/>
+                  <a:ea typeface="MS PGothic" panose="020B0600070205080204" pitchFamily="34" charset="-128"/>
+                </a:defRPr>
+              </a:lvl1pPr>
+              <a:lvl2pPr marL="742950" indent="-285750">
+                <a:defRPr sz="2300">
+                  <a:solidFill>
+                    <a:schemeClr val="tx1"/>
+                  </a:solidFill>
+                  <a:latin typeface="Arial" panose="020B0604020202020204" pitchFamily="34" charset="0"/>
+                  <a:ea typeface="MS PGothic" panose="020B0600070205080204" pitchFamily="34" charset="-128"/>
+                </a:defRPr>
+              </a:lvl2pPr>
+              <a:lvl3pPr marL="1143000" indent="-228600">
+                <a:defRPr sz="2300">
+                  <a:solidFill>
+                    <a:schemeClr val="tx1"/>
+                  </a:solidFill>
+                  <a:latin typeface="Arial" panose="020B0604020202020204" pitchFamily="34" charset="0"/>
+                  <a:ea typeface="MS PGothic" panose="020B0600070205080204" pitchFamily="34" charset="-128"/>
+                </a:defRPr>
+              </a:lvl3pPr>
+              <a:lvl4pPr marL="1600200" indent="-228600">
+                <a:defRPr sz="2300">
+                  <a:solidFill>
+                    <a:schemeClr val="tx1"/>
+                  </a:solidFill>
+                  <a:latin typeface="Arial" panose="020B0604020202020204" pitchFamily="34" charset="0"/>
+                  <a:ea typeface="MS PGothic" panose="020B0600070205080204" pitchFamily="34" charset="-128"/>
+                </a:defRPr>
+              </a:lvl4pPr>
+              <a:lvl5pPr marL="2057400" indent="-228600">
+                <a:defRPr sz="2300">
+                  <a:solidFill>
+                    <a:schemeClr val="tx1"/>
+                  </a:solidFill>
+                  <a:latin typeface="Arial" panose="020B0604020202020204" pitchFamily="34" charset="0"/>
+                  <a:ea typeface="MS PGothic" panose="020B0600070205080204" pitchFamily="34" charset="-128"/>
+                </a:defRPr>
+              </a:lvl5pPr>
+              <a:lvl6pPr marL="2514600" indent="-228600" eaLnBrk="0" fontAlgn="base" hangingPunct="0">
+                <a:spcBef>
+                  <a:spcPct val="0"/>
+                </a:spcBef>
+                <a:spcAft>
+                  <a:spcPct val="0"/>
+                </a:spcAft>
+                <a:defRPr sz="2300">
+                  <a:solidFill>
+                    <a:schemeClr val="tx1"/>
+                  </a:solidFill>
+                  <a:latin typeface="Arial" panose="020B0604020202020204" pitchFamily="34" charset="0"/>
+                  <a:ea typeface="MS PGothic" panose="020B0600070205080204" pitchFamily="34" charset="-128"/>
+                </a:defRPr>
+              </a:lvl6pPr>
+              <a:lvl7pPr marL="2971800" indent="-228600" eaLnBrk="0" fontAlgn="base" hangingPunct="0">
+                <a:spcBef>
+                  <a:spcPct val="0"/>
+                </a:spcBef>
+                <a:spcAft>
+                  <a:spcPct val="0"/>
+                </a:spcAft>
+                <a:defRPr sz="2300">
+                  <a:solidFill>
+                    <a:schemeClr val="tx1"/>
+                  </a:solidFill>
+                  <a:latin typeface="Arial" panose="020B0604020202020204" pitchFamily="34" charset="0"/>
+                  <a:ea typeface="MS PGothic" panose="020B0600070205080204" pitchFamily="34" charset="-128"/>
+                </a:defRPr>
+              </a:lvl7pPr>
+              <a:lvl8pPr marL="3429000" indent="-228600" eaLnBrk="0" fontAlgn="base" hangingPunct="0">
+                <a:spcBef>
+                  <a:spcPct val="0"/>
+                </a:spcBef>
+                <a:spcAft>
+                  <a:spcPct val="0"/>
+                </a:spcAft>
+                <a:defRPr sz="2300">
+                  <a:solidFill>
+                    <a:schemeClr val="tx1"/>
+                  </a:solidFill>
+                  <a:latin typeface="Arial" panose="020B0604020202020204" pitchFamily="34" charset="0"/>
+                  <a:ea typeface="MS PGothic" panose="020B0600070205080204" pitchFamily="34" charset="-128"/>
+                </a:defRPr>
+              </a:lvl8pPr>
+              <a:lvl9pPr marL="3886200" indent="-228600" eaLnBrk="0" fontAlgn="base" hangingPunct="0">
+                <a:spcBef>
+                  <a:spcPct val="0"/>
+                </a:spcBef>
+                <a:spcAft>
+                  <a:spcPct val="0"/>
+                </a:spcAft>
+                <a:defRPr sz="2300">
+                  <a:solidFill>
+                    <a:schemeClr val="tx1"/>
+                  </a:solidFill>
+                  <a:latin typeface="Arial" panose="020B0604020202020204" pitchFamily="34" charset="0"/>
+                  <a:ea typeface="MS PGothic" panose="020B0600070205080204" pitchFamily="34" charset="-128"/>
+                </a:defRPr>
+              </a:lvl9pPr>
+            </a:lstStyle>
+            <a:p>
+              <a:r>
+                <a:rPr lang="en-GB" altLang="en-US" sz="1121" b="1" dirty="0">
+                  <a:solidFill>
+                    <a:srgbClr val="006684"/>
+                  </a:solidFill>
+                  <a:cs typeface="Arial" panose="020B0604020202020204" pitchFamily="34" charset="0"/>
+                </a:rPr>
+                <a:t>Conclusion</a:t>
+              </a:r>
+              <a:endParaRPr lang="en-US" altLang="en-US" sz="1121" dirty="0">
+                <a:solidFill>
+                  <a:srgbClr val="006684"/>
+                </a:solidFill>
+                <a:cs typeface="Arial" panose="020B0604020202020204" pitchFamily="34" charset="0"/>
+              </a:endParaRPr>
+            </a:p>
+          </p:txBody>
+        </p:sp>
+        <p:cxnSp>
+          <p:nvCxnSpPr>
+            <p:cNvPr id="9" name="Straight Connector 6">
+              <a:extLst>
+                <a:ext uri="{FF2B5EF4-FFF2-40B4-BE49-F238E27FC236}">
+                  <a16:creationId xmlns:a16="http://schemas.microsoft.com/office/drawing/2014/main" id="{76F7519E-BDEA-56AF-8243-6AD50C7F632B}"/>
+                </a:ext>
+              </a:extLst>
+            </p:cNvPr>
+            <p:cNvCxnSpPr>
+              <a:cxnSpLocks noChangeShapeType="1"/>
+            </p:cNvCxnSpPr>
+            <p:nvPr/>
+          </p:nvCxnSpPr>
+          <p:spPr bwMode="auto">
+            <a:xfrm flipV="1">
+              <a:off x="15019206" y="5195636"/>
+              <a:ext cx="12745514" cy="1"/>
+            </a:xfrm>
+            <a:prstGeom prst="line">
+              <a:avLst/>
+            </a:prstGeom>
+            <a:noFill/>
+            <a:ln w="12700">
+              <a:solidFill>
+                <a:srgbClr val="006684"/>
+              </a:solidFill>
+              <a:round/>
+              <a:headEnd/>
+              <a:tailEnd/>
+            </a:ln>
+            <a:extLst>
+              <a:ext uri="{909E8E84-426E-40DD-AFC4-6F175D3DCCD1}">
+                <a14:hiddenFill xmlns:a14="http://schemas.microsoft.com/office/drawing/2010/main">
+                  <a:noFill/>
+                </a14:hiddenFill>
+              </a:ext>
+            </a:extLst>
+          </p:spPr>
+        </p:cxnSp>
+      </p:grpSp>
+      <p:sp>
+        <p:nvSpPr>
+          <p:cNvPr id="10" name="Rectangle 24">
+            <a:extLst>
+              <a:ext uri="{FF2B5EF4-FFF2-40B4-BE49-F238E27FC236}">
+                <a16:creationId xmlns:a16="http://schemas.microsoft.com/office/drawing/2014/main" id="{743C69A6-E1DC-30B0-7047-0EB7DC4BEDE2}"/>
+              </a:ext>
+            </a:extLst>
+          </p:cNvPr>
+          <p:cNvSpPr>
+            <a:spLocks noChangeArrowheads="1"/>
+          </p:cNvSpPr>
+          <p:nvPr/>
+        </p:nvSpPr>
+        <p:spPr bwMode="auto">
+          <a:xfrm>
+            <a:off x="5910563" y="3463099"/>
+            <a:ext cx="2136780" cy="2158796"/>
+          </a:xfrm>
+          <a:prstGeom prst="rect">
+            <a:avLst/>
+          </a:prstGeom>
+          <a:noFill/>
+          <a:ln>
+            <a:noFill/>
+          </a:ln>
+        </p:spPr>
+        <p:txBody>
+          <a:bodyPr wrap="square">
+            <a:spAutoFit/>
+          </a:bodyPr>
+          <a:lstStyle>
+            <a:lvl1pPr defTabSz="915988">
+              <a:defRPr sz="2300">
+                <a:solidFill>
+                  <a:schemeClr val="tx1"/>
+                </a:solidFill>
+                <a:latin typeface="Arial" panose="020B0604020202020204" pitchFamily="34" charset="0"/>
+                <a:ea typeface="MS PGothic" panose="020B0600070205080204" pitchFamily="34" charset="-128"/>
+              </a:defRPr>
+            </a:lvl1pPr>
+            <a:lvl2pPr marL="742950" indent="-285750" defTabSz="915988">
+              <a:defRPr sz="2300">
+                <a:solidFill>
+                  <a:schemeClr val="tx1"/>
+                </a:solidFill>
+                <a:latin typeface="Arial" panose="020B0604020202020204" pitchFamily="34" charset="0"/>
+                <a:ea typeface="MS PGothic" panose="020B0600070205080204" pitchFamily="34" charset="-128"/>
+              </a:defRPr>
+            </a:lvl2pPr>
+            <a:lvl3pPr marL="1143000" indent="-228600" defTabSz="915988">
+              <a:defRPr sz="2300">
+                <a:solidFill>
+                  <a:schemeClr val="tx1"/>
+                </a:solidFill>
+                <a:latin typeface="Arial" panose="020B0604020202020204" pitchFamily="34" charset="0"/>
+                <a:ea typeface="MS PGothic" panose="020B0600070205080204" pitchFamily="34" charset="-128"/>
+              </a:defRPr>
+            </a:lvl3pPr>
+            <a:lvl4pPr marL="1600200" indent="-228600" defTabSz="915988">
+              <a:defRPr sz="2300">
+                <a:solidFill>
+                  <a:schemeClr val="tx1"/>
+                </a:solidFill>
+                <a:latin typeface="Arial" panose="020B0604020202020204" pitchFamily="34" charset="0"/>
+                <a:ea typeface="MS PGothic" panose="020B0600070205080204" pitchFamily="34" charset="-128"/>
+              </a:defRPr>
+            </a:lvl4pPr>
+            <a:lvl5pPr marL="2057400" indent="-228600" defTabSz="915988">
+              <a:defRPr sz="2300">
+                <a:solidFill>
+                  <a:schemeClr val="tx1"/>
+                </a:solidFill>
+                <a:latin typeface="Arial" panose="020B0604020202020204" pitchFamily="34" charset="0"/>
+                <a:ea typeface="MS PGothic" panose="020B0600070205080204" pitchFamily="34" charset="-128"/>
+              </a:defRPr>
+            </a:lvl5pPr>
+            <a:lvl6pPr marL="2514600" indent="-228600" defTabSz="915988" eaLnBrk="0" fontAlgn="base" hangingPunct="0">
+              <a:spcBef>
+                <a:spcPct val="0"/>
+              </a:spcBef>
+              <a:spcAft>
+                <a:spcPct val="0"/>
+              </a:spcAft>
+              <a:defRPr sz="2300">
+                <a:solidFill>
+                  <a:schemeClr val="tx1"/>
+                </a:solidFill>
+                <a:latin typeface="Arial" panose="020B0604020202020204" pitchFamily="34" charset="0"/>
+                <a:ea typeface="MS PGothic" panose="020B0600070205080204" pitchFamily="34" charset="-128"/>
+              </a:defRPr>
+            </a:lvl6pPr>
+            <a:lvl7pPr marL="2971800" indent="-228600" defTabSz="915988" eaLnBrk="0" fontAlgn="base" hangingPunct="0">
+              <a:spcBef>
+                <a:spcPct val="0"/>
+              </a:spcBef>
+              <a:spcAft>
+                <a:spcPct val="0"/>
+              </a:spcAft>
+              <a:defRPr sz="2300">
+                <a:solidFill>
+                  <a:schemeClr val="tx1"/>
+                </a:solidFill>
+                <a:latin typeface="Arial" panose="020B0604020202020204" pitchFamily="34" charset="0"/>
+                <a:ea typeface="MS PGothic" panose="020B0600070205080204" pitchFamily="34" charset="-128"/>
+              </a:defRPr>
+            </a:lvl7pPr>
+            <a:lvl8pPr marL="3429000" indent="-228600" defTabSz="915988" eaLnBrk="0" fontAlgn="base" hangingPunct="0">
+              <a:spcBef>
+                <a:spcPct val="0"/>
+              </a:spcBef>
+              <a:spcAft>
+                <a:spcPct val="0"/>
+              </a:spcAft>
+              <a:defRPr sz="2300">
+                <a:solidFill>
+                  <a:schemeClr val="tx1"/>
+                </a:solidFill>
+                <a:latin typeface="Arial" panose="020B0604020202020204" pitchFamily="34" charset="0"/>
+                <a:ea typeface="MS PGothic" panose="020B0600070205080204" pitchFamily="34" charset="-128"/>
+              </a:defRPr>
+            </a:lvl8pPr>
+            <a:lvl9pPr marL="3886200" indent="-228600" defTabSz="915988" eaLnBrk="0" fontAlgn="base" hangingPunct="0">
+              <a:spcBef>
+                <a:spcPct val="0"/>
+              </a:spcBef>
+              <a:spcAft>
+                <a:spcPct val="0"/>
+              </a:spcAft>
+              <a:defRPr sz="2300">
+                <a:solidFill>
+                  <a:schemeClr val="tx1"/>
+                </a:solidFill>
+                <a:latin typeface="Arial" panose="020B0604020202020204" pitchFamily="34" charset="0"/>
+                <a:ea typeface="MS PGothic" panose="020B0600070205080204" pitchFamily="34" charset="-128"/>
+              </a:defRPr>
+            </a:lvl9pPr>
+          </a:lstStyle>
+          <a:p>
+            <a:pPr algn="just">
+              <a:lnSpc>
+                <a:spcPts val="850"/>
+              </a:lnSpc>
+              <a:spcBef>
+                <a:spcPts val="306"/>
+              </a:spcBef>
+              <a:defRPr/>
+            </a:pPr>
+            <a:r>
+              <a:rPr lang="en-GB" altLang="en-US" sz="611" dirty="0">
+                <a:solidFill>
+                  <a:schemeClr val="accent6"/>
+                </a:solidFill>
+                <a:latin typeface="Helvetica" panose="020B0604020202020204" pitchFamily="34" charset="0"/>
+              </a:rPr>
+              <a:t>TEXTETXTETXTETXTTEXT </a:t>
+            </a:r>
+            <a:r>
+              <a:rPr lang="en-GB" altLang="en-US" sz="611" dirty="0" err="1">
+                <a:solidFill>
+                  <a:schemeClr val="accent6"/>
+                </a:solidFill>
+                <a:latin typeface="Helvetica" panose="020B0604020202020204" pitchFamily="34" charset="0"/>
+              </a:rPr>
+              <a:t>TEXTETXTETXTETXTTEXT</a:t>
+            </a:r>
+            <a:r>
+              <a:rPr lang="en-GB" altLang="en-US" sz="611" dirty="0">
+                <a:solidFill>
+                  <a:schemeClr val="accent6"/>
+                </a:solidFill>
+                <a:latin typeface="Helvetica" panose="020B0604020202020204" pitchFamily="34" charset="0"/>
+              </a:rPr>
+              <a:t> </a:t>
+            </a:r>
+            <a:r>
+              <a:rPr lang="en-GB" altLang="en-US" sz="611" dirty="0" err="1">
+                <a:solidFill>
+                  <a:schemeClr val="accent6"/>
+                </a:solidFill>
+                <a:latin typeface="Helvetica" panose="020B0604020202020204" pitchFamily="34" charset="0"/>
+              </a:rPr>
+              <a:t>TEXTETXTETXTETXTTEXT</a:t>
+            </a:r>
+            <a:r>
+              <a:rPr lang="en-GB" altLang="en-US" sz="611" dirty="0">
+                <a:solidFill>
+                  <a:schemeClr val="accent6"/>
+                </a:solidFill>
+                <a:latin typeface="Helvetica" panose="020B0604020202020204" pitchFamily="34" charset="0"/>
+              </a:rPr>
+              <a:t> </a:t>
+            </a:r>
+            <a:r>
+              <a:rPr lang="en-GB" altLang="en-US" sz="611" dirty="0" err="1">
+                <a:solidFill>
+                  <a:schemeClr val="accent6"/>
+                </a:solidFill>
+                <a:latin typeface="Helvetica" panose="020B0604020202020204" pitchFamily="34" charset="0"/>
+              </a:rPr>
+              <a:t>TEXTETXTETXTETXTTEXT</a:t>
+            </a:r>
+            <a:r>
+              <a:rPr lang="en-GB" altLang="en-US" sz="611" dirty="0">
+                <a:solidFill>
+                  <a:schemeClr val="accent6"/>
+                </a:solidFill>
+                <a:latin typeface="Helvetica" panose="020B0604020202020204" pitchFamily="34" charset="0"/>
+              </a:rPr>
+              <a:t> </a:t>
+            </a:r>
+            <a:r>
+              <a:rPr lang="en-GB" altLang="en-US" sz="611" dirty="0" err="1">
+                <a:solidFill>
+                  <a:schemeClr val="accent6"/>
+                </a:solidFill>
+                <a:latin typeface="Helvetica" panose="020B0604020202020204" pitchFamily="34" charset="0"/>
+              </a:rPr>
+              <a:t>TEXTETXTETXTETXTTEXT</a:t>
+            </a:r>
+            <a:r>
+              <a:rPr lang="en-GB" altLang="en-US" sz="611" dirty="0">
+                <a:solidFill>
+                  <a:schemeClr val="accent6"/>
+                </a:solidFill>
+                <a:latin typeface="Helvetica" panose="020B0604020202020204" pitchFamily="34" charset="0"/>
+              </a:rPr>
+              <a:t> </a:t>
+            </a:r>
+            <a:r>
+              <a:rPr lang="en-GB" altLang="en-US" sz="611" dirty="0" err="1">
+                <a:solidFill>
+                  <a:schemeClr val="accent6"/>
+                </a:solidFill>
+                <a:latin typeface="Helvetica" panose="020B0604020202020204" pitchFamily="34" charset="0"/>
+              </a:rPr>
+              <a:t>TEXTETXTETXTETXTTEXT</a:t>
+            </a:r>
+            <a:r>
+              <a:rPr lang="en-GB" altLang="en-US" sz="611" dirty="0">
+                <a:solidFill>
+                  <a:schemeClr val="accent6"/>
+                </a:solidFill>
+                <a:latin typeface="Helvetica" panose="020B0604020202020204" pitchFamily="34" charset="0"/>
+              </a:rPr>
+              <a:t> </a:t>
+            </a:r>
+            <a:r>
+              <a:rPr lang="en-GB" altLang="en-US" sz="611" dirty="0" err="1">
+                <a:solidFill>
+                  <a:schemeClr val="accent6"/>
+                </a:solidFill>
+                <a:latin typeface="Helvetica" panose="020B0604020202020204" pitchFamily="34" charset="0"/>
+              </a:rPr>
+              <a:t>TEXTETXTETXTETXTTEXT</a:t>
+            </a:r>
+            <a:r>
+              <a:rPr lang="en-GB" altLang="en-US" sz="611" dirty="0">
+                <a:solidFill>
+                  <a:schemeClr val="accent6"/>
+                </a:solidFill>
+                <a:latin typeface="Helvetica" panose="020B0604020202020204" pitchFamily="34" charset="0"/>
+              </a:rPr>
+              <a:t> </a:t>
+            </a:r>
+            <a:r>
+              <a:rPr lang="en-GB" altLang="en-US" sz="611" dirty="0" err="1">
+                <a:solidFill>
+                  <a:schemeClr val="accent6"/>
+                </a:solidFill>
+                <a:latin typeface="Helvetica" panose="020B0604020202020204" pitchFamily="34" charset="0"/>
+              </a:rPr>
+              <a:t>TEXTETXTETXTETXTTEXT</a:t>
+            </a:r>
+            <a:r>
+              <a:rPr lang="en-GB" altLang="en-US" sz="611" dirty="0">
+                <a:solidFill>
+                  <a:schemeClr val="accent6"/>
+                </a:solidFill>
+                <a:latin typeface="Helvetica" panose="020B0604020202020204" pitchFamily="34" charset="0"/>
+              </a:rPr>
+              <a:t> </a:t>
+            </a:r>
+            <a:r>
+              <a:rPr lang="en-GB" altLang="en-US" sz="611" dirty="0" err="1">
+                <a:solidFill>
+                  <a:schemeClr val="accent6"/>
+                </a:solidFill>
+                <a:latin typeface="Helvetica" panose="020B0604020202020204" pitchFamily="34" charset="0"/>
+              </a:rPr>
+              <a:t>TEXTETXTETXTETXTTEXT</a:t>
+            </a:r>
+            <a:r>
+              <a:rPr lang="en-GB" altLang="en-US" sz="611" dirty="0">
+                <a:solidFill>
+                  <a:schemeClr val="accent6"/>
+                </a:solidFill>
+                <a:latin typeface="Helvetica" panose="020B0604020202020204" pitchFamily="34" charset="0"/>
+              </a:rPr>
+              <a:t> </a:t>
+            </a:r>
+            <a:r>
+              <a:rPr lang="en-GB" altLang="en-US" sz="611" dirty="0" err="1">
+                <a:solidFill>
+                  <a:schemeClr val="accent6"/>
+                </a:solidFill>
+                <a:latin typeface="Helvetica" panose="020B0604020202020204" pitchFamily="34" charset="0"/>
+              </a:rPr>
+              <a:t>TEXTETXTETXTETXTTEXT</a:t>
+            </a:r>
+            <a:r>
+              <a:rPr lang="en-GB" altLang="en-US" sz="611" dirty="0">
+                <a:solidFill>
+                  <a:schemeClr val="accent6"/>
+                </a:solidFill>
+                <a:latin typeface="Helvetica" panose="020B0604020202020204" pitchFamily="34" charset="0"/>
+              </a:rPr>
+              <a:t> </a:t>
+            </a:r>
+            <a:r>
+              <a:rPr lang="en-GB" altLang="en-US" sz="611" dirty="0" err="1">
+                <a:solidFill>
+                  <a:schemeClr val="accent6"/>
+                </a:solidFill>
+                <a:latin typeface="Helvetica" panose="020B0604020202020204" pitchFamily="34" charset="0"/>
+              </a:rPr>
+              <a:t>TEXTETXTETXTETXTTEXT</a:t>
+            </a:r>
+            <a:r>
+              <a:rPr lang="en-GB" altLang="en-US" sz="611" dirty="0">
+                <a:solidFill>
+                  <a:schemeClr val="accent6"/>
+                </a:solidFill>
+                <a:latin typeface="Helvetica" panose="020B0604020202020204" pitchFamily="34" charset="0"/>
+              </a:rPr>
+              <a:t> </a:t>
+            </a:r>
+            <a:r>
+              <a:rPr lang="en-GB" altLang="en-US" sz="611" dirty="0" err="1">
+                <a:solidFill>
+                  <a:schemeClr val="accent6"/>
+                </a:solidFill>
+                <a:latin typeface="Helvetica" panose="020B0604020202020204" pitchFamily="34" charset="0"/>
+              </a:rPr>
+              <a:t>TEXTETXTETXTETXTTEXT</a:t>
+            </a:r>
+            <a:r>
+              <a:rPr lang="en-GB" altLang="en-US" sz="611" dirty="0">
+                <a:solidFill>
+                  <a:schemeClr val="accent6"/>
+                </a:solidFill>
+                <a:latin typeface="Helvetica" panose="020B0604020202020204" pitchFamily="34" charset="0"/>
+              </a:rPr>
+              <a:t> </a:t>
+            </a:r>
+            <a:r>
+              <a:rPr lang="en-GB" altLang="en-US" sz="611" dirty="0" err="1">
+                <a:solidFill>
+                  <a:schemeClr val="accent6"/>
+                </a:solidFill>
+                <a:latin typeface="Helvetica" panose="020B0604020202020204" pitchFamily="34" charset="0"/>
+              </a:rPr>
+              <a:t>TEXTETXTETXTETXTTEXT</a:t>
+            </a:r>
+            <a:r>
+              <a:rPr lang="en-GB" altLang="en-US" sz="611" dirty="0">
+                <a:solidFill>
+                  <a:schemeClr val="accent6"/>
+                </a:solidFill>
+                <a:latin typeface="Helvetica" panose="020B0604020202020204" pitchFamily="34" charset="0"/>
+              </a:rPr>
+              <a:t> </a:t>
+            </a:r>
+            <a:r>
+              <a:rPr lang="en-GB" altLang="en-US" sz="611" dirty="0" err="1">
+                <a:solidFill>
+                  <a:schemeClr val="accent6"/>
+                </a:solidFill>
+                <a:latin typeface="Helvetica" panose="020B0604020202020204" pitchFamily="34" charset="0"/>
+              </a:rPr>
+              <a:t>TEXTETXTETXTETXTTEXT</a:t>
+            </a:r>
+            <a:r>
+              <a:rPr lang="en-GB" altLang="en-US" sz="611" dirty="0">
+                <a:solidFill>
+                  <a:schemeClr val="accent6"/>
+                </a:solidFill>
+                <a:latin typeface="Helvetica" panose="020B0604020202020204" pitchFamily="34" charset="0"/>
+              </a:rPr>
+              <a:t> </a:t>
+            </a:r>
+            <a:r>
+              <a:rPr lang="en-GB" altLang="en-US" sz="611" dirty="0" err="1">
+                <a:solidFill>
+                  <a:schemeClr val="accent6"/>
+                </a:solidFill>
+                <a:latin typeface="Helvetica" panose="020B0604020202020204" pitchFamily="34" charset="0"/>
+              </a:rPr>
+              <a:t>TEXTETXTETXTETXTTEXT</a:t>
+            </a:r>
+            <a:r>
+              <a:rPr lang="en-GB" altLang="en-US" sz="611" dirty="0">
+                <a:solidFill>
+                  <a:schemeClr val="accent6"/>
+                </a:solidFill>
+                <a:latin typeface="Helvetica" panose="020B0604020202020204" pitchFamily="34" charset="0"/>
+              </a:rPr>
+              <a:t> </a:t>
+            </a:r>
+            <a:r>
+              <a:rPr lang="en-GB" altLang="en-US" sz="611" dirty="0" err="1">
+                <a:solidFill>
+                  <a:schemeClr val="accent6"/>
+                </a:solidFill>
+                <a:latin typeface="Helvetica" panose="020B0604020202020204" pitchFamily="34" charset="0"/>
+              </a:rPr>
+              <a:t>TEXTETXTETXTETXTTEXT</a:t>
+            </a:r>
+            <a:r>
+              <a:rPr lang="en-GB" altLang="en-US" sz="611" dirty="0">
+                <a:solidFill>
+                  <a:schemeClr val="accent6"/>
+                </a:solidFill>
+                <a:latin typeface="Helvetica" panose="020B0604020202020204" pitchFamily="34" charset="0"/>
+              </a:rPr>
+              <a:t> </a:t>
+            </a:r>
+            <a:r>
+              <a:rPr lang="en-GB" altLang="en-US" sz="611" dirty="0" err="1">
+                <a:solidFill>
+                  <a:schemeClr val="accent6"/>
+                </a:solidFill>
+                <a:latin typeface="Helvetica" panose="020B0604020202020204" pitchFamily="34" charset="0"/>
+              </a:rPr>
+              <a:t>TEXTETXTETXTETXTTEXT</a:t>
+            </a:r>
+            <a:r>
+              <a:rPr lang="en-GB" altLang="en-US" sz="611" dirty="0">
+                <a:solidFill>
+                  <a:schemeClr val="accent6"/>
+                </a:solidFill>
+                <a:latin typeface="Helvetica" panose="020B0604020202020204" pitchFamily="34" charset="0"/>
+              </a:rPr>
+              <a:t> </a:t>
+            </a:r>
+            <a:r>
+              <a:rPr lang="en-GB" altLang="en-US" sz="611" dirty="0" err="1">
+                <a:solidFill>
+                  <a:schemeClr val="accent6"/>
+                </a:solidFill>
+                <a:latin typeface="Helvetica" panose="020B0604020202020204" pitchFamily="34" charset="0"/>
+              </a:rPr>
+              <a:t>TEXTETXTETXTETXTTEXT</a:t>
+            </a:r>
+            <a:r>
+              <a:rPr lang="en-GB" altLang="en-US" sz="611" dirty="0">
+                <a:solidFill>
+                  <a:schemeClr val="accent6"/>
+                </a:solidFill>
+                <a:latin typeface="Helvetica" panose="020B0604020202020204" pitchFamily="34" charset="0"/>
+              </a:rPr>
+              <a:t> TEXTETXTETXTETXTT</a:t>
+            </a:r>
+            <a:endParaRPr lang="en-GB" altLang="en-US" sz="611" dirty="0">
+              <a:latin typeface="Helvetica" panose="020B0604020202020204" pitchFamily="34" charset="0"/>
+            </a:endParaRPr>
+          </a:p>
+        </p:txBody>
+      </p:sp>
+      <p:sp>
+        <p:nvSpPr>
+          <p:cNvPr id="12" name="Rectangle 249">
+            <a:extLst>
+              <a:ext uri="{FF2B5EF4-FFF2-40B4-BE49-F238E27FC236}">
+                <a16:creationId xmlns:a16="http://schemas.microsoft.com/office/drawing/2014/main" id="{0EECE4E9-11AD-8740-0DF0-F6397D072EA1}"/>
+              </a:ext>
+            </a:extLst>
+          </p:cNvPr>
+          <p:cNvSpPr>
+            <a:spLocks noChangeArrowheads="1"/>
+          </p:cNvSpPr>
+          <p:nvPr/>
+        </p:nvSpPr>
+        <p:spPr bwMode="auto">
+          <a:xfrm>
+            <a:off x="2895829" y="3254058"/>
+            <a:ext cx="2188832" cy="264816"/>
+          </a:xfrm>
+          <a:prstGeom prst="rect">
+            <a:avLst/>
+          </a:prstGeom>
+          <a:noFill/>
+          <a:ln>
+            <a:noFill/>
+          </a:ln>
+          <a:extLst>
+            <a:ext uri="{909E8E84-426E-40DD-AFC4-6F175D3DCCD1}">
+              <a14:hiddenFill xmlns:a14="http://schemas.microsoft.com/office/drawing/2010/main">
+                <a:solidFill>
+                  <a:srgbClr val="FFFFFF"/>
+                </a:solidFill>
+              </a14:hiddenFill>
+            </a:ext>
+            <a:ext uri="{91240B29-F687-4F45-9708-019B960494DF}">
+              <a14:hiddenLine xmlns:a14="http://schemas.microsoft.com/office/drawing/2010/main" w="9525">
+                <a:solidFill>
+                  <a:srgbClr val="000000"/>
+                </a:solidFill>
+                <a:miter lim="800000"/>
+                <a:headEnd/>
+                <a:tailEnd/>
+              </a14:hiddenLine>
+            </a:ext>
+          </a:extLst>
+        </p:spPr>
+        <p:txBody>
+          <a:bodyPr>
+            <a:spAutoFit/>
+          </a:bodyPr>
+          <a:lstStyle>
+            <a:lvl1pPr>
+              <a:defRPr sz="2300">
+                <a:solidFill>
+                  <a:schemeClr val="tx1"/>
+                </a:solidFill>
+                <a:latin typeface="Arial" panose="020B0604020202020204" pitchFamily="34" charset="0"/>
+                <a:ea typeface="MS PGothic" panose="020B0600070205080204" pitchFamily="34" charset="-128"/>
+              </a:defRPr>
+            </a:lvl1pPr>
+            <a:lvl2pPr marL="742950" indent="-285750">
+              <a:defRPr sz="2300">
+                <a:solidFill>
+                  <a:schemeClr val="tx1"/>
+                </a:solidFill>
+                <a:latin typeface="Arial" panose="020B0604020202020204" pitchFamily="34" charset="0"/>
+                <a:ea typeface="MS PGothic" panose="020B0600070205080204" pitchFamily="34" charset="-128"/>
+              </a:defRPr>
+            </a:lvl2pPr>
+            <a:lvl3pPr marL="1143000" indent="-228600">
+              <a:defRPr sz="2300">
+                <a:solidFill>
+                  <a:schemeClr val="tx1"/>
+                </a:solidFill>
+                <a:latin typeface="Arial" panose="020B0604020202020204" pitchFamily="34" charset="0"/>
+                <a:ea typeface="MS PGothic" panose="020B0600070205080204" pitchFamily="34" charset="-128"/>
+              </a:defRPr>
+            </a:lvl3pPr>
+            <a:lvl4pPr marL="1600200" indent="-228600">
+              <a:defRPr sz="2300">
+                <a:solidFill>
+                  <a:schemeClr val="tx1"/>
+                </a:solidFill>
+                <a:latin typeface="Arial" panose="020B0604020202020204" pitchFamily="34" charset="0"/>
+                <a:ea typeface="MS PGothic" panose="020B0600070205080204" pitchFamily="34" charset="-128"/>
+              </a:defRPr>
+            </a:lvl4pPr>
+            <a:lvl5pPr marL="2057400" indent="-228600">
+              <a:defRPr sz="2300">
+                <a:solidFill>
+                  <a:schemeClr val="tx1"/>
+                </a:solidFill>
+                <a:latin typeface="Arial" panose="020B0604020202020204" pitchFamily="34" charset="0"/>
+                <a:ea typeface="MS PGothic" panose="020B0600070205080204" pitchFamily="34" charset="-128"/>
+              </a:defRPr>
+            </a:lvl5pPr>
+            <a:lvl6pPr marL="2514600" indent="-228600" eaLnBrk="0" fontAlgn="base" hangingPunct="0">
+              <a:spcBef>
+                <a:spcPct val="0"/>
+              </a:spcBef>
+              <a:spcAft>
+                <a:spcPct val="0"/>
+              </a:spcAft>
+              <a:defRPr sz="2300">
+                <a:solidFill>
+                  <a:schemeClr val="tx1"/>
+                </a:solidFill>
+                <a:latin typeface="Arial" panose="020B0604020202020204" pitchFamily="34" charset="0"/>
+                <a:ea typeface="MS PGothic" panose="020B0600070205080204" pitchFamily="34" charset="-128"/>
+              </a:defRPr>
+            </a:lvl6pPr>
+            <a:lvl7pPr marL="2971800" indent="-228600" eaLnBrk="0" fontAlgn="base" hangingPunct="0">
+              <a:spcBef>
+                <a:spcPct val="0"/>
+              </a:spcBef>
+              <a:spcAft>
+                <a:spcPct val="0"/>
+              </a:spcAft>
+              <a:defRPr sz="2300">
+                <a:solidFill>
+                  <a:schemeClr val="tx1"/>
+                </a:solidFill>
+                <a:latin typeface="Arial" panose="020B0604020202020204" pitchFamily="34" charset="0"/>
+                <a:ea typeface="MS PGothic" panose="020B0600070205080204" pitchFamily="34" charset="-128"/>
+              </a:defRPr>
+            </a:lvl7pPr>
+            <a:lvl8pPr marL="3429000" indent="-228600" eaLnBrk="0" fontAlgn="base" hangingPunct="0">
+              <a:spcBef>
+                <a:spcPct val="0"/>
+              </a:spcBef>
+              <a:spcAft>
+                <a:spcPct val="0"/>
+              </a:spcAft>
+              <a:defRPr sz="2300">
+                <a:solidFill>
+                  <a:schemeClr val="tx1"/>
+                </a:solidFill>
+                <a:latin typeface="Arial" panose="020B0604020202020204" pitchFamily="34" charset="0"/>
+                <a:ea typeface="MS PGothic" panose="020B0600070205080204" pitchFamily="34" charset="-128"/>
+              </a:defRPr>
+            </a:lvl8pPr>
+            <a:lvl9pPr marL="3886200" indent="-228600" eaLnBrk="0" fontAlgn="base" hangingPunct="0">
+              <a:spcBef>
+                <a:spcPct val="0"/>
+              </a:spcBef>
+              <a:spcAft>
+                <a:spcPct val="0"/>
+              </a:spcAft>
+              <a:defRPr sz="2300">
+                <a:solidFill>
+                  <a:schemeClr val="tx1"/>
+                </a:solidFill>
+                <a:latin typeface="Arial" panose="020B0604020202020204" pitchFamily="34" charset="0"/>
+                <a:ea typeface="MS PGothic" panose="020B0600070205080204" pitchFamily="34" charset="-128"/>
+              </a:defRPr>
+            </a:lvl9pPr>
+          </a:lstStyle>
+          <a:p>
+            <a:r>
+              <a:rPr lang="en-GB" altLang="en-US" sz="1121" b="1" dirty="0">
+                <a:solidFill>
+                  <a:srgbClr val="006684"/>
+                </a:solidFill>
+                <a:cs typeface="Arial" panose="020B0604020202020204" pitchFamily="34" charset="0"/>
+              </a:rPr>
+              <a:t>Evaluation</a:t>
+            </a:r>
+            <a:endParaRPr lang="en-US" altLang="en-US" sz="1121" dirty="0">
+              <a:solidFill>
+                <a:srgbClr val="006684"/>
+              </a:solidFill>
+              <a:cs typeface="Arial" panose="020B0604020202020204" pitchFamily="34" charset="0"/>
+            </a:endParaRPr>
+          </a:p>
+        </p:txBody>
+      </p:sp>
+      <p:cxnSp>
+        <p:nvCxnSpPr>
+          <p:cNvPr id="13" name="Straight Connector 6">
+            <a:extLst>
+              <a:ext uri="{FF2B5EF4-FFF2-40B4-BE49-F238E27FC236}">
+                <a16:creationId xmlns:a16="http://schemas.microsoft.com/office/drawing/2014/main" id="{CA57D06C-C4F3-5DFE-BDC4-B5C3C7782824}"/>
+              </a:ext>
+            </a:extLst>
+          </p:cNvPr>
+          <p:cNvCxnSpPr>
+            <a:cxnSpLocks noChangeShapeType="1"/>
+          </p:cNvCxnSpPr>
+          <p:nvPr/>
+        </p:nvCxnSpPr>
+        <p:spPr bwMode="auto">
+          <a:xfrm flipV="1">
+            <a:off x="2999569" y="3192125"/>
+            <a:ext cx="2164784" cy="0"/>
+          </a:xfrm>
+          <a:prstGeom prst="line">
+            <a:avLst/>
+          </a:prstGeom>
+          <a:noFill/>
+          <a:ln w="12700">
+            <a:solidFill>
+              <a:srgbClr val="006684"/>
+            </a:solidFill>
+            <a:round/>
+            <a:headEnd/>
+            <a:tailEnd/>
+          </a:ln>
+          <a:extLst>
+            <a:ext uri="{909E8E84-426E-40DD-AFC4-6F175D3DCCD1}">
+              <a14:hiddenFill xmlns:a14="http://schemas.microsoft.com/office/drawing/2010/main">
+                <a:noFill/>
+              </a14:hiddenFill>
+            </a:ext>
+          </a:extLst>
+        </p:spPr>
+      </p:cxnSp>
+      <p:sp>
+        <p:nvSpPr>
+          <p:cNvPr id="15" name="Rectangle 249">
+            <a:extLst>
+              <a:ext uri="{FF2B5EF4-FFF2-40B4-BE49-F238E27FC236}">
+                <a16:creationId xmlns:a16="http://schemas.microsoft.com/office/drawing/2014/main" id="{9A87B7BC-2F06-EAE7-2143-852B179016F2}"/>
+              </a:ext>
+            </a:extLst>
+          </p:cNvPr>
+          <p:cNvSpPr>
+            <a:spLocks noChangeArrowheads="1"/>
+          </p:cNvSpPr>
+          <p:nvPr/>
+        </p:nvSpPr>
+        <p:spPr bwMode="auto">
+          <a:xfrm>
+            <a:off x="5977462" y="692165"/>
+            <a:ext cx="2188832" cy="264816"/>
+          </a:xfrm>
+          <a:prstGeom prst="rect">
+            <a:avLst/>
+          </a:prstGeom>
+          <a:noFill/>
+          <a:ln>
+            <a:noFill/>
+          </a:ln>
+          <a:extLst>
+            <a:ext uri="{909E8E84-426E-40DD-AFC4-6F175D3DCCD1}">
+              <a14:hiddenFill xmlns:a14="http://schemas.microsoft.com/office/drawing/2010/main">
+                <a:solidFill>
+                  <a:srgbClr val="FFFFFF"/>
+                </a:solidFill>
+              </a14:hiddenFill>
+            </a:ext>
+            <a:ext uri="{91240B29-F687-4F45-9708-019B960494DF}">
+              <a14:hiddenLine xmlns:a14="http://schemas.microsoft.com/office/drawing/2010/main" w="9525">
+                <a:solidFill>
+                  <a:srgbClr val="000000"/>
+                </a:solidFill>
+                <a:miter lim="800000"/>
+                <a:headEnd/>
+                <a:tailEnd/>
+              </a14:hiddenLine>
+            </a:ext>
+          </a:extLst>
+        </p:spPr>
+        <p:txBody>
+          <a:bodyPr>
+            <a:spAutoFit/>
+          </a:bodyPr>
+          <a:lstStyle>
+            <a:lvl1pPr>
+              <a:defRPr sz="2300">
+                <a:solidFill>
+                  <a:schemeClr val="tx1"/>
+                </a:solidFill>
+                <a:latin typeface="Arial" panose="020B0604020202020204" pitchFamily="34" charset="0"/>
+                <a:ea typeface="MS PGothic" panose="020B0600070205080204" pitchFamily="34" charset="-128"/>
+              </a:defRPr>
+            </a:lvl1pPr>
+            <a:lvl2pPr marL="742950" indent="-285750">
+              <a:defRPr sz="2300">
+                <a:solidFill>
+                  <a:schemeClr val="tx1"/>
+                </a:solidFill>
+                <a:latin typeface="Arial" panose="020B0604020202020204" pitchFamily="34" charset="0"/>
+                <a:ea typeface="MS PGothic" panose="020B0600070205080204" pitchFamily="34" charset="-128"/>
+              </a:defRPr>
+            </a:lvl2pPr>
+            <a:lvl3pPr marL="1143000" indent="-228600">
+              <a:defRPr sz="2300">
+                <a:solidFill>
+                  <a:schemeClr val="tx1"/>
+                </a:solidFill>
+                <a:latin typeface="Arial" panose="020B0604020202020204" pitchFamily="34" charset="0"/>
+                <a:ea typeface="MS PGothic" panose="020B0600070205080204" pitchFamily="34" charset="-128"/>
+              </a:defRPr>
+            </a:lvl3pPr>
+            <a:lvl4pPr marL="1600200" indent="-228600">
+              <a:defRPr sz="2300">
+                <a:solidFill>
+                  <a:schemeClr val="tx1"/>
+                </a:solidFill>
+                <a:latin typeface="Arial" panose="020B0604020202020204" pitchFamily="34" charset="0"/>
+                <a:ea typeface="MS PGothic" panose="020B0600070205080204" pitchFamily="34" charset="-128"/>
+              </a:defRPr>
+            </a:lvl4pPr>
+            <a:lvl5pPr marL="2057400" indent="-228600">
+              <a:defRPr sz="2300">
+                <a:solidFill>
+                  <a:schemeClr val="tx1"/>
+                </a:solidFill>
+                <a:latin typeface="Arial" panose="020B0604020202020204" pitchFamily="34" charset="0"/>
+                <a:ea typeface="MS PGothic" panose="020B0600070205080204" pitchFamily="34" charset="-128"/>
+              </a:defRPr>
+            </a:lvl5pPr>
+            <a:lvl6pPr marL="2514600" indent="-228600" eaLnBrk="0" fontAlgn="base" hangingPunct="0">
+              <a:spcBef>
+                <a:spcPct val="0"/>
+              </a:spcBef>
+              <a:spcAft>
+                <a:spcPct val="0"/>
+              </a:spcAft>
+              <a:defRPr sz="2300">
+                <a:solidFill>
+                  <a:schemeClr val="tx1"/>
+                </a:solidFill>
+                <a:latin typeface="Arial" panose="020B0604020202020204" pitchFamily="34" charset="0"/>
+                <a:ea typeface="MS PGothic" panose="020B0600070205080204" pitchFamily="34" charset="-128"/>
+              </a:defRPr>
+            </a:lvl6pPr>
+            <a:lvl7pPr marL="2971800" indent="-228600" eaLnBrk="0" fontAlgn="base" hangingPunct="0">
+              <a:spcBef>
+                <a:spcPct val="0"/>
+              </a:spcBef>
+              <a:spcAft>
+                <a:spcPct val="0"/>
+              </a:spcAft>
+              <a:defRPr sz="2300">
+                <a:solidFill>
+                  <a:schemeClr val="tx1"/>
+                </a:solidFill>
+                <a:latin typeface="Arial" panose="020B0604020202020204" pitchFamily="34" charset="0"/>
+                <a:ea typeface="MS PGothic" panose="020B0600070205080204" pitchFamily="34" charset="-128"/>
+              </a:defRPr>
+            </a:lvl7pPr>
+            <a:lvl8pPr marL="3429000" indent="-228600" eaLnBrk="0" fontAlgn="base" hangingPunct="0">
+              <a:spcBef>
+                <a:spcPct val="0"/>
+              </a:spcBef>
+              <a:spcAft>
+                <a:spcPct val="0"/>
+              </a:spcAft>
+              <a:defRPr sz="2300">
+                <a:solidFill>
+                  <a:schemeClr val="tx1"/>
+                </a:solidFill>
+                <a:latin typeface="Arial" panose="020B0604020202020204" pitchFamily="34" charset="0"/>
+                <a:ea typeface="MS PGothic" panose="020B0600070205080204" pitchFamily="34" charset="-128"/>
+              </a:defRPr>
+            </a:lvl8pPr>
+            <a:lvl9pPr marL="3886200" indent="-228600" eaLnBrk="0" fontAlgn="base" hangingPunct="0">
+              <a:spcBef>
+                <a:spcPct val="0"/>
+              </a:spcBef>
+              <a:spcAft>
+                <a:spcPct val="0"/>
+              </a:spcAft>
+              <a:defRPr sz="2300">
+                <a:solidFill>
+                  <a:schemeClr val="tx1"/>
+                </a:solidFill>
+                <a:latin typeface="Arial" panose="020B0604020202020204" pitchFamily="34" charset="0"/>
+                <a:ea typeface="MS PGothic" panose="020B0600070205080204" pitchFamily="34" charset="-128"/>
+              </a:defRPr>
+            </a:lvl9pPr>
+          </a:lstStyle>
+          <a:p>
+            <a:r>
+              <a:rPr lang="en-GB" altLang="en-US" sz="1121" b="1" dirty="0">
+                <a:solidFill>
+                  <a:srgbClr val="006684"/>
+                </a:solidFill>
+                <a:cs typeface="Arial" panose="020B0604020202020204" pitchFamily="34" charset="0"/>
+              </a:rPr>
+              <a:t>Deployment</a:t>
+            </a:r>
+            <a:endParaRPr lang="en-US" altLang="en-US" sz="1121" dirty="0">
+              <a:solidFill>
+                <a:srgbClr val="006684"/>
+              </a:solidFill>
+              <a:cs typeface="Arial" panose="020B0604020202020204" pitchFamily="34" charset="0"/>
+            </a:endParaRPr>
+          </a:p>
+        </p:txBody>
+      </p:sp>
+      <p:sp>
+        <p:nvSpPr>
+          <p:cNvPr id="21" name="Rectangle 24">
+            <a:extLst>
+              <a:ext uri="{FF2B5EF4-FFF2-40B4-BE49-F238E27FC236}">
+                <a16:creationId xmlns:a16="http://schemas.microsoft.com/office/drawing/2014/main" id="{4F83E7E2-8352-E2B9-983A-0E25DE3D8981}"/>
+              </a:ext>
+            </a:extLst>
+          </p:cNvPr>
+          <p:cNvSpPr>
+            <a:spLocks noChangeArrowheads="1"/>
+          </p:cNvSpPr>
+          <p:nvPr/>
+        </p:nvSpPr>
+        <p:spPr bwMode="auto">
+          <a:xfrm>
+            <a:off x="2966891" y="2285809"/>
+            <a:ext cx="2197462" cy="773802"/>
+          </a:xfrm>
+          <a:prstGeom prst="rect">
+            <a:avLst/>
+          </a:prstGeom>
+          <a:noFill/>
+          <a:ln>
+            <a:noFill/>
+          </a:ln>
+        </p:spPr>
+        <p:txBody>
+          <a:bodyPr>
+            <a:spAutoFit/>
+          </a:bodyPr>
+          <a:lstStyle>
+            <a:lvl1pPr defTabSz="915988">
+              <a:defRPr sz="2300">
+                <a:solidFill>
+                  <a:schemeClr val="tx1"/>
+                </a:solidFill>
+                <a:latin typeface="Arial" panose="020B0604020202020204" pitchFamily="34" charset="0"/>
+                <a:ea typeface="MS PGothic" panose="020B0600070205080204" pitchFamily="34" charset="-128"/>
+              </a:defRPr>
+            </a:lvl1pPr>
+            <a:lvl2pPr marL="742950" indent="-285750" defTabSz="915988">
+              <a:defRPr sz="2300">
+                <a:solidFill>
+                  <a:schemeClr val="tx1"/>
+                </a:solidFill>
+                <a:latin typeface="Arial" panose="020B0604020202020204" pitchFamily="34" charset="0"/>
+                <a:ea typeface="MS PGothic" panose="020B0600070205080204" pitchFamily="34" charset="-128"/>
+              </a:defRPr>
+            </a:lvl2pPr>
+            <a:lvl3pPr marL="1143000" indent="-228600" defTabSz="915988">
+              <a:defRPr sz="2300">
+                <a:solidFill>
+                  <a:schemeClr val="tx1"/>
+                </a:solidFill>
+                <a:latin typeface="Arial" panose="020B0604020202020204" pitchFamily="34" charset="0"/>
+                <a:ea typeface="MS PGothic" panose="020B0600070205080204" pitchFamily="34" charset="-128"/>
+              </a:defRPr>
+            </a:lvl3pPr>
+            <a:lvl4pPr marL="1600200" indent="-228600" defTabSz="915988">
+              <a:defRPr sz="2300">
+                <a:solidFill>
+                  <a:schemeClr val="tx1"/>
+                </a:solidFill>
+                <a:latin typeface="Arial" panose="020B0604020202020204" pitchFamily="34" charset="0"/>
+                <a:ea typeface="MS PGothic" panose="020B0600070205080204" pitchFamily="34" charset="-128"/>
+              </a:defRPr>
+            </a:lvl4pPr>
+            <a:lvl5pPr marL="2057400" indent="-228600" defTabSz="915988">
+              <a:defRPr sz="2300">
+                <a:solidFill>
+                  <a:schemeClr val="tx1"/>
+                </a:solidFill>
+                <a:latin typeface="Arial" panose="020B0604020202020204" pitchFamily="34" charset="0"/>
+                <a:ea typeface="MS PGothic" panose="020B0600070205080204" pitchFamily="34" charset="-128"/>
+              </a:defRPr>
+            </a:lvl5pPr>
+            <a:lvl6pPr marL="2514600" indent="-228600" defTabSz="915988" eaLnBrk="0" fontAlgn="base" hangingPunct="0">
+              <a:spcBef>
+                <a:spcPct val="0"/>
+              </a:spcBef>
+              <a:spcAft>
+                <a:spcPct val="0"/>
+              </a:spcAft>
+              <a:defRPr sz="2300">
+                <a:solidFill>
+                  <a:schemeClr val="tx1"/>
+                </a:solidFill>
+                <a:latin typeface="Arial" panose="020B0604020202020204" pitchFamily="34" charset="0"/>
+                <a:ea typeface="MS PGothic" panose="020B0600070205080204" pitchFamily="34" charset="-128"/>
+              </a:defRPr>
+            </a:lvl6pPr>
+            <a:lvl7pPr marL="2971800" indent="-228600" defTabSz="915988" eaLnBrk="0" fontAlgn="base" hangingPunct="0">
+              <a:spcBef>
+                <a:spcPct val="0"/>
+              </a:spcBef>
+              <a:spcAft>
+                <a:spcPct val="0"/>
+              </a:spcAft>
+              <a:defRPr sz="2300">
+                <a:solidFill>
+                  <a:schemeClr val="tx1"/>
+                </a:solidFill>
+                <a:latin typeface="Arial" panose="020B0604020202020204" pitchFamily="34" charset="0"/>
+                <a:ea typeface="MS PGothic" panose="020B0600070205080204" pitchFamily="34" charset="-128"/>
+              </a:defRPr>
+            </a:lvl7pPr>
+            <a:lvl8pPr marL="3429000" indent="-228600" defTabSz="915988" eaLnBrk="0" fontAlgn="base" hangingPunct="0">
+              <a:spcBef>
+                <a:spcPct val="0"/>
+              </a:spcBef>
+              <a:spcAft>
+                <a:spcPct val="0"/>
+              </a:spcAft>
+              <a:defRPr sz="2300">
+                <a:solidFill>
+                  <a:schemeClr val="tx1"/>
+                </a:solidFill>
+                <a:latin typeface="Arial" panose="020B0604020202020204" pitchFamily="34" charset="0"/>
+                <a:ea typeface="MS PGothic" panose="020B0600070205080204" pitchFamily="34" charset="-128"/>
+              </a:defRPr>
+            </a:lvl8pPr>
+            <a:lvl9pPr marL="3886200" indent="-228600" defTabSz="915988" eaLnBrk="0" fontAlgn="base" hangingPunct="0">
+              <a:spcBef>
+                <a:spcPct val="0"/>
+              </a:spcBef>
+              <a:spcAft>
+                <a:spcPct val="0"/>
+              </a:spcAft>
+              <a:defRPr sz="2300">
+                <a:solidFill>
+                  <a:schemeClr val="tx1"/>
+                </a:solidFill>
+                <a:latin typeface="Arial" panose="020B0604020202020204" pitchFamily="34" charset="0"/>
+                <a:ea typeface="MS PGothic" panose="020B0600070205080204" pitchFamily="34" charset="-128"/>
+              </a:defRPr>
+            </a:lvl9pPr>
+          </a:lstStyle>
+          <a:p>
+            <a:pPr algn="just">
+              <a:lnSpc>
+                <a:spcPts val="850"/>
+              </a:lnSpc>
+              <a:spcBef>
+                <a:spcPts val="306"/>
+              </a:spcBef>
+              <a:defRPr/>
+            </a:pPr>
+            <a:r>
+              <a:rPr lang="en-GB" altLang="en-US" sz="611" dirty="0">
+                <a:solidFill>
+                  <a:schemeClr val="accent6"/>
+                </a:solidFill>
+                <a:latin typeface="Helvetica" panose="020B0604020202020204" pitchFamily="34" charset="0"/>
+              </a:rPr>
+              <a:t>TABLE </a:t>
+            </a:r>
+            <a:r>
+              <a:rPr lang="en-GB" altLang="en-US" sz="611" dirty="0" err="1">
+                <a:solidFill>
+                  <a:schemeClr val="accent6"/>
+                </a:solidFill>
+                <a:latin typeface="Helvetica" panose="020B0604020202020204" pitchFamily="34" charset="0"/>
+              </a:rPr>
+              <a:t>TABLE</a:t>
+            </a:r>
+            <a:r>
+              <a:rPr lang="en-GB" altLang="en-US" sz="611" dirty="0">
+                <a:solidFill>
+                  <a:schemeClr val="accent6"/>
+                </a:solidFill>
+                <a:latin typeface="Helvetica" panose="020B0604020202020204" pitchFamily="34" charset="0"/>
+              </a:rPr>
+              <a:t> </a:t>
+            </a:r>
+            <a:r>
+              <a:rPr lang="en-GB" altLang="en-US" sz="611" dirty="0" err="1">
+                <a:solidFill>
+                  <a:schemeClr val="accent6"/>
+                </a:solidFill>
+                <a:latin typeface="Helvetica" panose="020B0604020202020204" pitchFamily="34" charset="0"/>
+              </a:rPr>
+              <a:t>TABLE</a:t>
+            </a:r>
+            <a:r>
+              <a:rPr lang="en-GB" altLang="en-US" sz="611" dirty="0">
+                <a:solidFill>
+                  <a:schemeClr val="accent6"/>
+                </a:solidFill>
+                <a:latin typeface="Helvetica" panose="020B0604020202020204" pitchFamily="34" charset="0"/>
+              </a:rPr>
+              <a:t> </a:t>
+            </a:r>
+            <a:r>
+              <a:rPr lang="en-GB" altLang="en-US" sz="611" dirty="0" err="1">
+                <a:solidFill>
+                  <a:schemeClr val="accent6"/>
+                </a:solidFill>
+                <a:latin typeface="Helvetica" panose="020B0604020202020204" pitchFamily="34" charset="0"/>
+              </a:rPr>
+              <a:t>TABLE</a:t>
+            </a:r>
+            <a:r>
+              <a:rPr lang="en-GB" altLang="en-US" sz="611" dirty="0">
+                <a:solidFill>
+                  <a:schemeClr val="accent6"/>
+                </a:solidFill>
+                <a:latin typeface="Helvetica" panose="020B0604020202020204" pitchFamily="34" charset="0"/>
+              </a:rPr>
+              <a:t> </a:t>
+            </a:r>
+            <a:r>
+              <a:rPr lang="en-GB" altLang="en-US" sz="611" dirty="0" err="1">
+                <a:solidFill>
+                  <a:schemeClr val="accent6"/>
+                </a:solidFill>
+                <a:latin typeface="Helvetica" panose="020B0604020202020204" pitchFamily="34" charset="0"/>
+              </a:rPr>
+              <a:t>TABLE</a:t>
+            </a:r>
+            <a:r>
+              <a:rPr lang="en-GB" altLang="en-US" sz="611" dirty="0">
+                <a:solidFill>
+                  <a:schemeClr val="accent6"/>
+                </a:solidFill>
+                <a:latin typeface="Helvetica" panose="020B0604020202020204" pitchFamily="34" charset="0"/>
+              </a:rPr>
+              <a:t> </a:t>
+            </a:r>
+            <a:r>
+              <a:rPr lang="en-GB" altLang="en-US" sz="611" dirty="0" err="1">
+                <a:solidFill>
+                  <a:schemeClr val="accent6"/>
+                </a:solidFill>
+                <a:latin typeface="Helvetica" panose="020B0604020202020204" pitchFamily="34" charset="0"/>
+              </a:rPr>
+              <a:t>TABLE</a:t>
+            </a:r>
+            <a:r>
+              <a:rPr lang="en-GB" altLang="en-US" sz="611" dirty="0">
+                <a:solidFill>
+                  <a:schemeClr val="accent6"/>
+                </a:solidFill>
+                <a:latin typeface="Helvetica" panose="020B0604020202020204" pitchFamily="34" charset="0"/>
+              </a:rPr>
+              <a:t> </a:t>
+            </a:r>
+            <a:r>
+              <a:rPr lang="en-GB" altLang="en-US" sz="611" dirty="0" err="1">
+                <a:solidFill>
+                  <a:schemeClr val="accent6"/>
+                </a:solidFill>
+                <a:latin typeface="Helvetica" panose="020B0604020202020204" pitchFamily="34" charset="0"/>
+              </a:rPr>
+              <a:t>TABLE</a:t>
+            </a:r>
+            <a:r>
+              <a:rPr lang="en-GB" altLang="en-US" sz="611" dirty="0">
+                <a:solidFill>
+                  <a:schemeClr val="accent6"/>
+                </a:solidFill>
+                <a:latin typeface="Helvetica" panose="020B0604020202020204" pitchFamily="34" charset="0"/>
+              </a:rPr>
+              <a:t> </a:t>
+            </a:r>
+            <a:r>
+              <a:rPr lang="en-GB" altLang="en-US" sz="611" dirty="0" err="1">
+                <a:solidFill>
+                  <a:schemeClr val="accent6"/>
+                </a:solidFill>
+                <a:latin typeface="Helvetica" panose="020B0604020202020204" pitchFamily="34" charset="0"/>
+              </a:rPr>
+              <a:t>TABLE</a:t>
+            </a:r>
+            <a:r>
+              <a:rPr lang="en-GB" altLang="en-US" sz="611" dirty="0">
+                <a:solidFill>
+                  <a:schemeClr val="accent6"/>
+                </a:solidFill>
+                <a:latin typeface="Helvetica" panose="020B0604020202020204" pitchFamily="34" charset="0"/>
+              </a:rPr>
+              <a:t> </a:t>
+            </a:r>
+            <a:r>
+              <a:rPr lang="en-GB" altLang="en-US" sz="611" dirty="0" err="1">
+                <a:solidFill>
+                  <a:schemeClr val="accent6"/>
+                </a:solidFill>
+                <a:latin typeface="Helvetica" panose="020B0604020202020204" pitchFamily="34" charset="0"/>
+              </a:rPr>
+              <a:t>TABLE</a:t>
+            </a:r>
+            <a:r>
+              <a:rPr lang="en-GB" altLang="en-US" sz="611" dirty="0">
+                <a:solidFill>
+                  <a:schemeClr val="accent6"/>
+                </a:solidFill>
+                <a:latin typeface="Helvetica" panose="020B0604020202020204" pitchFamily="34" charset="0"/>
+              </a:rPr>
+              <a:t> </a:t>
+            </a:r>
+            <a:r>
+              <a:rPr lang="en-GB" altLang="en-US" sz="611" dirty="0" err="1">
+                <a:solidFill>
+                  <a:schemeClr val="accent6"/>
+                </a:solidFill>
+                <a:latin typeface="Helvetica" panose="020B0604020202020204" pitchFamily="34" charset="0"/>
+              </a:rPr>
+              <a:t>TABLE</a:t>
+            </a:r>
+            <a:r>
+              <a:rPr lang="en-GB" altLang="en-US" sz="611" dirty="0">
+                <a:solidFill>
+                  <a:schemeClr val="accent6"/>
+                </a:solidFill>
+                <a:latin typeface="Helvetica" panose="020B0604020202020204" pitchFamily="34" charset="0"/>
+              </a:rPr>
+              <a:t> </a:t>
+            </a:r>
+            <a:r>
+              <a:rPr lang="en-GB" altLang="en-US" sz="611" dirty="0" err="1">
+                <a:solidFill>
+                  <a:schemeClr val="accent6"/>
+                </a:solidFill>
+                <a:latin typeface="Helvetica" panose="020B0604020202020204" pitchFamily="34" charset="0"/>
+              </a:rPr>
+              <a:t>TABLE</a:t>
+            </a:r>
+            <a:r>
+              <a:rPr lang="en-GB" altLang="en-US" sz="611" dirty="0">
+                <a:solidFill>
+                  <a:schemeClr val="accent6"/>
+                </a:solidFill>
+                <a:latin typeface="Helvetica" panose="020B0604020202020204" pitchFamily="34" charset="0"/>
+              </a:rPr>
+              <a:t> </a:t>
+            </a:r>
+            <a:r>
+              <a:rPr lang="en-GB" altLang="en-US" sz="611" dirty="0" err="1">
+                <a:solidFill>
+                  <a:schemeClr val="accent6"/>
+                </a:solidFill>
+                <a:latin typeface="Helvetica" panose="020B0604020202020204" pitchFamily="34" charset="0"/>
+              </a:rPr>
+              <a:t>TABLE</a:t>
+            </a:r>
+            <a:r>
+              <a:rPr lang="en-GB" altLang="en-US" sz="611" dirty="0">
+                <a:solidFill>
+                  <a:schemeClr val="accent6"/>
+                </a:solidFill>
+                <a:latin typeface="Helvetica" panose="020B0604020202020204" pitchFamily="34" charset="0"/>
+              </a:rPr>
+              <a:t> </a:t>
+            </a:r>
+            <a:r>
+              <a:rPr lang="en-GB" altLang="en-US" sz="611" dirty="0" err="1">
+                <a:solidFill>
+                  <a:schemeClr val="accent6"/>
+                </a:solidFill>
+                <a:latin typeface="Helvetica" panose="020B0604020202020204" pitchFamily="34" charset="0"/>
+              </a:rPr>
+              <a:t>TABLE</a:t>
+            </a:r>
+            <a:r>
+              <a:rPr lang="en-GB" altLang="en-US" sz="611" dirty="0">
+                <a:solidFill>
+                  <a:schemeClr val="accent6"/>
+                </a:solidFill>
+                <a:latin typeface="Helvetica" panose="020B0604020202020204" pitchFamily="34" charset="0"/>
+              </a:rPr>
+              <a:t> </a:t>
+            </a:r>
+            <a:r>
+              <a:rPr lang="en-GB" altLang="en-US" sz="611" dirty="0" err="1">
+                <a:solidFill>
+                  <a:schemeClr val="accent6"/>
+                </a:solidFill>
+                <a:latin typeface="Helvetica" panose="020B0604020202020204" pitchFamily="34" charset="0"/>
+              </a:rPr>
+              <a:t>TABLE</a:t>
+            </a:r>
+            <a:r>
+              <a:rPr lang="en-GB" altLang="en-US" sz="611" dirty="0">
+                <a:solidFill>
+                  <a:schemeClr val="accent6"/>
+                </a:solidFill>
+                <a:latin typeface="Helvetica" panose="020B0604020202020204" pitchFamily="34" charset="0"/>
+              </a:rPr>
+              <a:t> </a:t>
+            </a:r>
+            <a:r>
+              <a:rPr lang="en-GB" altLang="en-US" sz="611" dirty="0" err="1">
+                <a:solidFill>
+                  <a:schemeClr val="accent6"/>
+                </a:solidFill>
+                <a:latin typeface="Helvetica" panose="020B0604020202020204" pitchFamily="34" charset="0"/>
+              </a:rPr>
+              <a:t>TABLE</a:t>
+            </a:r>
+            <a:r>
+              <a:rPr lang="en-GB" altLang="en-US" sz="611" dirty="0">
+                <a:solidFill>
+                  <a:schemeClr val="accent6"/>
+                </a:solidFill>
+                <a:latin typeface="Helvetica" panose="020B0604020202020204" pitchFamily="34" charset="0"/>
+              </a:rPr>
+              <a:t> </a:t>
+            </a:r>
+            <a:r>
+              <a:rPr lang="en-GB" altLang="en-US" sz="611" dirty="0" err="1">
+                <a:solidFill>
+                  <a:schemeClr val="accent6"/>
+                </a:solidFill>
+                <a:latin typeface="Helvetica" panose="020B0604020202020204" pitchFamily="34" charset="0"/>
+              </a:rPr>
+              <a:t>TABLE</a:t>
+            </a:r>
+            <a:r>
+              <a:rPr lang="en-GB" altLang="en-US" sz="611" dirty="0">
+                <a:solidFill>
+                  <a:schemeClr val="accent6"/>
+                </a:solidFill>
+                <a:latin typeface="Helvetica" panose="020B0604020202020204" pitchFamily="34" charset="0"/>
+              </a:rPr>
+              <a:t> </a:t>
+            </a:r>
+            <a:r>
+              <a:rPr lang="en-GB" altLang="en-US" sz="611" dirty="0" err="1">
+                <a:solidFill>
+                  <a:schemeClr val="accent6"/>
+                </a:solidFill>
+                <a:latin typeface="Helvetica" panose="020B0604020202020204" pitchFamily="34" charset="0"/>
+              </a:rPr>
+              <a:t>TABLE</a:t>
+            </a:r>
+            <a:r>
+              <a:rPr lang="en-GB" altLang="en-US" sz="611" dirty="0">
+                <a:solidFill>
+                  <a:schemeClr val="accent6"/>
+                </a:solidFill>
+                <a:latin typeface="Helvetica" panose="020B0604020202020204" pitchFamily="34" charset="0"/>
+              </a:rPr>
+              <a:t> </a:t>
+            </a:r>
+            <a:r>
+              <a:rPr lang="en-GB" altLang="en-US" sz="611" dirty="0" err="1">
+                <a:solidFill>
+                  <a:schemeClr val="accent6"/>
+                </a:solidFill>
+                <a:latin typeface="Helvetica" panose="020B0604020202020204" pitchFamily="34" charset="0"/>
+              </a:rPr>
+              <a:t>TABLE</a:t>
+            </a:r>
+            <a:r>
+              <a:rPr lang="en-GB" altLang="en-US" sz="611" dirty="0">
+                <a:solidFill>
+                  <a:schemeClr val="accent6"/>
+                </a:solidFill>
+                <a:latin typeface="Helvetica" panose="020B0604020202020204" pitchFamily="34" charset="0"/>
+              </a:rPr>
+              <a:t> </a:t>
+            </a:r>
+            <a:r>
+              <a:rPr lang="en-GB" altLang="en-US" sz="611" dirty="0" err="1">
+                <a:solidFill>
+                  <a:schemeClr val="accent6"/>
+                </a:solidFill>
+                <a:latin typeface="Helvetica" panose="020B0604020202020204" pitchFamily="34" charset="0"/>
+              </a:rPr>
+              <a:t>TABLE</a:t>
+            </a:r>
+            <a:r>
+              <a:rPr lang="en-GB" altLang="en-US" sz="611" dirty="0">
+                <a:solidFill>
+                  <a:schemeClr val="accent6"/>
+                </a:solidFill>
+                <a:latin typeface="Helvetica" panose="020B0604020202020204" pitchFamily="34" charset="0"/>
+              </a:rPr>
+              <a:t> </a:t>
+            </a:r>
+            <a:r>
+              <a:rPr lang="en-GB" altLang="en-US" sz="611" dirty="0" err="1">
+                <a:solidFill>
+                  <a:schemeClr val="accent6"/>
+                </a:solidFill>
+                <a:latin typeface="Helvetica" panose="020B0604020202020204" pitchFamily="34" charset="0"/>
+              </a:rPr>
+              <a:t>TABLE</a:t>
+            </a:r>
+            <a:r>
+              <a:rPr lang="en-GB" altLang="en-US" sz="611" dirty="0">
+                <a:solidFill>
+                  <a:schemeClr val="accent6"/>
+                </a:solidFill>
+                <a:latin typeface="Helvetica" panose="020B0604020202020204" pitchFamily="34" charset="0"/>
+              </a:rPr>
+              <a:t> </a:t>
+            </a:r>
+            <a:r>
+              <a:rPr lang="en-GB" altLang="en-US" sz="611" dirty="0" err="1">
+                <a:solidFill>
+                  <a:schemeClr val="accent6"/>
+                </a:solidFill>
+                <a:latin typeface="Helvetica" panose="020B0604020202020204" pitchFamily="34" charset="0"/>
+              </a:rPr>
+              <a:t>TABLE</a:t>
+            </a:r>
+            <a:r>
+              <a:rPr lang="en-GB" altLang="en-US" sz="611" dirty="0">
+                <a:solidFill>
+                  <a:schemeClr val="accent6"/>
+                </a:solidFill>
+                <a:latin typeface="Helvetica" panose="020B0604020202020204" pitchFamily="34" charset="0"/>
+              </a:rPr>
+              <a:t> </a:t>
+            </a:r>
+            <a:r>
+              <a:rPr lang="en-GB" altLang="en-US" sz="611" dirty="0" err="1">
+                <a:solidFill>
+                  <a:schemeClr val="accent6"/>
+                </a:solidFill>
+                <a:latin typeface="Helvetica" panose="020B0604020202020204" pitchFamily="34" charset="0"/>
+              </a:rPr>
+              <a:t>TABLE</a:t>
+            </a:r>
+            <a:r>
+              <a:rPr lang="en-GB" altLang="en-US" sz="611" dirty="0">
+                <a:solidFill>
+                  <a:schemeClr val="accent6"/>
+                </a:solidFill>
+                <a:latin typeface="Helvetica" panose="020B0604020202020204" pitchFamily="34" charset="0"/>
+              </a:rPr>
+              <a:t> </a:t>
+            </a:r>
+            <a:r>
+              <a:rPr lang="en-GB" altLang="en-US" sz="611" dirty="0" err="1">
+                <a:solidFill>
+                  <a:schemeClr val="accent6"/>
+                </a:solidFill>
+                <a:latin typeface="Helvetica" panose="020B0604020202020204" pitchFamily="34" charset="0"/>
+              </a:rPr>
+              <a:t>TABLE</a:t>
+            </a:r>
+            <a:r>
+              <a:rPr lang="en-GB" altLang="en-US" sz="611" dirty="0">
+                <a:solidFill>
+                  <a:schemeClr val="accent6"/>
+                </a:solidFill>
+                <a:latin typeface="Helvetica" panose="020B0604020202020204" pitchFamily="34" charset="0"/>
+              </a:rPr>
+              <a:t> </a:t>
+            </a:r>
+            <a:r>
+              <a:rPr lang="en-GB" altLang="en-US" sz="611" dirty="0" err="1">
+                <a:solidFill>
+                  <a:schemeClr val="accent6"/>
+                </a:solidFill>
+                <a:latin typeface="Helvetica" panose="020B0604020202020204" pitchFamily="34" charset="0"/>
+              </a:rPr>
+              <a:t>TABLE</a:t>
+            </a:r>
+            <a:r>
+              <a:rPr lang="en-GB" altLang="en-US" sz="611" dirty="0">
+                <a:solidFill>
+                  <a:schemeClr val="accent6"/>
+                </a:solidFill>
+                <a:latin typeface="Helvetica" panose="020B0604020202020204" pitchFamily="34" charset="0"/>
+              </a:rPr>
+              <a:t> </a:t>
+            </a:r>
+            <a:r>
+              <a:rPr lang="en-GB" altLang="en-US" sz="611" dirty="0" err="1">
+                <a:solidFill>
+                  <a:schemeClr val="accent6"/>
+                </a:solidFill>
+                <a:latin typeface="Helvetica" panose="020B0604020202020204" pitchFamily="34" charset="0"/>
+              </a:rPr>
+              <a:t>TABLE</a:t>
+            </a:r>
+            <a:r>
+              <a:rPr lang="en-GB" altLang="en-US" sz="611" dirty="0">
+                <a:solidFill>
+                  <a:schemeClr val="accent6"/>
+                </a:solidFill>
+                <a:latin typeface="Helvetica" panose="020B0604020202020204" pitchFamily="34" charset="0"/>
+              </a:rPr>
+              <a:t> </a:t>
+            </a:r>
+            <a:r>
+              <a:rPr lang="en-GB" altLang="en-US" sz="611" dirty="0" err="1">
+                <a:solidFill>
+                  <a:schemeClr val="accent6"/>
+                </a:solidFill>
+                <a:latin typeface="Helvetica" panose="020B0604020202020204" pitchFamily="34" charset="0"/>
+              </a:rPr>
+              <a:t>TABLE</a:t>
+            </a:r>
+            <a:r>
+              <a:rPr lang="en-GB" altLang="en-US" sz="611" dirty="0">
+                <a:solidFill>
+                  <a:schemeClr val="accent6"/>
+                </a:solidFill>
+                <a:latin typeface="Helvetica" panose="020B0604020202020204" pitchFamily="34" charset="0"/>
+              </a:rPr>
+              <a:t> </a:t>
+            </a:r>
+            <a:r>
+              <a:rPr lang="en-GB" altLang="en-US" sz="611" dirty="0" err="1">
+                <a:solidFill>
+                  <a:schemeClr val="accent6"/>
+                </a:solidFill>
+                <a:latin typeface="Helvetica" panose="020B0604020202020204" pitchFamily="34" charset="0"/>
+              </a:rPr>
+              <a:t>TABLE</a:t>
+            </a:r>
+            <a:r>
+              <a:rPr lang="en-GB" altLang="en-US" sz="611" dirty="0">
+                <a:solidFill>
+                  <a:schemeClr val="accent6"/>
+                </a:solidFill>
+                <a:latin typeface="Helvetica" panose="020B0604020202020204" pitchFamily="34" charset="0"/>
+              </a:rPr>
+              <a:t> </a:t>
+            </a:r>
+            <a:r>
+              <a:rPr lang="en-GB" altLang="en-US" sz="611" dirty="0" err="1">
+                <a:solidFill>
+                  <a:schemeClr val="accent6"/>
+                </a:solidFill>
+                <a:latin typeface="Helvetica" panose="020B0604020202020204" pitchFamily="34" charset="0"/>
+              </a:rPr>
+              <a:t>TABLE</a:t>
+            </a:r>
+            <a:r>
+              <a:rPr lang="en-GB" altLang="en-US" sz="611" dirty="0">
+                <a:solidFill>
+                  <a:schemeClr val="accent6"/>
+                </a:solidFill>
+                <a:latin typeface="Helvetica" panose="020B0604020202020204" pitchFamily="34" charset="0"/>
+              </a:rPr>
+              <a:t> </a:t>
+            </a:r>
+            <a:r>
+              <a:rPr lang="en-GB" altLang="en-US" sz="611" dirty="0" err="1">
+                <a:solidFill>
+                  <a:schemeClr val="accent6"/>
+                </a:solidFill>
+                <a:latin typeface="Helvetica" panose="020B0604020202020204" pitchFamily="34" charset="0"/>
+              </a:rPr>
+              <a:t>TABLE</a:t>
+            </a:r>
+            <a:r>
+              <a:rPr lang="en-GB" altLang="en-US" sz="611" dirty="0">
+                <a:solidFill>
+                  <a:schemeClr val="accent6"/>
+                </a:solidFill>
+                <a:latin typeface="Helvetica" panose="020B0604020202020204" pitchFamily="34" charset="0"/>
+              </a:rPr>
+              <a:t> </a:t>
+            </a:r>
+            <a:r>
+              <a:rPr lang="en-GB" altLang="en-US" sz="611" dirty="0" err="1">
+                <a:solidFill>
+                  <a:schemeClr val="accent6"/>
+                </a:solidFill>
+                <a:latin typeface="Helvetica" panose="020B0604020202020204" pitchFamily="34" charset="0"/>
+              </a:rPr>
+              <a:t>TABLE</a:t>
+            </a:r>
+            <a:r>
+              <a:rPr lang="en-GB" altLang="en-US" sz="611" dirty="0">
+                <a:solidFill>
+                  <a:schemeClr val="accent6"/>
+                </a:solidFill>
+                <a:latin typeface="Helvetica" panose="020B0604020202020204" pitchFamily="34" charset="0"/>
+              </a:rPr>
+              <a:t> </a:t>
+            </a:r>
+            <a:r>
+              <a:rPr lang="en-GB" altLang="en-US" sz="611" dirty="0" err="1">
+                <a:solidFill>
+                  <a:schemeClr val="accent6"/>
+                </a:solidFill>
+                <a:latin typeface="Helvetica" panose="020B0604020202020204" pitchFamily="34" charset="0"/>
+              </a:rPr>
+              <a:t>TABLE</a:t>
+            </a:r>
+            <a:r>
+              <a:rPr lang="en-GB" altLang="en-US" sz="611" dirty="0">
+                <a:solidFill>
+                  <a:schemeClr val="accent6"/>
+                </a:solidFill>
+                <a:latin typeface="Helvetica" panose="020B0604020202020204" pitchFamily="34" charset="0"/>
+              </a:rPr>
+              <a:t> </a:t>
+            </a:r>
+            <a:r>
+              <a:rPr lang="en-GB" altLang="en-US" sz="611" dirty="0" err="1">
+                <a:solidFill>
+                  <a:schemeClr val="accent6"/>
+                </a:solidFill>
+                <a:latin typeface="Helvetica" panose="020B0604020202020204" pitchFamily="34" charset="0"/>
+              </a:rPr>
+              <a:t>TABLE</a:t>
+            </a:r>
+            <a:r>
+              <a:rPr lang="en-GB" altLang="en-US" sz="611" dirty="0">
+                <a:solidFill>
+                  <a:schemeClr val="accent6"/>
+                </a:solidFill>
+                <a:latin typeface="Helvetica" panose="020B0604020202020204" pitchFamily="34" charset="0"/>
+              </a:rPr>
+              <a:t> </a:t>
+            </a:r>
+            <a:r>
+              <a:rPr lang="en-GB" altLang="en-US" sz="611" dirty="0" err="1">
+                <a:solidFill>
+                  <a:schemeClr val="accent6"/>
+                </a:solidFill>
+                <a:latin typeface="Helvetica" panose="020B0604020202020204" pitchFamily="34" charset="0"/>
+              </a:rPr>
+              <a:t>TABLE</a:t>
+            </a:r>
+            <a:r>
+              <a:rPr lang="en-GB" altLang="en-US" sz="611" dirty="0">
+                <a:solidFill>
+                  <a:schemeClr val="accent6"/>
+                </a:solidFill>
+                <a:latin typeface="Helvetica" panose="020B0604020202020204" pitchFamily="34" charset="0"/>
+              </a:rPr>
+              <a:t> </a:t>
+            </a:r>
+            <a:r>
+              <a:rPr lang="en-GB" altLang="en-US" sz="611" dirty="0" err="1">
+                <a:solidFill>
+                  <a:schemeClr val="accent6"/>
+                </a:solidFill>
+                <a:latin typeface="Helvetica" panose="020B0604020202020204" pitchFamily="34" charset="0"/>
+              </a:rPr>
+              <a:t>TABLE</a:t>
+            </a:r>
+            <a:r>
+              <a:rPr lang="en-GB" altLang="en-US" sz="611" dirty="0">
+                <a:solidFill>
+                  <a:schemeClr val="accent6"/>
+                </a:solidFill>
+                <a:latin typeface="Helvetica" panose="020B0604020202020204" pitchFamily="34" charset="0"/>
+              </a:rPr>
+              <a:t> </a:t>
+            </a:r>
+            <a:r>
+              <a:rPr lang="en-GB" altLang="en-US" sz="611" dirty="0" err="1">
+                <a:solidFill>
+                  <a:schemeClr val="accent6"/>
+                </a:solidFill>
+                <a:latin typeface="Helvetica" panose="020B0604020202020204" pitchFamily="34" charset="0"/>
+              </a:rPr>
+              <a:t>TABLE</a:t>
+            </a:r>
+            <a:r>
+              <a:rPr lang="en-GB" altLang="en-US" sz="611" dirty="0">
+                <a:solidFill>
+                  <a:schemeClr val="accent6"/>
+                </a:solidFill>
+                <a:latin typeface="Helvetica" panose="020B0604020202020204" pitchFamily="34" charset="0"/>
+              </a:rPr>
+              <a:t> </a:t>
+            </a:r>
+            <a:r>
+              <a:rPr lang="en-GB" altLang="en-US" sz="611" dirty="0" err="1">
+                <a:solidFill>
+                  <a:schemeClr val="accent6"/>
+                </a:solidFill>
+                <a:latin typeface="Helvetica" panose="020B0604020202020204" pitchFamily="34" charset="0"/>
+              </a:rPr>
+              <a:t>TABLE</a:t>
+            </a:r>
+            <a:r>
+              <a:rPr lang="en-GB" altLang="en-US" sz="611" dirty="0">
+                <a:solidFill>
+                  <a:schemeClr val="accent6"/>
+                </a:solidFill>
+                <a:latin typeface="Helvetica" panose="020B0604020202020204" pitchFamily="34" charset="0"/>
+              </a:rPr>
+              <a:t> </a:t>
+            </a:r>
+            <a:r>
+              <a:rPr lang="en-GB" altLang="en-US" sz="611" dirty="0" err="1">
+                <a:solidFill>
+                  <a:schemeClr val="accent6"/>
+                </a:solidFill>
+                <a:latin typeface="Helvetica" panose="020B0604020202020204" pitchFamily="34" charset="0"/>
+              </a:rPr>
+              <a:t>TABLE</a:t>
+            </a:r>
+            <a:r>
+              <a:rPr lang="en-GB" altLang="en-US" sz="611" dirty="0">
+                <a:solidFill>
+                  <a:schemeClr val="accent6"/>
+                </a:solidFill>
+                <a:latin typeface="Helvetica" panose="020B0604020202020204" pitchFamily="34" charset="0"/>
+              </a:rPr>
+              <a:t> </a:t>
+            </a:r>
+            <a:r>
+              <a:rPr lang="en-GB" altLang="en-US" sz="611" dirty="0" err="1">
+                <a:solidFill>
+                  <a:schemeClr val="accent6"/>
+                </a:solidFill>
+                <a:latin typeface="Helvetica" panose="020B0604020202020204" pitchFamily="34" charset="0"/>
+              </a:rPr>
+              <a:t>TABLE</a:t>
+            </a:r>
+            <a:r>
+              <a:rPr lang="en-GB" altLang="en-US" sz="611" dirty="0">
+                <a:solidFill>
+                  <a:schemeClr val="accent6"/>
+                </a:solidFill>
+                <a:latin typeface="Helvetica" panose="020B0604020202020204" pitchFamily="34" charset="0"/>
+              </a:rPr>
+              <a:t> </a:t>
+            </a:r>
+            <a:r>
+              <a:rPr lang="en-GB" altLang="en-US" sz="611" dirty="0" err="1">
+                <a:solidFill>
+                  <a:schemeClr val="accent6"/>
+                </a:solidFill>
+                <a:latin typeface="Helvetica" panose="020B0604020202020204" pitchFamily="34" charset="0"/>
+              </a:rPr>
+              <a:t>TABLE</a:t>
+            </a:r>
+            <a:r>
+              <a:rPr lang="en-GB" altLang="en-US" sz="611" dirty="0">
+                <a:solidFill>
+                  <a:schemeClr val="accent6"/>
+                </a:solidFill>
+                <a:latin typeface="Helvetica" panose="020B0604020202020204" pitchFamily="34" charset="0"/>
+              </a:rPr>
+              <a:t> </a:t>
+            </a:r>
+            <a:r>
+              <a:rPr lang="en-GB" altLang="en-US" sz="611" dirty="0" err="1">
+                <a:solidFill>
+                  <a:schemeClr val="accent6"/>
+                </a:solidFill>
+                <a:latin typeface="Helvetica" panose="020B0604020202020204" pitchFamily="34" charset="0"/>
+              </a:rPr>
+              <a:t>TABLE</a:t>
+            </a:r>
+            <a:r>
+              <a:rPr lang="en-GB" altLang="en-US" sz="611" dirty="0">
+                <a:solidFill>
+                  <a:schemeClr val="accent6"/>
+                </a:solidFill>
+                <a:latin typeface="Helvetica" panose="020B0604020202020204" pitchFamily="34" charset="0"/>
+              </a:rPr>
+              <a:t> </a:t>
+            </a:r>
+            <a:r>
+              <a:rPr lang="en-GB" altLang="en-US" sz="611" dirty="0" err="1">
+                <a:solidFill>
+                  <a:schemeClr val="accent6"/>
+                </a:solidFill>
+                <a:latin typeface="Helvetica" panose="020B0604020202020204" pitchFamily="34" charset="0"/>
+              </a:rPr>
+              <a:t>TABLE</a:t>
+            </a:r>
+            <a:endParaRPr lang="en-GB" altLang="en-US" sz="611" dirty="0">
+              <a:latin typeface="Helvetica" panose="020B0604020202020204" pitchFamily="34" charset="0"/>
+            </a:endParaRPr>
           </a:p>
         </p:txBody>
       </p:sp>
     </p:spTree>
     <p:extLst>
       <p:ext uri="{BB962C8B-B14F-4D97-AF65-F5344CB8AC3E}">
-        <p14:creationId xmlns:p14="http://schemas.microsoft.com/office/powerpoint/2010/main" val="1656774788"/>
+        <p14:creationId xmlns:p14="http://schemas.microsoft.com/office/powerpoint/2010/main" val="1641553891"/>
       </p:ext>
     </p:extLst>
   </p:cSld>
@@ -3384,6 +9413,321 @@
 </file>
 
 <file path=ppt/theme/theme1.xml><?xml version="1.0" encoding="utf-8"?>
+<a:theme xmlns:a="http://schemas.openxmlformats.org/drawingml/2006/main" name="Office Theme">
+  <a:themeElements>
+    <a:clrScheme name="Office Theme">
+      <a:dk1>
+        <a:sysClr val="windowText" lastClr="000000"/>
+      </a:dk1>
+      <a:lt1>
+        <a:sysClr val="window" lastClr="FFFFFF"/>
+      </a:lt1>
+      <a:dk2>
+        <a:srgbClr val="0E2841"/>
+      </a:dk2>
+      <a:lt2>
+        <a:srgbClr val="E8E8E8"/>
+      </a:lt2>
+      <a:accent1>
+        <a:srgbClr val="156082"/>
+      </a:accent1>
+      <a:accent2>
+        <a:srgbClr val="E97132"/>
+      </a:accent2>
+      <a:accent3>
+        <a:srgbClr val="196B24"/>
+      </a:accent3>
+      <a:accent4>
+        <a:srgbClr val="0F9ED5"/>
+      </a:accent4>
+      <a:accent5>
+        <a:srgbClr val="A02B93"/>
+      </a:accent5>
+      <a:accent6>
+        <a:srgbClr val="4EA72E"/>
+      </a:accent6>
+      <a:hlink>
+        <a:srgbClr val="467886"/>
+      </a:hlink>
+      <a:folHlink>
+        <a:srgbClr val="96607D"/>
+      </a:folHlink>
+    </a:clrScheme>
+    <a:fontScheme name="Office Theme">
+      <a:majorFont>
+        <a:latin typeface="Aptos Display" panose="02110004020202020204"/>
+        <a:ea typeface=""/>
+        <a:cs typeface=""/>
+        <a:font script="Jpan" typeface="游ゴシック Light"/>
+        <a:font script="Hang" typeface="맑은 고딕"/>
+        <a:font script="Hans" typeface="等线 Light"/>
+        <a:font script="Hant" typeface="新細明體"/>
+        <a:font script="Arab" typeface="Times New Roman"/>
+        <a:font script="Hebr" typeface="Times New Roman"/>
+        <a:font script="Thai" typeface="Angsana New"/>
+        <a:font script="Ethi" typeface="Nyala"/>
+        <a:font script="Beng" typeface="Vrinda"/>
+        <a:font script="Gujr" typeface="Shruti"/>
+        <a:font script="Khmr" typeface="MoolBoran"/>
+        <a:font script="Knda" typeface="Tunga"/>
+        <a:font script="Guru" typeface="Raavi"/>
+        <a:font script="Cans" typeface="Euphemia"/>
+        <a:font script="Cher" typeface="Plantagenet Cherokee"/>
+        <a:font script="Yiii" typeface="Microsoft Yi Baiti"/>
+        <a:font script="Tibt" typeface="Microsoft Himalaya"/>
+        <a:font script="Thaa" typeface="MV Boli"/>
+        <a:font script="Deva" typeface="Mangal"/>
+        <a:font script="Telu" typeface="Gautami"/>
+        <a:font script="Taml" typeface="Latha"/>
+        <a:font script="Syrc" typeface="Estrangelo Edessa"/>
+        <a:font script="Orya" typeface="Kalinga"/>
+        <a:font script="Mlym" typeface="Kartika"/>
+        <a:font script="Laoo" typeface="DokChampa"/>
+        <a:font script="Sinh" typeface="Iskoola Pota"/>
+        <a:font script="Mong" typeface="Mongolian Baiti"/>
+        <a:font script="Viet" typeface="Times New Roman"/>
+        <a:font script="Uigh" typeface="Microsoft Uighur"/>
+        <a:font script="Geor" typeface="Sylfaen"/>
+        <a:font script="Armn" typeface="Arial"/>
+        <a:font script="Bugi" typeface="Leelawadee UI"/>
+        <a:font script="Bopo" typeface="Microsoft JhengHei"/>
+        <a:font script="Java" typeface="Javanese Text"/>
+        <a:font script="Lisu" typeface="Segoe UI"/>
+        <a:font script="Mymr" typeface="Myanmar Text"/>
+        <a:font script="Nkoo" typeface="Ebrima"/>
+        <a:font script="Olck" typeface="Nirmala UI"/>
+        <a:font script="Osma" typeface="Ebrima"/>
+        <a:font script="Phag" typeface="Phagspa"/>
+        <a:font script="Syrn" typeface="Estrangelo Edessa"/>
+        <a:font script="Syrj" typeface="Estrangelo Edessa"/>
+        <a:font script="Syre" typeface="Estrangelo Edessa"/>
+        <a:font script="Sora" typeface="Nirmala UI"/>
+        <a:font script="Tale" typeface="Microsoft Tai Le"/>
+        <a:font script="Talu" typeface="Microsoft New Tai Lue"/>
+        <a:font script="Tfng" typeface="Ebrima"/>
+      </a:majorFont>
+      <a:minorFont>
+        <a:latin typeface="Aptos" panose="02110004020202020204"/>
+        <a:ea typeface=""/>
+        <a:cs typeface=""/>
+        <a:font script="Jpan" typeface="游ゴシック"/>
+        <a:font script="Hang" typeface="맑은 고딕"/>
+        <a:font script="Hans" typeface="等线"/>
+        <a:font script="Hant" typeface="新細明體"/>
+        <a:font script="Arab" typeface="Arial"/>
+        <a:font script="Hebr" typeface="Arial"/>
+        <a:font script="Thai" typeface="Cordia New"/>
+        <a:font script="Ethi" typeface="Nyala"/>
+        <a:font script="Beng" typeface="Vrinda"/>
+        <a:font script="Gujr" typeface="Shruti"/>
+        <a:font script="Khmr" typeface="DaunPenh"/>
+        <a:font script="Knda" typeface="Tunga"/>
+        <a:font script="Guru" typeface="Raavi"/>
+        <a:font script="Cans" typeface="Euphemia"/>
+        <a:font script="Cher" typeface="Plantagenet Cherokee"/>
+        <a:font script="Yiii" typeface="Microsoft Yi Baiti"/>
+        <a:font script="Tibt" typeface="Microsoft Himalaya"/>
+        <a:font script="Thaa" typeface="MV Boli"/>
+        <a:font script="Deva" typeface="Mangal"/>
+        <a:font script="Telu" typeface="Gautami"/>
+        <a:font script="Taml" typeface="Latha"/>
+        <a:font script="Syrc" typeface="Estrangelo Edessa"/>
+        <a:font script="Orya" typeface="Kalinga"/>
+        <a:font script="Mlym" typeface="Kartika"/>
+        <a:font script="Laoo" typeface="DokChampa"/>
+        <a:font script="Sinh" typeface="Iskoola Pota"/>
+        <a:font script="Mong" typeface="Mongolian Baiti"/>
+        <a:font script="Viet" typeface="Arial"/>
+        <a:font script="Uigh" typeface="Microsoft Uighur"/>
+        <a:font script="Geor" typeface="Sylfaen"/>
+        <a:font script="Armn" typeface="Arial"/>
+        <a:font script="Bugi" typeface="Leelawadee UI"/>
+        <a:font script="Bopo" typeface="Microsoft JhengHei"/>
+        <a:font script="Java" typeface="Javanese Text"/>
+        <a:font script="Lisu" typeface="Segoe UI"/>
+        <a:font script="Mymr" typeface="Myanmar Text"/>
+        <a:font script="Nkoo" typeface="Ebrima"/>
+        <a:font script="Olck" typeface="Nirmala UI"/>
+        <a:font script="Osma" typeface="Ebrima"/>
+        <a:font script="Phag" typeface="Phagspa"/>
+        <a:font script="Syrn" typeface="Estrangelo Edessa"/>
+        <a:font script="Syrj" typeface="Estrangelo Edessa"/>
+        <a:font script="Syre" typeface="Estrangelo Edessa"/>
+        <a:font script="Sora" typeface="Nirmala UI"/>
+        <a:font script="Tale" typeface="Microsoft Tai Le"/>
+        <a:font script="Talu" typeface="Microsoft New Tai Lue"/>
+        <a:font script="Tfng" typeface="Ebrima"/>
+      </a:minorFont>
+    </a:fontScheme>
+    <a:fmtScheme name="Office Theme">
+      <a:fillStyleLst>
+        <a:solidFill>
+          <a:schemeClr val="phClr"/>
+        </a:solidFill>
+        <a:gradFill rotWithShape="1">
+          <a:gsLst>
+            <a:gs pos="0">
+              <a:schemeClr val="phClr">
+                <a:lumMod val="110000"/>
+                <a:satMod val="105000"/>
+                <a:tint val="67000"/>
+              </a:schemeClr>
+            </a:gs>
+            <a:gs pos="50000">
+              <a:schemeClr val="phClr">
+                <a:lumMod val="105000"/>
+                <a:satMod val="103000"/>
+                <a:tint val="73000"/>
+              </a:schemeClr>
+            </a:gs>
+            <a:gs pos="100000">
+              <a:schemeClr val="phClr">
+                <a:lumMod val="105000"/>
+                <a:satMod val="109000"/>
+                <a:tint val="81000"/>
+              </a:schemeClr>
+            </a:gs>
+          </a:gsLst>
+          <a:lin ang="5400000" scaled="0"/>
+        </a:gradFill>
+        <a:gradFill rotWithShape="1">
+          <a:gsLst>
+            <a:gs pos="0">
+              <a:schemeClr val="phClr">
+                <a:satMod val="103000"/>
+                <a:lumMod val="102000"/>
+                <a:tint val="94000"/>
+              </a:schemeClr>
+            </a:gs>
+            <a:gs pos="50000">
+              <a:schemeClr val="phClr">
+                <a:satMod val="110000"/>
+                <a:lumMod val="100000"/>
+                <a:shade val="100000"/>
+              </a:schemeClr>
+            </a:gs>
+            <a:gs pos="100000">
+              <a:schemeClr val="phClr">
+                <a:lumMod val="99000"/>
+                <a:satMod val="120000"/>
+                <a:shade val="78000"/>
+              </a:schemeClr>
+            </a:gs>
+          </a:gsLst>
+          <a:lin ang="5400000" scaled="0"/>
+        </a:gradFill>
+      </a:fillStyleLst>
+      <a:lnStyleLst>
+        <a:ln w="12700" cap="flat" cmpd="sng" algn="ctr">
+          <a:solidFill>
+            <a:schemeClr val="phClr"/>
+          </a:solidFill>
+          <a:prstDash val="solid"/>
+          <a:miter lim="800000"/>
+        </a:ln>
+        <a:ln w="19050" cap="flat" cmpd="sng" algn="ctr">
+          <a:solidFill>
+            <a:schemeClr val="phClr"/>
+          </a:solidFill>
+          <a:prstDash val="solid"/>
+          <a:miter lim="800000"/>
+        </a:ln>
+        <a:ln w="25400" cap="flat" cmpd="sng" algn="ctr">
+          <a:solidFill>
+            <a:schemeClr val="phClr"/>
+          </a:solidFill>
+          <a:prstDash val="solid"/>
+          <a:miter lim="800000"/>
+        </a:ln>
+      </a:lnStyleLst>
+      <a:effectStyleLst>
+        <a:effectStyle>
+          <a:effectLst/>
+        </a:effectStyle>
+        <a:effectStyle>
+          <a:effectLst/>
+        </a:effectStyle>
+        <a:effectStyle>
+          <a:effectLst>
+            <a:outerShdw blurRad="57150" dist="19050" dir="5400000" algn="ctr" rotWithShape="0">
+              <a:srgbClr val="000000">
+                <a:alpha val="63000"/>
+              </a:srgbClr>
+            </a:outerShdw>
+          </a:effectLst>
+        </a:effectStyle>
+      </a:effectStyleLst>
+      <a:bgFillStyleLst>
+        <a:solidFill>
+          <a:schemeClr val="phClr"/>
+        </a:solidFill>
+        <a:solidFill>
+          <a:schemeClr val="phClr">
+            <a:tint val="95000"/>
+            <a:satMod val="170000"/>
+          </a:schemeClr>
+        </a:solidFill>
+        <a:gradFill rotWithShape="1">
+          <a:gsLst>
+            <a:gs pos="0">
+              <a:schemeClr val="phClr">
+                <a:tint val="93000"/>
+                <a:satMod val="150000"/>
+                <a:shade val="98000"/>
+                <a:lumMod val="102000"/>
+              </a:schemeClr>
+            </a:gs>
+            <a:gs pos="50000">
+              <a:schemeClr val="phClr">
+                <a:tint val="98000"/>
+                <a:satMod val="130000"/>
+                <a:shade val="90000"/>
+                <a:lumMod val="103000"/>
+              </a:schemeClr>
+            </a:gs>
+            <a:gs pos="100000">
+              <a:schemeClr val="phClr">
+                <a:shade val="63000"/>
+                <a:satMod val="120000"/>
+              </a:schemeClr>
+            </a:gs>
+          </a:gsLst>
+          <a:lin ang="5400000" scaled="0"/>
+        </a:gradFill>
+      </a:bgFillStyleLst>
+    </a:fmtScheme>
+  </a:themeElements>
+  <a:objectDefaults>
+    <a:lnDef>
+      <a:spPr/>
+      <a:bodyPr/>
+      <a:lstStyle/>
+      <a:style>
+        <a:lnRef idx="2">
+          <a:schemeClr val="accent1"/>
+        </a:lnRef>
+        <a:fillRef idx="0">
+          <a:schemeClr val="accent1"/>
+        </a:fillRef>
+        <a:effectRef idx="1">
+          <a:schemeClr val="accent1"/>
+        </a:effectRef>
+        <a:fontRef idx="minor">
+          <a:schemeClr val="tx1"/>
+        </a:fontRef>
+      </a:style>
+    </a:lnDef>
+  </a:objectDefaults>
+  <a:extraClrSchemeLst/>
+  <a:extLst>
+    <a:ext uri="{05A4C25C-085E-4340-85A3-A5531E510DB2}">
+      <thm15:themeFamily xmlns:thm15="http://schemas.microsoft.com/office/thememl/2012/main" name="Office Theme" id="{2E142A2C-CD16-42D6-873A-C26D2A0506FA}" vid="{1BDDFF52-6CD6-40A5-AB3C-68EB2F1E4D0A}"/>
+    </a:ext>
+  </a:extLst>
+</a:theme>
+</file>
+
+<file path=ppt/theme/theme2.xml><?xml version="1.0" encoding="utf-8"?>
 <a:theme xmlns:a="http://schemas.openxmlformats.org/drawingml/2006/main" name="Office Theme">
   <a:themeElements>
     <a:clrScheme name="Office">
